--- a/reports/6g-data-fabric-section-23-deck.pptx
+++ b/reports/6g-data-fabric-section-23-deck.pptx
@@ -4336,14 +4336,100 @@
       </p:sp>
       <p:sp>
         <p:nvSpPr>
-          <p:cNvPr id="31" name="Rounded Rectangle 30"/>
+          <p:cNvPr id="31" name="Rectangle 30"/>
           <p:cNvSpPr/>
           <p:nvPr/>
         </p:nvSpPr>
         <p:spPr>
           <a:xfrm>
-            <a:off x="4279392" y="2788920"/>
-            <a:ext cx="1572768" cy="1417320"/>
+            <a:off x="4187952" y="1572768"/>
+            <a:ext cx="41148" cy="3493008"/>
+          </a:xfrm>
+          <a:prstGeom prst="rect">
+            <a:avLst/>
+          </a:prstGeom>
+          <a:solidFill>
+            <a:srgbClr val="0E7C7B"/>
+          </a:solidFill>
+          <a:ln>
+            <a:noFill/>
+          </a:ln>
+        </p:spPr>
+        <p:style>
+          <a:lnRef idx="1">
+            <a:schemeClr val="accent1"/>
+          </a:lnRef>
+          <a:fillRef idx="3">
+            <a:schemeClr val="accent1"/>
+          </a:fillRef>
+          <a:effectRef idx="2">
+            <a:schemeClr val="accent1"/>
+          </a:effectRef>
+          <a:fontRef idx="minor">
+            <a:schemeClr val="lt1"/>
+          </a:fontRef>
+        </p:style>
+        <p:txBody>
+          <a:bodyPr rtlCol="0" anchor="ctr"/>
+          <a:lstStyle/>
+          <a:p>
+            <a:pPr algn="ctr"/>
+          </a:p>
+        </p:txBody>
+      </p:sp>
+      <p:sp>
+        <p:nvSpPr>
+          <p:cNvPr id="32" name="Right Arrow 31"/>
+          <p:cNvSpPr/>
+          <p:nvPr/>
+        </p:nvSpPr>
+        <p:spPr>
+          <a:xfrm>
+            <a:off x="4187952" y="3273552"/>
+            <a:ext cx="219456" cy="201168"/>
+          </a:xfrm>
+          <a:prstGeom prst="rightArrow">
+            <a:avLst/>
+          </a:prstGeom>
+          <a:solidFill>
+            <a:srgbClr val="0E7C7B"/>
+          </a:solidFill>
+          <a:ln>
+            <a:noFill/>
+          </a:ln>
+        </p:spPr>
+        <p:style>
+          <a:lnRef idx="1">
+            <a:schemeClr val="accent1"/>
+          </a:lnRef>
+          <a:fillRef idx="3">
+            <a:schemeClr val="accent1"/>
+          </a:fillRef>
+          <a:effectRef idx="2">
+            <a:schemeClr val="accent1"/>
+          </a:effectRef>
+          <a:fontRef idx="minor">
+            <a:schemeClr val="lt1"/>
+          </a:fontRef>
+        </p:style>
+        <p:txBody>
+          <a:bodyPr rtlCol="0" anchor="ctr"/>
+          <a:lstStyle/>
+          <a:p>
+            <a:pPr algn="ctr"/>
+          </a:p>
+        </p:txBody>
+      </p:sp>
+      <p:sp>
+        <p:nvSpPr>
+          <p:cNvPr id="33" name="Rounded Rectangle 32"/>
+          <p:cNvSpPr/>
+          <p:nvPr/>
+        </p:nvSpPr>
+        <p:spPr>
+          <a:xfrm>
+            <a:off x="4443984" y="2816352"/>
+            <a:ext cx="1335024" cy="1298448"/>
           </a:xfrm>
           <a:prstGeom prst="roundRect">
             <a:avLst/>
@@ -4379,14 +4465,14 @@
       </p:sp>
       <p:sp>
         <p:nvSpPr>
-          <p:cNvPr id="32" name="TextBox 31"/>
+          <p:cNvPr id="34" name="TextBox 33"/>
           <p:cNvSpPr txBox="1"/>
           <p:nvPr/>
         </p:nvSpPr>
         <p:spPr>
           <a:xfrm>
-            <a:off x="4370832" y="2999232"/>
-            <a:ext cx="1389888" cy="1005840"/>
+            <a:off x="4498848" y="2999232"/>
+            <a:ext cx="1225296" cy="950976"/>
           </a:xfrm>
           <a:prstGeom prst="rect">
             <a:avLst/>
@@ -4440,14 +4526,14 @@
       </p:sp>
       <p:sp>
         <p:nvSpPr>
-          <p:cNvPr id="33" name="Right Arrow 32"/>
+          <p:cNvPr id="35" name="Right Arrow 34"/>
           <p:cNvSpPr/>
           <p:nvPr/>
         </p:nvSpPr>
         <p:spPr>
           <a:xfrm>
-            <a:off x="4279392" y="2331720"/>
-            <a:ext cx="1572768" cy="256032"/>
+            <a:off x="5815584" y="3273552"/>
+            <a:ext cx="182880" cy="201168"/>
           </a:xfrm>
           <a:prstGeom prst="rightArrow">
             <a:avLst/>
@@ -4483,50 +4569,7 @@
       </p:sp>
       <p:sp>
         <p:nvSpPr>
-          <p:cNvPr id="34" name="Right Arrow 33"/>
-          <p:cNvSpPr/>
-          <p:nvPr/>
-        </p:nvSpPr>
-        <p:spPr>
-          <a:xfrm>
-            <a:off x="4279392" y="4370832"/>
-            <a:ext cx="1572768" cy="256032"/>
-          </a:xfrm>
-          <a:prstGeom prst="rightArrow">
-            <a:avLst/>
-          </a:prstGeom>
-          <a:solidFill>
-            <a:srgbClr val="0E7C7B"/>
-          </a:solidFill>
-          <a:ln>
-            <a:noFill/>
-          </a:ln>
-        </p:spPr>
-        <p:style>
-          <a:lnRef idx="1">
-            <a:schemeClr val="accent1"/>
-          </a:lnRef>
-          <a:fillRef idx="3">
-            <a:schemeClr val="accent1"/>
-          </a:fillRef>
-          <a:effectRef idx="2">
-            <a:schemeClr val="accent1"/>
-          </a:effectRef>
-          <a:fontRef idx="minor">
-            <a:schemeClr val="lt1"/>
-          </a:fontRef>
-        </p:style>
-        <p:txBody>
-          <a:bodyPr rtlCol="0" anchor="ctr"/>
-          <a:lstStyle/>
-          <a:p>
-            <a:pPr algn="ctr"/>
-          </a:p>
-        </p:txBody>
-      </p:sp>
-      <p:sp>
-        <p:nvSpPr>
-          <p:cNvPr id="35" name="Rounded Rectangle 34"/>
+          <p:cNvPr id="36" name="Rounded Rectangle 35"/>
           <p:cNvSpPr/>
           <p:nvPr/>
         </p:nvSpPr>
@@ -4571,7 +4614,7 @@
       </p:sp>
       <p:sp>
         <p:nvSpPr>
-          <p:cNvPr id="36" name="Rectangle 35"/>
+          <p:cNvPr id="37" name="Rectangle 36"/>
           <p:cNvSpPr/>
           <p:nvPr/>
         </p:nvSpPr>
@@ -4614,7 +4657,7 @@
       </p:sp>
       <p:sp>
         <p:nvSpPr>
-          <p:cNvPr id="37" name="TextBox 36"/>
+          <p:cNvPr id="38" name="TextBox 37"/>
           <p:cNvSpPr txBox="1"/>
           <p:nvPr/>
         </p:nvSpPr>
@@ -4655,7 +4698,7 @@
       </p:sp>
       <p:sp>
         <p:nvSpPr>
-          <p:cNvPr id="38" name="TextBox 37"/>
+          <p:cNvPr id="39" name="TextBox 38"/>
           <p:cNvSpPr txBox="1"/>
           <p:nvPr/>
         </p:nvSpPr>
@@ -4696,7 +4739,7 @@
       </p:sp>
       <p:sp>
         <p:nvSpPr>
-          <p:cNvPr id="39" name="TextBox 38"/>
+          <p:cNvPr id="40" name="TextBox 39"/>
           <p:cNvSpPr txBox="1"/>
           <p:nvPr/>
         </p:nvSpPr>
@@ -4737,7 +4780,7 @@
       </p:sp>
       <p:sp>
         <p:nvSpPr>
-          <p:cNvPr id="40" name="Rounded Rectangle 39"/>
+          <p:cNvPr id="41" name="Rounded Rectangle 40"/>
           <p:cNvSpPr/>
           <p:nvPr/>
         </p:nvSpPr>
@@ -4782,7 +4825,7 @@
       </p:sp>
       <p:sp>
         <p:nvSpPr>
-          <p:cNvPr id="41" name="Rectangle 40"/>
+          <p:cNvPr id="42" name="Rectangle 41"/>
           <p:cNvSpPr/>
           <p:nvPr/>
         </p:nvSpPr>
@@ -4825,7 +4868,7 @@
       </p:sp>
       <p:sp>
         <p:nvSpPr>
-          <p:cNvPr id="42" name="TextBox 41"/>
+          <p:cNvPr id="43" name="TextBox 42"/>
           <p:cNvSpPr txBox="1"/>
           <p:nvPr/>
         </p:nvSpPr>
@@ -4866,7 +4909,7 @@
       </p:sp>
       <p:sp>
         <p:nvSpPr>
-          <p:cNvPr id="43" name="TextBox 42"/>
+          <p:cNvPr id="44" name="TextBox 43"/>
           <p:cNvSpPr txBox="1"/>
           <p:nvPr/>
         </p:nvSpPr>
@@ -4907,7 +4950,7 @@
       </p:sp>
       <p:sp>
         <p:nvSpPr>
-          <p:cNvPr id="44" name="TextBox 43"/>
+          <p:cNvPr id="45" name="TextBox 44"/>
           <p:cNvSpPr txBox="1"/>
           <p:nvPr/>
         </p:nvSpPr>
@@ -4948,7 +4991,7 @@
       </p:sp>
       <p:sp>
         <p:nvSpPr>
-          <p:cNvPr id="45" name="Rounded Rectangle 44"/>
+          <p:cNvPr id="46" name="Rounded Rectangle 45"/>
           <p:cNvSpPr/>
           <p:nvPr/>
         </p:nvSpPr>
@@ -4993,7 +5036,7 @@
       </p:sp>
       <p:sp>
         <p:nvSpPr>
-          <p:cNvPr id="46" name="Rectangle 45"/>
+          <p:cNvPr id="47" name="Rectangle 46"/>
           <p:cNvSpPr/>
           <p:nvPr/>
         </p:nvSpPr>
@@ -5036,7 +5079,7 @@
       </p:sp>
       <p:sp>
         <p:nvSpPr>
-          <p:cNvPr id="47" name="TextBox 46"/>
+          <p:cNvPr id="48" name="TextBox 47"/>
           <p:cNvSpPr txBox="1"/>
           <p:nvPr/>
         </p:nvSpPr>
@@ -5077,7 +5120,7 @@
       </p:sp>
       <p:sp>
         <p:nvSpPr>
-          <p:cNvPr id="48" name="TextBox 47"/>
+          <p:cNvPr id="49" name="TextBox 48"/>
           <p:cNvSpPr txBox="1"/>
           <p:nvPr/>
         </p:nvSpPr>
@@ -5118,7 +5161,7 @@
       </p:sp>
       <p:sp>
         <p:nvSpPr>
-          <p:cNvPr id="49" name="TextBox 48"/>
+          <p:cNvPr id="50" name="TextBox 49"/>
           <p:cNvSpPr txBox="1"/>
           <p:nvPr/>
         </p:nvSpPr>
@@ -5159,7 +5202,7 @@
       </p:sp>
       <p:sp>
         <p:nvSpPr>
-          <p:cNvPr id="50" name="Rounded Rectangle 49"/>
+          <p:cNvPr id="51" name="Rounded Rectangle 50"/>
           <p:cNvSpPr/>
           <p:nvPr/>
         </p:nvSpPr>
@@ -5204,7 +5247,7 @@
       </p:sp>
       <p:sp>
         <p:nvSpPr>
-          <p:cNvPr id="51" name="TextBox 50"/>
+          <p:cNvPr id="52" name="TextBox 51"/>
           <p:cNvSpPr txBox="1"/>
           <p:nvPr/>
         </p:nvSpPr>
@@ -5245,7 +5288,7 @@
       </p:sp>
       <p:sp>
         <p:nvSpPr>
-          <p:cNvPr id="52" name="Rounded Rectangle 51"/>
+          <p:cNvPr id="53" name="Rounded Rectangle 52"/>
           <p:cNvSpPr/>
           <p:nvPr/>
         </p:nvSpPr>
@@ -5288,7 +5331,7 @@
       </p:sp>
       <p:sp>
         <p:nvSpPr>
-          <p:cNvPr id="53" name="TextBox 52"/>
+          <p:cNvPr id="54" name="TextBox 53"/>
           <p:cNvSpPr txBox="1"/>
           <p:nvPr/>
         </p:nvSpPr>
@@ -5329,7 +5372,7 @@
       </p:sp>
       <p:sp>
         <p:nvSpPr>
-          <p:cNvPr id="54" name="Rounded Rectangle 53"/>
+          <p:cNvPr id="55" name="Rounded Rectangle 54"/>
           <p:cNvSpPr/>
           <p:nvPr/>
         </p:nvSpPr>
@@ -5372,7 +5415,7 @@
       </p:sp>
       <p:sp>
         <p:nvSpPr>
-          <p:cNvPr id="55" name="TextBox 54"/>
+          <p:cNvPr id="56" name="TextBox 55"/>
           <p:cNvSpPr txBox="1"/>
           <p:nvPr/>
         </p:nvSpPr>
@@ -5413,7 +5456,7 @@
       </p:sp>
       <p:sp>
         <p:nvSpPr>
-          <p:cNvPr id="56" name="Rounded Rectangle 55"/>
+          <p:cNvPr id="57" name="Rounded Rectangle 56"/>
           <p:cNvSpPr/>
           <p:nvPr/>
         </p:nvSpPr>
@@ -5456,7 +5499,7 @@
       </p:sp>
       <p:sp>
         <p:nvSpPr>
-          <p:cNvPr id="57" name="TextBox 56"/>
+          <p:cNvPr id="58" name="TextBox 57"/>
           <p:cNvSpPr txBox="1"/>
           <p:nvPr/>
         </p:nvSpPr>
@@ -5497,7 +5540,7 @@
       </p:sp>
       <p:sp>
         <p:nvSpPr>
-          <p:cNvPr id="58" name="Rounded Rectangle 57"/>
+          <p:cNvPr id="59" name="Rounded Rectangle 58"/>
           <p:cNvSpPr/>
           <p:nvPr/>
         </p:nvSpPr>
@@ -5540,7 +5583,7 @@
       </p:sp>
       <p:sp>
         <p:nvSpPr>
-          <p:cNvPr id="59" name="TextBox 58"/>
+          <p:cNvPr id="60" name="TextBox 59"/>
           <p:cNvSpPr txBox="1"/>
           <p:nvPr/>
         </p:nvSpPr>
@@ -5581,7 +5624,7 @@
       </p:sp>
       <p:sp>
         <p:nvSpPr>
-          <p:cNvPr id="60" name="Rectangle 59"/>
+          <p:cNvPr id="61" name="Rectangle 60"/>
           <p:cNvSpPr/>
           <p:nvPr/>
         </p:nvSpPr>
@@ -5624,7 +5667,7 @@
       </p:sp>
       <p:sp>
         <p:nvSpPr>
-          <p:cNvPr id="61" name="TextBox 60"/>
+          <p:cNvPr id="62" name="TextBox 61"/>
           <p:cNvSpPr txBox="1"/>
           <p:nvPr/>
         </p:nvSpPr>
@@ -5665,7 +5708,7 @@
       </p:sp>
       <p:sp>
         <p:nvSpPr>
-          <p:cNvPr id="62" name="TextBox 61"/>
+          <p:cNvPr id="63" name="TextBox 62"/>
           <p:cNvSpPr txBox="1"/>
           <p:nvPr/>
         </p:nvSpPr>
@@ -5963,7 +6006,7 @@
         </p:nvSpPr>
         <p:spPr>
           <a:xfrm>
-            <a:off x="347472" y="4462272"/>
+            <a:off x="347472" y="1353312"/>
             <a:ext cx="6583680" cy="1389888"/>
           </a:xfrm>
           <a:prstGeom prst="roundRect">
@@ -6006,7 +6049,7 @@
         </p:nvSpPr>
         <p:spPr>
           <a:xfrm>
-            <a:off x="512064" y="4535424"/>
+            <a:off x="512064" y="1426464"/>
             <a:ext cx="6254496" cy="182880"/>
           </a:xfrm>
           <a:prstGeom prst="rect">
@@ -6047,7 +6090,7 @@
         </p:nvSpPr>
         <p:spPr>
           <a:xfrm>
-            <a:off x="512064" y="4718304"/>
+            <a:off x="512064" y="1609344"/>
             <a:ext cx="6254496" cy="256032"/>
           </a:xfrm>
           <a:prstGeom prst="rect">
@@ -6088,7 +6131,7 @@
         </p:nvSpPr>
         <p:spPr>
           <a:xfrm>
-            <a:off x="512064" y="4992624"/>
+            <a:off x="512064" y="1883664"/>
             <a:ext cx="6254496" cy="768096"/>
           </a:xfrm>
           <a:prstGeom prst="rect">
@@ -6295,7 +6338,7 @@
         </p:nvSpPr>
         <p:spPr>
           <a:xfrm>
-            <a:off x="347472" y="1353312"/>
+            <a:off x="347472" y="4462272"/>
             <a:ext cx="6583680" cy="1389888"/>
           </a:xfrm>
           <a:prstGeom prst="roundRect">
@@ -6338,7 +6381,7 @@
         </p:nvSpPr>
         <p:spPr>
           <a:xfrm>
-            <a:off x="512064" y="1426464"/>
+            <a:off x="512064" y="4535424"/>
             <a:ext cx="6254496" cy="182880"/>
           </a:xfrm>
           <a:prstGeom prst="rect">
@@ -6379,7 +6422,7 @@
         </p:nvSpPr>
         <p:spPr>
           <a:xfrm>
-            <a:off x="512064" y="1609344"/>
+            <a:off x="512064" y="4718304"/>
             <a:ext cx="6254496" cy="256032"/>
           </a:xfrm>
           <a:prstGeom prst="rect">
@@ -6420,7 +6463,7 @@
         </p:nvSpPr>
         <p:spPr>
           <a:xfrm>
-            <a:off x="512064" y="1883664"/>
+            <a:off x="512064" y="4992624"/>
             <a:ext cx="6254496" cy="768096"/>
           </a:xfrm>
           <a:prstGeom prst="rect">

--- a/reports/6g-data-fabric-section-23-deck.pptx
+++ b/reports/6g-data-fabric-section-23-deck.pptx
@@ -3270,7 +3270,7 @@
         <p:spPr>
           <a:xfrm>
             <a:off x="347472" y="640080"/>
-            <a:ext cx="11475720" cy="420624"/>
+            <a:ext cx="11475720" cy="493776"/>
           </a:xfrm>
           <a:prstGeom prst="roundRect">
             <a:avLst/>
@@ -3304,10 +3304,10 @@
           <a:p>
             <a:pPr algn="l">
               <a:lnSpc>
-                <a:spcPct val="105000"/>
+                <a:spcPct val="104000"/>
               </a:lnSpc>
               <a:spcBef>
-                <a:spcPts val="300"/>
+                <a:spcPts val="200"/>
               </a:spcBef>
               <a:spcAft>
                 <a:spcPts val="100"/>
@@ -3321,7 +3321,7 @@
                 <a:latin typeface="WenQuanYi Micro Hei"/>
                 <a:ea typeface="WenQuanYi Micro Hei"/>
               </a:rPr>
-              <a:t>三条路线是不同起点，不是“谁更接近Fabric”的排名；它们分别优先解决低风险演进、近源执行与产品化速度。</a:t>
+              <a:t>三条路线来自同一组架构矛盾，不是对Fabric理解不同，更不是成熟度阶梯。Ericsson优先低风险演进，Huawei优先近源执行，Nokia优先产品化速度；真正要比较的是控制权放在哪里、以什么代价换什么优势。</a:t>
             </a:r>
           </a:p>
         </p:txBody>
@@ -3334,8 +3334,8 @@
         </p:nvSpPr>
         <p:spPr>
           <a:xfrm>
-            <a:off x="347472" y="1170432"/>
-            <a:ext cx="3794760" cy="950976"/>
+            <a:off x="347472" y="1207008"/>
+            <a:ext cx="3794760" cy="914400"/>
           </a:xfrm>
           <a:prstGeom prst="roundRect">
             <a:avLst/>
@@ -3463,8 +3463,8 @@
         </p:nvSpPr>
         <p:spPr>
           <a:xfrm>
-            <a:off x="768096" y="1243584"/>
-            <a:ext cx="3246120" cy="164592"/>
+            <a:off x="768096" y="1252728"/>
+            <a:ext cx="3246120" cy="146304"/>
           </a:xfrm>
           <a:prstGeom prst="rect">
             <a:avLst/>
@@ -3504,8 +3504,8 @@
         </p:nvSpPr>
         <p:spPr>
           <a:xfrm>
-            <a:off x="768096" y="1408176"/>
-            <a:ext cx="3246120" cy="219456"/>
+            <a:off x="768096" y="1399032"/>
+            <a:ext cx="3246120" cy="182880"/>
           </a:xfrm>
           <a:prstGeom prst="rect">
             <a:avLst/>
@@ -3525,7 +3525,7 @@
               </a:spcAft>
             </a:pPr>
             <a:r>
-              <a:rPr sz="1300" b="1">
+              <a:rPr sz="1200" b="1">
                 <a:solidFill>
                   <a:srgbClr val="0B1F3A"/>
                 </a:solidFill>
@@ -3545,8 +3545,8 @@
         </p:nvSpPr>
         <p:spPr>
           <a:xfrm>
-            <a:off x="457200" y="1664208"/>
-            <a:ext cx="3538728" cy="402336"/>
+            <a:off x="457200" y="1591056"/>
+            <a:ext cx="3538728" cy="493776"/>
           </a:xfrm>
           <a:prstGeom prst="rect">
             <a:avLst/>
@@ -3559,21 +3559,21 @@
           <a:p>
             <a:pPr algn="l">
               <a:lnSpc>
-                <a:spcPct val="104000"/>
-              </a:lnSpc>
-              <a:spcAft>
-                <a:spcPts val="100"/>
-              </a:spcAft>
-            </a:pPr>
-            <a:r>
-              <a:rPr sz="1000" b="0">
+                <a:spcPct val="102000"/>
+              </a:lnSpc>
+              <a:spcAft>
+                <a:spcPts val="100"/>
+              </a:spcAft>
+            </a:pPr>
+            <a:r>
+              <a:rPr sz="950" b="0">
                 <a:solidFill>
                   <a:srgbClr val="2C3E50"/>
                 </a:solidFill>
                 <a:latin typeface="WenQuanYi Micro Hei"/>
                 <a:ea typeface="WenQuanYi Micro Hei"/>
               </a:rPr>
-              <a:t>无线状态、移动性和断链生存，要求毫秒执行留在网元、边缘或域控制器。</a:t>
+              <a:t>无线状态、移动性和断链生存，要求毫秒执行留在网元、边缘或域控制器。把快环事实外移到远端平台，会同时失去时延和故障域。</a:t>
             </a:r>
           </a:p>
         </p:txBody>
@@ -3587,7 +3587,7 @@
         <p:spPr>
           <a:xfrm>
             <a:off x="347472" y="2194560"/>
-            <a:ext cx="3794760" cy="950976"/>
+            <a:ext cx="3794760" cy="914400"/>
           </a:xfrm>
           <a:prstGeom prst="roundRect">
             <a:avLst/>
@@ -3631,7 +3631,7 @@
         </p:nvSpPr>
         <p:spPr>
           <a:xfrm>
-            <a:off x="457200" y="2304288"/>
+            <a:off x="457200" y="2267712"/>
             <a:ext cx="237744" cy="237744"/>
           </a:xfrm>
           <a:prstGeom prst="ellipse">
@@ -3674,7 +3674,7 @@
         </p:nvSpPr>
         <p:spPr>
           <a:xfrm>
-            <a:off x="457200" y="2313432"/>
+            <a:off x="457200" y="2276856"/>
             <a:ext cx="237744" cy="219456"/>
           </a:xfrm>
           <a:prstGeom prst="rect">
@@ -3715,8 +3715,8 @@
         </p:nvSpPr>
         <p:spPr>
           <a:xfrm>
-            <a:off x="768096" y="2267712"/>
-            <a:ext cx="3246120" cy="164592"/>
+            <a:off x="768096" y="2240280"/>
+            <a:ext cx="3246120" cy="146304"/>
           </a:xfrm>
           <a:prstGeom prst="rect">
             <a:avLst/>
@@ -3756,8 +3756,8 @@
         </p:nvSpPr>
         <p:spPr>
           <a:xfrm>
-            <a:off x="768096" y="2432304"/>
-            <a:ext cx="3246120" cy="219456"/>
+            <a:off x="768096" y="2386584"/>
+            <a:ext cx="3246120" cy="182880"/>
           </a:xfrm>
           <a:prstGeom prst="rect">
             <a:avLst/>
@@ -3777,7 +3777,7 @@
               </a:spcAft>
             </a:pPr>
             <a:r>
-              <a:rPr sz="1300" b="1">
+              <a:rPr sz="1200" b="1">
                 <a:solidFill>
                   <a:srgbClr val="0B1F3A"/>
                 </a:solidFill>
@@ -3797,8 +3797,8 @@
         </p:nvSpPr>
         <p:spPr>
           <a:xfrm>
-            <a:off x="457200" y="2688336"/>
-            <a:ext cx="3538728" cy="402336"/>
+            <a:off x="457200" y="2578608"/>
+            <a:ext cx="3538728" cy="493776"/>
           </a:xfrm>
           <a:prstGeom prst="rect">
             <a:avLst/>
@@ -3811,21 +3811,21 @@
           <a:p>
             <a:pPr algn="l">
               <a:lnSpc>
-                <a:spcPct val="104000"/>
-              </a:lnSpc>
-              <a:spcAft>
-                <a:spcPts val="100"/>
-              </a:spcAft>
-            </a:pPr>
-            <a:r>
-              <a:rPr sz="1000" b="0">
+                <a:spcPct val="102000"/>
+              </a:lnSpc>
+              <a:spcAft>
+                <a:spcPts val="100"/>
+              </a:spcAft>
+            </a:pPr>
+            <a:r>
+              <a:rPr sz="950" b="0">
                 <a:solidFill>
                   <a:srgbClr val="2C3E50"/>
                 </a:solidFill>
                 <a:latin typeface="WenQuanYi Micro Hei"/>
                 <a:ea typeface="WenQuanYi Micro Hei"/>
               </a:rPr>
-              <a:t>模型与产品跨RAN、Core、OSS/BSS复用，需要稳定对象、上下文、QoD和版本。</a:t>
+              <a:t>模型与产品要跨RAN、Core、OSS/BSS复用，必须有稳定对象、上下文、QoD和版本。名称相似不等于跨域语义已经对齐。</a:t>
             </a:r>
           </a:p>
         </p:txBody>
@@ -3838,8 +3838,8 @@
         </p:nvSpPr>
         <p:spPr>
           <a:xfrm>
-            <a:off x="347472" y="3218688"/>
-            <a:ext cx="3794760" cy="950976"/>
+            <a:off x="347472" y="3182112"/>
+            <a:ext cx="3794760" cy="914400"/>
           </a:xfrm>
           <a:prstGeom prst="roundRect">
             <a:avLst/>
@@ -3883,7 +3883,7 @@
         </p:nvSpPr>
         <p:spPr>
           <a:xfrm>
-            <a:off x="457200" y="3328416"/>
+            <a:off x="457200" y="3255264"/>
             <a:ext cx="237744" cy="237744"/>
           </a:xfrm>
           <a:prstGeom prst="ellipse">
@@ -3926,7 +3926,7 @@
         </p:nvSpPr>
         <p:spPr>
           <a:xfrm>
-            <a:off x="457200" y="3337560"/>
+            <a:off x="457200" y="3264408"/>
             <a:ext cx="237744" cy="219456"/>
           </a:xfrm>
           <a:prstGeom prst="rect">
@@ -3967,8 +3967,8 @@
         </p:nvSpPr>
         <p:spPr>
           <a:xfrm>
-            <a:off x="768096" y="3291840"/>
-            <a:ext cx="3246120" cy="164592"/>
+            <a:off x="768096" y="3227832"/>
+            <a:ext cx="3246120" cy="146304"/>
           </a:xfrm>
           <a:prstGeom prst="rect">
             <a:avLst/>
@@ -4008,8 +4008,8 @@
         </p:nvSpPr>
         <p:spPr>
           <a:xfrm>
-            <a:off x="768096" y="3456432"/>
-            <a:ext cx="3246120" cy="219456"/>
+            <a:off x="768096" y="3374136"/>
+            <a:ext cx="3246120" cy="182880"/>
           </a:xfrm>
           <a:prstGeom prst="rect">
             <a:avLst/>
@@ -4029,7 +4029,7 @@
               </a:spcAft>
             </a:pPr>
             <a:r>
-              <a:rPr sz="1300" b="1">
+              <a:rPr sz="1200" b="1">
                 <a:solidFill>
                   <a:srgbClr val="0B1F3A"/>
                 </a:solidFill>
@@ -4049,8 +4049,8 @@
         </p:nvSpPr>
         <p:spPr>
           <a:xfrm>
-            <a:off x="457200" y="3712464"/>
-            <a:ext cx="3538728" cy="402336"/>
+            <a:off x="457200" y="3566160"/>
+            <a:ext cx="3538728" cy="493776"/>
           </a:xfrm>
           <a:prstGeom prst="rect">
             <a:avLst/>
@@ -4063,21 +4063,21 @@
           <a:p>
             <a:pPr algn="l">
               <a:lnSpc>
-                <a:spcPct val="104000"/>
-              </a:lnSpc>
-              <a:spcAft>
-                <a:spcPts val="100"/>
-              </a:spcAft>
-            </a:pPr>
-            <a:r>
-              <a:rPr sz="1000" b="0">
+                <a:spcPct val="102000"/>
+              </a:lnSpc>
+              <a:spcAft>
+                <a:spcPts val="100"/>
+              </a:spcAft>
+            </a:pPr>
+            <a:r>
+              <a:rPr sz="950" b="0">
                 <a:solidFill>
                   <a:srgbClr val="2C3E50"/>
                 </a:solidFill>
                 <a:latin typeface="WenQuanYi Micro Hei"/>
                 <a:ea typeface="WenQuanYi Micro Hei"/>
               </a:rPr>
-              <a:t>感知、训练和遥测规模推动过滤、特征化与推理向源侧下沉，而不是默认集中。</a:t>
+              <a:t>感知、训练和遥测规模不允许默认把全量数据搬到中心。过滤、特征化与推理应先在源侧完成，再按用途交付。</a:t>
             </a:r>
           </a:p>
         </p:txBody>
@@ -4090,8 +4090,8 @@
         </p:nvSpPr>
         <p:spPr>
           <a:xfrm>
-            <a:off x="347472" y="4242816"/>
-            <a:ext cx="3794760" cy="950976"/>
+            <a:off x="347472" y="4169664"/>
+            <a:ext cx="3794760" cy="914400"/>
           </a:xfrm>
           <a:prstGeom prst="roundRect">
             <a:avLst/>
@@ -4135,7 +4135,7 @@
         </p:nvSpPr>
         <p:spPr>
           <a:xfrm>
-            <a:off x="457200" y="4352544"/>
+            <a:off x="457200" y="4242816"/>
             <a:ext cx="237744" cy="237744"/>
           </a:xfrm>
           <a:prstGeom prst="ellipse">
@@ -4178,7 +4178,7 @@
         </p:nvSpPr>
         <p:spPr>
           <a:xfrm>
-            <a:off x="457200" y="4361688"/>
+            <a:off x="457200" y="4251960"/>
             <a:ext cx="237744" cy="219456"/>
           </a:xfrm>
           <a:prstGeom prst="rect">
@@ -4219,8 +4219,8 @@
         </p:nvSpPr>
         <p:spPr>
           <a:xfrm>
-            <a:off x="768096" y="4315968"/>
-            <a:ext cx="3246120" cy="164592"/>
+            <a:off x="768096" y="4215384"/>
+            <a:ext cx="3246120" cy="146304"/>
           </a:xfrm>
           <a:prstGeom prst="rect">
             <a:avLst/>
@@ -4260,8 +4260,8 @@
         </p:nvSpPr>
         <p:spPr>
           <a:xfrm>
-            <a:off x="768096" y="4480560"/>
-            <a:ext cx="3246120" cy="219456"/>
+            <a:off x="768096" y="4361688"/>
+            <a:ext cx="3246120" cy="182880"/>
           </a:xfrm>
           <a:prstGeom prst="rect">
             <a:avLst/>
@@ -4281,7 +4281,7 @@
               </a:spcAft>
             </a:pPr>
             <a:r>
-              <a:rPr sz="1300" b="1">
+              <a:rPr sz="1200" b="1">
                 <a:solidFill>
                   <a:srgbClr val="0B1F3A"/>
                 </a:solidFill>
@@ -4301,8 +4301,8 @@
         </p:nvSpPr>
         <p:spPr>
           <a:xfrm>
-            <a:off x="457200" y="4736592"/>
-            <a:ext cx="3538728" cy="402336"/>
+            <a:off x="457200" y="4553712"/>
+            <a:ext cx="3538728" cy="493776"/>
           </a:xfrm>
           <a:prstGeom prst="rect">
             <a:avLst/>
@@ -4315,21 +4315,21 @@
           <a:p>
             <a:pPr algn="l">
               <a:lnSpc>
-                <a:spcPct val="104000"/>
-              </a:lnSpc>
-              <a:spcAft>
-                <a:spcPts val="100"/>
-              </a:spcAft>
-            </a:pPr>
-            <a:r>
-              <a:rPr sz="1000" b="0">
+                <a:spcPct val="102000"/>
+              </a:lnSpc>
+              <a:spcAft>
+                <a:spcPts val="100"/>
+              </a:spcAft>
+            </a:pPr>
+            <a:r>
+              <a:rPr sz="950" b="0">
                 <a:solidFill>
                   <a:srgbClr val="2C3E50"/>
                 </a:solidFill>
                 <a:latin typeface="WenQuanYi Micro Hei"/>
                 <a:ea typeface="WenQuanYi Micro Hei"/>
               </a:rPr>
-              <a:t>Agent输出会改变真实网络，数据、模型、策略、动作与结果必须形成证据链。</a:t>
+              <a:t>Agent输出会改变真实网络。数据、模型、策略、动作、结果和回滚必须连成可解释、可追责的证据链，否则自治权限扩不出去。</a:t>
             </a:r>
           </a:p>
         </p:txBody>
@@ -4343,7 +4343,7 @@
         <p:spPr>
           <a:xfrm>
             <a:off x="4187952" y="1572768"/>
-            <a:ext cx="41148" cy="3493008"/>
+            <a:ext cx="41148" cy="3383280"/>
           </a:xfrm>
           <a:prstGeom prst="rect">
             <a:avLst/>
@@ -4428,8 +4428,8 @@
         </p:nvSpPr>
         <p:spPr>
           <a:xfrm>
-            <a:off x="4443984" y="2816352"/>
-            <a:ext cx="1335024" cy="1298448"/>
+            <a:off x="4443984" y="2743200"/>
+            <a:ext cx="1335024" cy="1353312"/>
           </a:xfrm>
           <a:prstGeom prst="roundRect">
             <a:avLst/>
@@ -4471,8 +4471,8 @@
         </p:nvSpPr>
         <p:spPr>
           <a:xfrm>
-            <a:off x="4498848" y="2999232"/>
-            <a:ext cx="1225296" cy="950976"/>
+            <a:off x="4498848" y="2852928"/>
+            <a:ext cx="1225296" cy="1133856"/>
           </a:xfrm>
           <a:prstGeom prst="rect">
             <a:avLst/>
@@ -4485,14 +4485,14 @@
           <a:p>
             <a:pPr algn="ctr">
               <a:lnSpc>
-                <a:spcPct val="115000"/>
-              </a:lnSpc>
-              <a:spcAft>
-                <a:spcPts val="100"/>
-              </a:spcAft>
-            </a:pPr>
-            <a:r>
-              <a:rPr sz="1300" b="1">
+                <a:spcPct val="112000"/>
+              </a:lnSpc>
+              <a:spcAft>
+                <a:spcPts val="100"/>
+              </a:spcAft>
+            </a:pPr>
+            <a:r>
+              <a:rPr sz="1200" b="1">
                 <a:solidFill>
                   <a:srgbClr val="FFFFFF"/>
                 </a:solidFill>
@@ -4505,14 +4505,14 @@
           <a:p>
             <a:pPr algn="ctr">
               <a:lnSpc>
-                <a:spcPct val="115000"/>
-              </a:lnSpc>
-              <a:spcAft>
-                <a:spcPts val="100"/>
-              </a:spcAft>
-            </a:pPr>
-            <a:r>
-              <a:rPr sz="1300" b="1">
+                <a:spcPct val="112000"/>
+              </a:lnSpc>
+              <a:spcAft>
+                <a:spcPts val="100"/>
+              </a:spcAft>
+            </a:pPr>
+            <a:r>
+              <a:rPr sz="1200" b="1">
                 <a:solidFill>
                   <a:srgbClr val="FFFFFF"/>
                 </a:solidFill>
@@ -4520,6 +4520,26 @@
                 <a:ea typeface="WenQuanYi Micro Hei"/>
               </a:rPr>
               <a:t>如何分配</a:t>
+            </a:r>
+          </a:p>
+          <a:p>
+            <a:pPr algn="ctr">
+              <a:lnSpc>
+                <a:spcPct val="112000"/>
+              </a:lnSpc>
+              <a:spcAft>
+                <a:spcPts val="100"/>
+              </a:spcAft>
+            </a:pPr>
+            <a:r>
+              <a:rPr sz="1200" b="1">
+                <a:solidFill>
+                  <a:srgbClr val="FFFFFF"/>
+                </a:solidFill>
+                <a:latin typeface="WenQuanYi Micro Hei"/>
+                <a:ea typeface="WenQuanYi Micro Hei"/>
+              </a:rPr>
+              <a:t>决定路线</a:t>
             </a:r>
           </a:p>
         </p:txBody>
@@ -4575,8 +4595,8 @@
         </p:nvSpPr>
         <p:spPr>
           <a:xfrm>
-            <a:off x="6016752" y="1170432"/>
-            <a:ext cx="5806440" cy="1280160"/>
+            <a:off x="6016752" y="1207008"/>
+            <a:ext cx="5806440" cy="1243584"/>
           </a:xfrm>
           <a:prstGeom prst="roundRect">
             <a:avLst/>
@@ -4620,8 +4640,8 @@
         </p:nvSpPr>
         <p:spPr>
           <a:xfrm>
-            <a:off x="6016752" y="1170432"/>
-            <a:ext cx="73152" cy="1280160"/>
+            <a:off x="6016752" y="1207008"/>
+            <a:ext cx="73152" cy="1243584"/>
           </a:xfrm>
           <a:prstGeom prst="rect">
             <a:avLst/>
@@ -4663,8 +4683,8 @@
         </p:nvSpPr>
         <p:spPr>
           <a:xfrm>
-            <a:off x="6236208" y="1243584"/>
-            <a:ext cx="5440680" cy="182880"/>
+            <a:off x="6236208" y="1261872"/>
+            <a:ext cx="5440680" cy="164592"/>
           </a:xfrm>
           <a:prstGeom prst="rect">
             <a:avLst/>
@@ -4705,7 +4725,7 @@
         <p:spPr>
           <a:xfrm>
             <a:off x="6236208" y="1426464"/>
-            <a:ext cx="5440680" cy="237744"/>
+            <a:ext cx="5440680" cy="201168"/>
           </a:xfrm>
           <a:prstGeom prst="rect">
             <a:avLst/>
@@ -4725,7 +4745,7 @@
               </a:spcAft>
             </a:pPr>
             <a:r>
-              <a:rPr sz="1400" b="1">
+              <a:rPr sz="1300" b="1">
                 <a:solidFill>
                   <a:srgbClr val="0B1F3A"/>
                 </a:solidFill>
@@ -4745,8 +4765,8 @@
         </p:nvSpPr>
         <p:spPr>
           <a:xfrm>
-            <a:off x="6236208" y="1700784"/>
-            <a:ext cx="5440680" cy="658368"/>
+            <a:off x="6236208" y="1645920"/>
+            <a:ext cx="5440680" cy="749808"/>
           </a:xfrm>
           <a:prstGeom prst="rect">
             <a:avLst/>
@@ -4759,21 +4779,21 @@
           <a:p>
             <a:pPr algn="l">
               <a:lnSpc>
-                <a:spcPct val="105000"/>
-              </a:lnSpc>
-              <a:spcAft>
-                <a:spcPts val="100"/>
-              </a:spcAft>
-            </a:pPr>
-            <a:r>
-              <a:rPr sz="1050" b="0">
+                <a:spcPct val="104000"/>
+              </a:lnSpc>
+              <a:spcAft>
+                <a:spcPts val="100"/>
+              </a:spcAft>
+            </a:pPr>
+            <a:r>
+              <a:rPr sz="1000" b="0">
                 <a:solidFill>
                   <a:srgbClr val="2C3E50"/>
                 </a:solidFill>
                 <a:latin typeface="WenQuanYi Micro Hei"/>
                 <a:ea typeface="WenQuanYi Micro Hei"/>
               </a:rPr>
-              <a:t>以复杂协调换迁移连续性。权威源与存量产品不可跳过，统一的是治理视图，不是全部运行时。</a:t>
+              <a:t>以复杂协调换迁移连续性。权威源与Mediation、NWDAF、湖仓不可跳过；统一的是发现、策略和消费体验，不是把全部运行时收进一个SKU。</a:t>
             </a:r>
           </a:p>
         </p:txBody>
@@ -4786,8 +4806,8 @@
         </p:nvSpPr>
         <p:spPr>
           <a:xfrm>
-            <a:off x="6016752" y="2542032"/>
-            <a:ext cx="5806440" cy="1280160"/>
+            <a:off x="6016752" y="2523744"/>
+            <a:ext cx="5806440" cy="1243584"/>
           </a:xfrm>
           <a:prstGeom prst="roundRect">
             <a:avLst/>
@@ -4831,8 +4851,8 @@
         </p:nvSpPr>
         <p:spPr>
           <a:xfrm>
-            <a:off x="6016752" y="2542032"/>
-            <a:ext cx="73152" cy="1280160"/>
+            <a:off x="6016752" y="2523744"/>
+            <a:ext cx="73152" cy="1243584"/>
           </a:xfrm>
           <a:prstGeom prst="rect">
             <a:avLst/>
@@ -4874,8 +4894,8 @@
         </p:nvSpPr>
         <p:spPr>
           <a:xfrm>
-            <a:off x="6236208" y="2615184"/>
-            <a:ext cx="5440680" cy="182880"/>
+            <a:off x="6236208" y="2578608"/>
+            <a:ext cx="5440680" cy="164592"/>
           </a:xfrm>
           <a:prstGeom prst="rect">
             <a:avLst/>
@@ -4915,8 +4935,8 @@
         </p:nvSpPr>
         <p:spPr>
           <a:xfrm>
-            <a:off x="6236208" y="2798064"/>
-            <a:ext cx="5440680" cy="237744"/>
+            <a:off x="6236208" y="2743200"/>
+            <a:ext cx="5440680" cy="201168"/>
           </a:xfrm>
           <a:prstGeom prst="rect">
             <a:avLst/>
@@ -4936,7 +4956,7 @@
               </a:spcAft>
             </a:pPr>
             <a:r>
-              <a:rPr sz="1400" b="1">
+              <a:rPr sz="1300" b="1">
                 <a:solidFill>
                   <a:srgbClr val="0B1F3A"/>
                 </a:solidFill>
@@ -4956,8 +4976,8 @@
         </p:nvSpPr>
         <p:spPr>
           <a:xfrm>
-            <a:off x="6236208" y="3072384"/>
-            <a:ext cx="5440680" cy="658368"/>
+            <a:off x="6236208" y="2962656"/>
+            <a:ext cx="5440680" cy="749808"/>
           </a:xfrm>
           <a:prstGeom prst="rect">
             <a:avLst/>
@@ -4970,21 +4990,21 @@
           <a:p>
             <a:pPr algn="l">
               <a:lnSpc>
-                <a:spcPct val="105000"/>
-              </a:lnSpc>
-              <a:spcAft>
-                <a:spcPts val="100"/>
-              </a:spcAft>
-            </a:pPr>
-            <a:r>
-              <a:rPr sz="1050" b="0">
+                <a:spcPct val="104000"/>
+              </a:lnSpc>
+              <a:spcAft>
+                <a:spcPts val="100"/>
+              </a:spcAft>
+            </a:pPr>
+            <a:r>
+              <a:rPr sz="1000" b="0">
                 <a:solidFill>
                   <a:srgbClr val="2C3E50"/>
                 </a:solidFill>
                 <a:latin typeface="WenQuanYi Micro Hei"/>
                 <a:ea typeface="WenQuanYi Micro Hei"/>
               </a:rPr>
-              <a:t>以新平面复杂度换近源控制。把多源、多处理、多汇做成可编排执行，而不是先建企业Catalog。</a:t>
+              <a:t>以新平面复杂度换近源控制。把多源、多处理、多汇做成可编排执行，而不是先建设企业Catalog；缺少通用目录不能直接判为路线不完整。</a:t>
             </a:r>
           </a:p>
         </p:txBody>
@@ -4997,8 +5017,8 @@
         </p:nvSpPr>
         <p:spPr>
           <a:xfrm>
-            <a:off x="6016752" y="3913632"/>
-            <a:ext cx="5806440" cy="1280160"/>
+            <a:off x="6016752" y="3840480"/>
+            <a:ext cx="5806440" cy="1243584"/>
           </a:xfrm>
           <a:prstGeom prst="roundRect">
             <a:avLst/>
@@ -5042,8 +5062,8 @@
         </p:nvSpPr>
         <p:spPr>
           <a:xfrm>
-            <a:off x="6016752" y="3913632"/>
-            <a:ext cx="73152" cy="1280160"/>
+            <a:off x="6016752" y="3840480"/>
+            <a:ext cx="73152" cy="1243584"/>
           </a:xfrm>
           <a:prstGeom prst="rect">
             <a:avLst/>
@@ -5085,8 +5105,8 @@
         </p:nvSpPr>
         <p:spPr>
           <a:xfrm>
-            <a:off x="6236208" y="3986784"/>
-            <a:ext cx="5440680" cy="182880"/>
+            <a:off x="6236208" y="3895344"/>
+            <a:ext cx="5440680" cy="164592"/>
           </a:xfrm>
           <a:prstGeom prst="rect">
             <a:avLst/>
@@ -5126,8 +5146,8 @@
         </p:nvSpPr>
         <p:spPr>
           <a:xfrm>
-            <a:off x="6236208" y="4169664"/>
-            <a:ext cx="5440680" cy="237744"/>
+            <a:off x="6236208" y="4059936"/>
+            <a:ext cx="5440680" cy="201168"/>
           </a:xfrm>
           <a:prstGeom prst="rect">
             <a:avLst/>
@@ -5147,7 +5167,7 @@
               </a:spcAft>
             </a:pPr>
             <a:r>
-              <a:rPr sz="1400" b="1">
+              <a:rPr sz="1300" b="1">
                 <a:solidFill>
                   <a:srgbClr val="0B1F3A"/>
                 </a:solidFill>
@@ -5167,8 +5187,8 @@
         </p:nvSpPr>
         <p:spPr>
           <a:xfrm>
-            <a:off x="6236208" y="4443984"/>
-            <a:ext cx="5440680" cy="658368"/>
+            <a:off x="6236208" y="4279392"/>
+            <a:ext cx="5440680" cy="749808"/>
           </a:xfrm>
           <a:prstGeom prst="rect">
             <a:avLst/>
@@ -5181,21 +5201,21 @@
           <a:p>
             <a:pPr algn="l">
               <a:lnSpc>
-                <a:spcPct val="105000"/>
-              </a:lnSpc>
-              <a:spcAft>
-                <a:spcPts val="100"/>
-              </a:spcAft>
-            </a:pPr>
-            <a:r>
-              <a:rPr sz="1050" b="0">
+                <a:spcPct val="104000"/>
+              </a:lnSpc>
+              <a:spcAft>
+                <a:spcPts val="100"/>
+              </a:spcAft>
+            </a:pPr>
+            <a:r>
+              <a:rPr sz="1000" b="0">
                 <a:solidFill>
                   <a:srgbClr val="2C3E50"/>
                 </a:solidFill>
                 <a:latin typeface="WenQuanYi Micro Hei"/>
                 <a:ea typeface="WenQuanYi Micro Hei"/>
               </a:rPr>
-              <a:t>以分层SKU换产品化速度。先让能力可销售、可组合，再验证各层是否共享同一控制体系。</a:t>
+              <a:t>以分层SKU换产品化速度。先让目录、AI和应用可分别销售并进入现网，再验证各层是否共享同一契约和控制体系。</a:t>
             </a:r>
           </a:p>
         </p:txBody>
@@ -5208,8 +5228,8 @@
         </p:nvSpPr>
         <p:spPr>
           <a:xfrm>
-            <a:off x="347472" y="5321808"/>
-            <a:ext cx="11475720" cy="1170432"/>
+            <a:off x="347472" y="5212080"/>
+            <a:ext cx="11475720" cy="1298448"/>
           </a:xfrm>
           <a:prstGeom prst="roundRect">
             <a:avLst/>
@@ -5253,8 +5273,8 @@
         </p:nvSpPr>
         <p:spPr>
           <a:xfrm>
-            <a:off x="493776" y="5394960"/>
-            <a:ext cx="11183112" cy="201168"/>
+            <a:off x="493776" y="5266944"/>
+            <a:ext cx="11183112" cy="182880"/>
           </a:xfrm>
           <a:prstGeom prst="rect">
             <a:avLst/>
@@ -5281,7 +5301,7 @@
                 <a:latin typeface="WenQuanYi Micro Hei"/>
                 <a:ea typeface="WenQuanYi Micro Hei"/>
               </a:rPr>
-              <a:t>共同绕不开的不是平台名称，而是四类控制能力</a:t>
+              <a:t>共同绕不开的不是平台名称，而是四类控制能力及其外部接口</a:t>
             </a:r>
           </a:p>
         </p:txBody>
@@ -5294,8 +5314,8 @@
         </p:nvSpPr>
         <p:spPr>
           <a:xfrm>
-            <a:off x="493776" y="5687568"/>
-            <a:ext cx="2697480" cy="621792"/>
+            <a:off x="493776" y="5504688"/>
+            <a:ext cx="2697480" cy="877824"/>
           </a:xfrm>
           <a:prstGeom prst="roundRect">
             <a:avLst/>
@@ -5337,8 +5357,8 @@
         </p:nvSpPr>
         <p:spPr>
           <a:xfrm>
-            <a:off x="493776" y="5833872"/>
-            <a:ext cx="2697480" cy="347472"/>
+            <a:off x="585216" y="5559552"/>
+            <a:ext cx="2514600" cy="256032"/>
           </a:xfrm>
           <a:prstGeom prst="rect">
             <a:avLst/>
@@ -5358,7 +5378,7 @@
               </a:spcAft>
             </a:pPr>
             <a:r>
-              <a:rPr sz="1300" b="1">
+              <a:rPr sz="1200" b="1">
                 <a:solidFill>
                   <a:srgbClr val="FFFFFF"/>
                 </a:solidFill>
@@ -5372,14 +5392,55 @@
       </p:sp>
       <p:sp>
         <p:nvSpPr>
-          <p:cNvPr id="55" name="Rounded Rectangle 54"/>
+          <p:cNvPr id="55" name="TextBox 54"/>
+          <p:cNvSpPr txBox="1"/>
+          <p:nvPr/>
+        </p:nvSpPr>
+        <p:spPr>
+          <a:xfrm>
+            <a:off x="585216" y="5833872"/>
+            <a:ext cx="2514600" cy="475488"/>
+          </a:xfrm>
+          <a:prstGeom prst="rect">
+            <a:avLst/>
+          </a:prstGeom>
+          <a:noFill/>
+        </p:spPr>
+        <p:txBody>
+          <a:bodyPr wrap="square"/>
+          <a:lstStyle/>
+          <a:p>
+            <a:pPr algn="ctr">
+              <a:lnSpc>
+                <a:spcPct val="102000"/>
+              </a:lnSpc>
+              <a:spcAft>
+                <a:spcPts val="100"/>
+              </a:spcAft>
+            </a:pPr>
+            <a:r>
+              <a:rPr sz="900" b="0">
+                <a:solidFill>
+                  <a:srgbClr val="FFFFFF"/>
+                </a:solidFill>
+                <a:latin typeface="WenQuanYi Micro Hei"/>
+                <a:ea typeface="WenQuanYi Micro Hei"/>
+              </a:rPr>
+              <a:t>稳定ID、权威源、配置版本和对象映射</a:t>
+            </a:r>
+          </a:p>
+        </p:txBody>
+      </p:sp>
+      <p:sp>
+        <p:nvSpPr>
+          <p:cNvPr id="56" name="Rounded Rectangle 55"/>
           <p:cNvSpPr/>
           <p:nvPr/>
         </p:nvSpPr>
         <p:spPr>
           <a:xfrm>
-            <a:off x="3328416" y="5687568"/>
-            <a:ext cx="2697480" cy="621792"/>
+            <a:off x="3328416" y="5504688"/>
+            <a:ext cx="2697480" cy="877824"/>
           </a:xfrm>
           <a:prstGeom prst="roundRect">
             <a:avLst/>
@@ -5415,14 +5476,14 @@
       </p:sp>
       <p:sp>
         <p:nvSpPr>
-          <p:cNvPr id="56" name="TextBox 55"/>
+          <p:cNvPr id="57" name="TextBox 56"/>
           <p:cNvSpPr txBox="1"/>
           <p:nvPr/>
         </p:nvSpPr>
         <p:spPr>
           <a:xfrm>
-            <a:off x="3328416" y="5833872"/>
-            <a:ext cx="2697480" cy="347472"/>
+            <a:off x="3419856" y="5559552"/>
+            <a:ext cx="2514600" cy="256032"/>
           </a:xfrm>
           <a:prstGeom prst="rect">
             <a:avLst/>
@@ -5442,7 +5503,7 @@
               </a:spcAft>
             </a:pPr>
             <a:r>
-              <a:rPr sz="1300" b="1">
+              <a:rPr sz="1200" b="1">
                 <a:solidFill>
                   <a:srgbClr val="FFFFFF"/>
                 </a:solidFill>
@@ -5456,14 +5517,55 @@
       </p:sp>
       <p:sp>
         <p:nvSpPr>
-          <p:cNvPr id="57" name="Rounded Rectangle 56"/>
+          <p:cNvPr id="58" name="TextBox 57"/>
+          <p:cNvSpPr txBox="1"/>
+          <p:nvPr/>
+        </p:nvSpPr>
+        <p:spPr>
+          <a:xfrm>
+            <a:off x="3419856" y="5833872"/>
+            <a:ext cx="2514600" cy="475488"/>
+          </a:xfrm>
+          <a:prstGeom prst="rect">
+            <a:avLst/>
+          </a:prstGeom>
+          <a:noFill/>
+        </p:spPr>
+        <p:txBody>
+          <a:bodyPr wrap="square"/>
+          <a:lstStyle/>
+          <a:p>
+            <a:pPr algn="ctr">
+              <a:lnSpc>
+                <a:spcPct val="102000"/>
+              </a:lnSpc>
+              <a:spcAft>
+                <a:spcPts val="100"/>
+              </a:spcAft>
+            </a:pPr>
+            <a:r>
+              <a:rPr sz="900" b="0">
+                <a:solidFill>
+                  <a:srgbClr val="FFFFFF"/>
+                </a:solidFill>
+                <a:latin typeface="WenQuanYi Micro Hei"/>
+                <a:ea typeface="WenQuanYi Micro Hei"/>
+              </a:rPr>
+              <a:t>用途适用性、Owner、SLO、计量与退出</a:t>
+            </a:r>
+          </a:p>
+        </p:txBody>
+      </p:sp>
+      <p:sp>
+        <p:nvSpPr>
+          <p:cNvPr id="59" name="Rounded Rectangle 58"/>
           <p:cNvSpPr/>
           <p:nvPr/>
         </p:nvSpPr>
         <p:spPr>
           <a:xfrm>
-            <a:off x="6163056" y="5687568"/>
-            <a:ext cx="2697480" cy="621792"/>
+            <a:off x="6163056" y="5504688"/>
+            <a:ext cx="2697480" cy="877824"/>
           </a:xfrm>
           <a:prstGeom prst="roundRect">
             <a:avLst/>
@@ -5499,14 +5601,14 @@
       </p:sp>
       <p:sp>
         <p:nvSpPr>
-          <p:cNvPr id="58" name="TextBox 57"/>
+          <p:cNvPr id="60" name="TextBox 59"/>
           <p:cNvSpPr txBox="1"/>
           <p:nvPr/>
         </p:nvSpPr>
         <p:spPr>
           <a:xfrm>
-            <a:off x="6163056" y="5833872"/>
-            <a:ext cx="2697480" cy="347472"/>
+            <a:off x="6254496" y="5559552"/>
+            <a:ext cx="2514600" cy="256032"/>
           </a:xfrm>
           <a:prstGeom prst="rect">
             <a:avLst/>
@@ -5526,7 +5628,7 @@
               </a:spcAft>
             </a:pPr>
             <a:r>
-              <a:rPr sz="1300" b="1">
+              <a:rPr sz="1200" b="1">
                 <a:solidFill>
                   <a:srgbClr val="FFFFFF"/>
                 </a:solidFill>
@@ -5540,14 +5642,55 @@
       </p:sp>
       <p:sp>
         <p:nvSpPr>
-          <p:cNvPr id="59" name="Rounded Rectangle 58"/>
+          <p:cNvPr id="61" name="TextBox 60"/>
+          <p:cNvSpPr txBox="1"/>
+          <p:nvPr/>
+        </p:nvSpPr>
+        <p:spPr>
+          <a:xfrm>
+            <a:off x="6254496" y="5833872"/>
+            <a:ext cx="2514600" cy="475488"/>
+          </a:xfrm>
+          <a:prstGeom prst="rect">
+            <a:avLst/>
+          </a:prstGeom>
+          <a:noFill/>
+        </p:spPr>
+        <p:txBody>
+          <a:bodyPr wrap="square"/>
+          <a:lstStyle/>
+          <a:p>
+            <a:pPr algn="ctr">
+              <a:lnSpc>
+                <a:spcPct val="102000"/>
+              </a:lnSpc>
+              <a:spcAft>
+                <a:spcPts val="100"/>
+              </a:spcAft>
+            </a:pPr>
+            <a:r>
+              <a:rPr sz="900" b="0">
+                <a:solidFill>
+                  <a:srgbClr val="FFFFFF"/>
+                </a:solidFill>
+                <a:latin typeface="WenQuanYi Micro Hei"/>
+                <a:ea typeface="WenQuanYi Micro Hei"/>
+              </a:rPr>
+              <a:t>算子放置、策略下发、断链生存与回退</a:t>
+            </a:r>
+          </a:p>
+        </p:txBody>
+      </p:sp>
+      <p:sp>
+        <p:nvSpPr>
+          <p:cNvPr id="62" name="Rounded Rectangle 61"/>
           <p:cNvSpPr/>
           <p:nvPr/>
         </p:nvSpPr>
         <p:spPr>
           <a:xfrm>
-            <a:off x="8997696" y="5687568"/>
-            <a:ext cx="2697480" cy="621792"/>
+            <a:off x="8997696" y="5504688"/>
+            <a:ext cx="2697480" cy="877824"/>
           </a:xfrm>
           <a:prstGeom prst="roundRect">
             <a:avLst/>
@@ -5583,14 +5726,14 @@
       </p:sp>
       <p:sp>
         <p:nvSpPr>
-          <p:cNvPr id="60" name="TextBox 59"/>
+          <p:cNvPr id="63" name="TextBox 62"/>
           <p:cNvSpPr txBox="1"/>
           <p:nvPr/>
         </p:nvSpPr>
         <p:spPr>
           <a:xfrm>
-            <a:off x="8997696" y="5833872"/>
-            <a:ext cx="2697480" cy="347472"/>
+            <a:off x="9089136" y="5559552"/>
+            <a:ext cx="2514600" cy="256032"/>
           </a:xfrm>
           <a:prstGeom prst="rect">
             <a:avLst/>
@@ -5610,7 +5753,7 @@
               </a:spcAft>
             </a:pPr>
             <a:r>
-              <a:rPr sz="1300" b="1">
+              <a:rPr sz="1200" b="1">
                 <a:solidFill>
                   <a:srgbClr val="FFFFFF"/>
                 </a:solidFill>
@@ -5624,7 +5767,48 @@
       </p:sp>
       <p:sp>
         <p:nvSpPr>
-          <p:cNvPr id="61" name="Rectangle 60"/>
+          <p:cNvPr id="64" name="TextBox 63"/>
+          <p:cNvSpPr txBox="1"/>
+          <p:nvPr/>
+        </p:nvSpPr>
+        <p:spPr>
+          <a:xfrm>
+            <a:off x="9089136" y="5833872"/>
+            <a:ext cx="2514600" cy="475488"/>
+          </a:xfrm>
+          <a:prstGeom prst="rect">
+            <a:avLst/>
+          </a:prstGeom>
+          <a:noFill/>
+        </p:spPr>
+        <p:txBody>
+          <a:bodyPr wrap="square"/>
+          <a:lstStyle/>
+          <a:p>
+            <a:pPr algn="ctr">
+              <a:lnSpc>
+                <a:spcPct val="102000"/>
+              </a:lnSpc>
+              <a:spcAft>
+                <a:spcPts val="100"/>
+              </a:spcAft>
+            </a:pPr>
+            <a:r>
+              <a:rPr sz="900" b="0">
+                <a:solidFill>
+                  <a:srgbClr val="FFFFFF"/>
+                </a:solidFill>
+                <a:latin typeface="WenQuanYi Micro Hei"/>
+                <a:ea typeface="WenQuanYi Micro Hei"/>
+              </a:rPr>
+              <a:t>数据到回滚可关联、可导出、可测试</a:t>
+            </a:r>
+          </a:p>
+        </p:txBody>
+      </p:sp>
+      <p:sp>
+        <p:nvSpPr>
+          <p:cNvPr id="65" name="Rectangle 64"/>
           <p:cNvSpPr/>
           <p:nvPr/>
         </p:nvSpPr>
@@ -5667,7 +5851,7 @@
       </p:sp>
       <p:sp>
         <p:nvSpPr>
-          <p:cNvPr id="62" name="TextBox 61"/>
+          <p:cNvPr id="66" name="TextBox 65"/>
           <p:cNvSpPr txBox="1"/>
           <p:nvPr/>
         </p:nvSpPr>
@@ -5708,7 +5892,7 @@
       </p:sp>
       <p:sp>
         <p:nvSpPr>
-          <p:cNvPr id="63" name="TextBox 62"/>
+          <p:cNvPr id="67" name="TextBox 66"/>
           <p:cNvSpPr txBox="1"/>
           <p:nvPr/>
         </p:nvSpPr>
@@ -5942,7 +6126,7 @@
         <p:spPr>
           <a:xfrm>
             <a:off x="347472" y="640080"/>
-            <a:ext cx="11475720" cy="420624"/>
+            <a:ext cx="11475720" cy="493776"/>
           </a:xfrm>
           <a:prstGeom prst="roundRect">
             <a:avLst/>
@@ -5976,10 +6160,10 @@
           <a:p>
             <a:pPr algn="l">
               <a:lnSpc>
-                <a:spcPct val="105000"/>
+                <a:spcPct val="104000"/>
               </a:lnSpc>
               <a:spcBef>
-                <a:spcPts val="300"/>
+                <a:spcPts val="200"/>
               </a:spcBef>
               <a:spcAft>
                 <a:spcPts val="100"/>
@@ -5993,7 +6177,7 @@
                 <a:latin typeface="WenQuanYi Micro Hei"/>
                 <a:ea typeface="WenQuanYi Micro Hei"/>
               </a:rPr>
-              <a:t>标准更关注跨厂商必须一致的对象和接口，不替厂商选择内部拓扑，因此三条路线可以长期并存。</a:t>
+              <a:t>ITU-R、SA2/SA5、O-RAN和外部运营接口正在形成一条可组合链路，但并不共同要求一个名为Data Fabric的网元。标准冻结跨厂商必须一致的对象与接口，不替厂商选择内部拓扑，因此三条路线可以长期并存。</a:t>
             </a:r>
           </a:p>
         </p:txBody>
@@ -6006,8 +6190,8 @@
         </p:nvSpPr>
         <p:spPr>
           <a:xfrm>
-            <a:off x="347472" y="1353312"/>
-            <a:ext cx="6583680" cy="1389888"/>
+            <a:off x="347472" y="1207008"/>
+            <a:ext cx="6583680" cy="1371600"/>
           </a:xfrm>
           <a:prstGeom prst="roundRect">
             <a:avLst/>
@@ -6049,8 +6233,8 @@
         </p:nvSpPr>
         <p:spPr>
           <a:xfrm>
-            <a:off x="512064" y="1426464"/>
-            <a:ext cx="6254496" cy="182880"/>
+            <a:off x="493776" y="1261872"/>
+            <a:ext cx="6291072" cy="164592"/>
           </a:xfrm>
           <a:prstGeom prst="rect">
             <a:avLst/>
@@ -6090,8 +6274,8 @@
         </p:nvSpPr>
         <p:spPr>
           <a:xfrm>
-            <a:off x="512064" y="1609344"/>
-            <a:ext cx="6254496" cy="256032"/>
+            <a:off x="493776" y="1426464"/>
+            <a:ext cx="6291072" cy="237744"/>
           </a:xfrm>
           <a:prstGeom prst="rect">
             <a:avLst/>
@@ -6111,7 +6295,7 @@
               </a:spcAft>
             </a:pPr>
             <a:r>
-              <a:rPr sz="1400" b="1">
+              <a:rPr sz="1300" b="1">
                 <a:solidFill>
                   <a:srgbClr val="FFFFFF"/>
                 </a:solidFill>
@@ -6131,8 +6315,8 @@
         </p:nvSpPr>
         <p:spPr>
           <a:xfrm>
-            <a:off x="512064" y="1883664"/>
-            <a:ext cx="6254496" cy="768096"/>
+            <a:off x="493776" y="1682496"/>
+            <a:ext cx="6291072" cy="822960"/>
           </a:xfrm>
           <a:prstGeom prst="rect">
             <a:avLst/>
@@ -6145,7 +6329,7 @@
           <a:p>
             <a:pPr algn="l">
               <a:lnSpc>
-                <a:spcPct val="105000"/>
+                <a:spcPct val="104000"/>
               </a:lnSpc>
               <a:spcAft>
                 <a:spcPts val="100"/>
@@ -6159,7 +6343,7 @@
                 <a:latin typeface="WenQuanYi Micro Hei"/>
                 <a:ea typeface="WenQuanYi Micro Hei"/>
               </a:rPr>
-              <a:t>消费者看见的是可订购、可计量、可追责的服务，而不是内部网元名称。</a:t>
+              <a:t>消费者看见的是可订购、可计量、可追责的服务，而不是内部网元名称。TMF/GSMA/CAMARA会先冻结这些外部行为，倒逼上游给出稳定语义和责任映射。</a:t>
             </a:r>
           </a:p>
         </p:txBody>
@@ -6172,8 +6356,8 @@
         </p:nvSpPr>
         <p:spPr>
           <a:xfrm>
-            <a:off x="347472" y="2907792"/>
-            <a:ext cx="6583680" cy="1389888"/>
+            <a:off x="347472" y="2743200"/>
+            <a:ext cx="6583680" cy="1371600"/>
           </a:xfrm>
           <a:prstGeom prst="roundRect">
             <a:avLst/>
@@ -6215,8 +6399,8 @@
         </p:nvSpPr>
         <p:spPr>
           <a:xfrm>
-            <a:off x="512064" y="2980944"/>
-            <a:ext cx="6254496" cy="182880"/>
+            <a:off x="493776" y="2798064"/>
+            <a:ext cx="6291072" cy="164592"/>
           </a:xfrm>
           <a:prstGeom prst="rect">
             <a:avLst/>
@@ -6256,8 +6440,8 @@
         </p:nvSpPr>
         <p:spPr>
           <a:xfrm>
-            <a:off x="512064" y="3163824"/>
-            <a:ext cx="6254496" cy="256032"/>
+            <a:off x="493776" y="2962656"/>
+            <a:ext cx="6291072" cy="237744"/>
           </a:xfrm>
           <a:prstGeom prst="rect">
             <a:avLst/>
@@ -6277,7 +6461,7 @@
               </a:spcAft>
             </a:pPr>
             <a:r>
-              <a:rPr sz="1400" b="1">
+              <a:rPr sz="1300" b="1">
                 <a:solidFill>
                   <a:srgbClr val="FFFFFF"/>
                 </a:solidFill>
@@ -6297,8 +6481,8 @@
         </p:nvSpPr>
         <p:spPr>
           <a:xfrm>
-            <a:off x="512064" y="3438144"/>
-            <a:ext cx="6254496" cy="768096"/>
+            <a:off x="493776" y="3218688"/>
+            <a:ext cx="6291072" cy="822960"/>
           </a:xfrm>
           <a:prstGeom prst="rect">
             <a:avLst/>
@@ -6311,7 +6495,7 @@
           <a:p>
             <a:pPr algn="l">
               <a:lnSpc>
-                <a:spcPct val="105000"/>
+                <a:spcPct val="104000"/>
               </a:lnSpc>
               <a:spcAft>
                 <a:spcPts val="100"/>
@@ -6325,7 +6509,7 @@
                 <a:latin typeface="WenQuanYi Micro Hei"/>
                 <a:ea typeface="WenQuanYi Micro Hei"/>
               </a:rPr>
-              <a:t>跨域复用真正依赖的是对象能否对齐、质量能否声明、动作能否回证。</a:t>
+              <a:t>跨域复用真正依赖对象能否对齐、质量能否声明、授权能否传递、动作能否回证。这是标准最可能先下手的控制层，也是三条路线最终都要交出的接口。</a:t>
             </a:r>
           </a:p>
         </p:txBody>
@@ -6338,8 +6522,8 @@
         </p:nvSpPr>
         <p:spPr>
           <a:xfrm>
-            <a:off x="347472" y="4462272"/>
-            <a:ext cx="6583680" cy="1389888"/>
+            <a:off x="347472" y="4279392"/>
+            <a:ext cx="6583680" cy="1371600"/>
           </a:xfrm>
           <a:prstGeom prst="roundRect">
             <a:avLst/>
@@ -6381,8 +6565,8 @@
         </p:nvSpPr>
         <p:spPr>
           <a:xfrm>
-            <a:off x="512064" y="4535424"/>
-            <a:ext cx="6254496" cy="182880"/>
+            <a:off x="493776" y="4334255"/>
+            <a:ext cx="6291072" cy="164592"/>
           </a:xfrm>
           <a:prstGeom prst="rect">
             <a:avLst/>
@@ -6422,8 +6606,8 @@
         </p:nvSpPr>
         <p:spPr>
           <a:xfrm>
-            <a:off x="512064" y="4718304"/>
-            <a:ext cx="6254496" cy="256032"/>
+            <a:off x="493776" y="4498848"/>
+            <a:ext cx="6291072" cy="237744"/>
           </a:xfrm>
           <a:prstGeom prst="rect">
             <a:avLst/>
@@ -6443,7 +6627,7 @@
               </a:spcAft>
             </a:pPr>
             <a:r>
-              <a:rPr sz="1400" b="1">
+              <a:rPr sz="1300" b="1">
                 <a:solidFill>
                   <a:srgbClr val="FFFFFF"/>
                 </a:solidFill>
@@ -6463,8 +6647,8 @@
         </p:nvSpPr>
         <p:spPr>
           <a:xfrm>
-            <a:off x="512064" y="4992624"/>
-            <a:ext cx="6254496" cy="768096"/>
+            <a:off x="493776" y="4754879"/>
+            <a:ext cx="6291072" cy="822960"/>
           </a:xfrm>
           <a:prstGeom prst="rect">
             <a:avLst/>
@@ -6477,7 +6661,7 @@
           <a:p>
             <a:pPr algn="l">
               <a:lnSpc>
-                <a:spcPct val="105000"/>
+                <a:spcPct val="104000"/>
               </a:lnSpc>
               <a:spcAft>
                 <a:spcPts val="100"/>
@@ -6491,7 +6675,7 @@
                 <a:latin typeface="WenQuanYi Micro Hei"/>
                 <a:ea typeface="WenQuanYi Micro Hei"/>
               </a:rPr>
-              <a:t>无线、会话和运维事实仍由网络域产生；标准先承认这些权威源，而不是另造一个总库。</a:t>
+              <a:t>无线、会话和运维事实仍由网络域产生。标准先承认这些权威源，而不是另造一个总库来替代RAN快环、会话状态或OAM对象。</a:t>
             </a:r>
           </a:p>
         </p:txBody>
@@ -6504,8 +6688,8 @@
         </p:nvSpPr>
         <p:spPr>
           <a:xfrm>
-            <a:off x="3364992" y="4187952"/>
-            <a:ext cx="384048" cy="256032"/>
+            <a:off x="3364992" y="4023360"/>
+            <a:ext cx="384048" cy="237744"/>
           </a:xfrm>
           <a:prstGeom prst="upArrow">
             <a:avLst/>
@@ -6547,8 +6731,8 @@
         </p:nvSpPr>
         <p:spPr>
           <a:xfrm>
-            <a:off x="3364992" y="2633472"/>
-            <a:ext cx="384048" cy="256032"/>
+            <a:off x="3364992" y="2487168"/>
+            <a:ext cx="384048" cy="237744"/>
           </a:xfrm>
           <a:prstGeom prst="upArrow">
             <a:avLst/>
@@ -6590,8 +6774,8 @@
         </p:nvSpPr>
         <p:spPr>
           <a:xfrm>
-            <a:off x="7114032" y="1353312"/>
-            <a:ext cx="4709160" cy="2084831"/>
+            <a:off x="7114032" y="1207008"/>
+            <a:ext cx="4709160" cy="2157984"/>
           </a:xfrm>
           <a:prstGeom prst="roundRect">
             <a:avLst/>
@@ -6635,8 +6819,8 @@
         </p:nvSpPr>
         <p:spPr>
           <a:xfrm>
-            <a:off x="7114032" y="1353312"/>
-            <a:ext cx="64008" cy="2084831"/>
+            <a:off x="7114032" y="1207008"/>
+            <a:ext cx="64008" cy="2157984"/>
           </a:xfrm>
           <a:prstGeom prst="rect">
             <a:avLst/>
@@ -6678,8 +6862,8 @@
         </p:nvSpPr>
         <p:spPr>
           <a:xfrm>
-            <a:off x="7260336" y="1417320"/>
-            <a:ext cx="4471416" cy="237744"/>
+            <a:off x="7260336" y="1252728"/>
+            <a:ext cx="4471416" cy="219456"/>
           </a:xfrm>
           <a:prstGeom prst="rect">
             <a:avLst/>
@@ -6719,8 +6903,8 @@
         </p:nvSpPr>
         <p:spPr>
           <a:xfrm>
-            <a:off x="7260336" y="1664208"/>
-            <a:ext cx="4471416" cy="1700784"/>
+            <a:off x="7260336" y="1481328"/>
+            <a:ext cx="4471416" cy="1828800"/>
           </a:xfrm>
           <a:prstGeom prst="rect">
             <a:avLst/>
@@ -6733,21 +6917,41 @@
           <a:p>
             <a:pPr algn="l">
               <a:lnSpc>
-                <a:spcPct val="106000"/>
-              </a:lnSpc>
-              <a:spcAft>
-                <a:spcPts val="100"/>
-              </a:spcAft>
-            </a:pPr>
-            <a:r>
-              <a:rPr sz="1100" b="0">
+                <a:spcPct val="104000"/>
+              </a:lnSpc>
+              <a:spcAft>
+                <a:spcPts val="100"/>
+              </a:spcAft>
+            </a:pPr>
+            <a:r>
+              <a:rPr sz="1050" b="0">
                 <a:solidFill>
                   <a:srgbClr val="2C3E50"/>
                 </a:solidFill>
                 <a:latin typeface="WenQuanYi Micro Hei"/>
                 <a:ea typeface="WenQuanYi Micro Hei"/>
               </a:rPr>
-              <a:t>角色、稳定标识、最小元数据、交付控制、QoD/授权/证据挂钩点，以及一致性测试。ZSM 029对注册、发现、资产和工作流的研究也指向这一方向。</a:t>
+              <a:t>角色、稳定标识、最小元数据、交付控制、QoD/授权/证据挂钩点，以及一致性测试。</a:t>
+            </a:r>
+          </a:p>
+          <a:p>
+            <a:pPr algn="l">
+              <a:lnSpc>
+                <a:spcPct val="104000"/>
+              </a:lnSpc>
+              <a:spcAft>
+                <a:spcPts val="100"/>
+              </a:spcAft>
+            </a:pPr>
+            <a:r>
+              <a:rPr sz="1050" b="0">
+                <a:solidFill>
+                  <a:srgbClr val="2C3E50"/>
+                </a:solidFill>
+                <a:latin typeface="WenQuanYi Micro Hei"/>
+                <a:ea typeface="WenQuanYi Micro Hei"/>
+              </a:rPr>
+              <a:t>ZSM 029对注册、发现、资产和工作流的研究也指向同一组外部行为，而不是指向某个平台形态。</a:t>
             </a:r>
           </a:p>
         </p:txBody>
@@ -6760,8 +6964,8 @@
         </p:nvSpPr>
         <p:spPr>
           <a:xfrm>
-            <a:off x="7114032" y="3566160"/>
-            <a:ext cx="4709160" cy="2084831"/>
+            <a:off x="7114032" y="3474720"/>
+            <a:ext cx="4709160" cy="2176272"/>
           </a:xfrm>
           <a:prstGeom prst="roundRect">
             <a:avLst/>
@@ -6805,8 +7009,8 @@
         </p:nvSpPr>
         <p:spPr>
           <a:xfrm>
-            <a:off x="7114032" y="3566160"/>
-            <a:ext cx="64008" cy="2084831"/>
+            <a:off x="7114032" y="3474720"/>
+            <a:ext cx="64008" cy="2176272"/>
           </a:xfrm>
           <a:prstGeom prst="rect">
             <a:avLst/>
@@ -6848,8 +7052,8 @@
         </p:nvSpPr>
         <p:spPr>
           <a:xfrm>
-            <a:off x="7260336" y="3630168"/>
-            <a:ext cx="4471416" cy="237744"/>
+            <a:off x="7260336" y="3520439"/>
+            <a:ext cx="4471416" cy="219456"/>
           </a:xfrm>
           <a:prstGeom prst="rect">
             <a:avLst/>
@@ -6889,8 +7093,8 @@
         </p:nvSpPr>
         <p:spPr>
           <a:xfrm>
-            <a:off x="7260336" y="3877056"/>
-            <a:ext cx="4471416" cy="1700784"/>
+            <a:off x="7260336" y="3749039"/>
+            <a:ext cx="4471416" cy="1847088"/>
           </a:xfrm>
           <a:prstGeom prst="rect">
             <a:avLst/>
@@ -6903,21 +7107,41 @@
           <a:p>
             <a:pPr algn="l">
               <a:lnSpc>
-                <a:spcPct val="106000"/>
-              </a:lnSpc>
-              <a:spcAft>
-                <a:spcPts val="100"/>
-              </a:spcAft>
-            </a:pPr>
-            <a:r>
-              <a:rPr sz="1100" b="0">
+                <a:spcPct val="104000"/>
+              </a:lnSpc>
+              <a:spcAft>
+                <a:spcPts val="100"/>
+              </a:spcAft>
+            </a:pPr>
+            <a:r>
+              <a:rPr sz="1050" b="0">
                 <a:solidFill>
                   <a:srgbClr val="2C3E50"/>
                 </a:solidFill>
                 <a:latin typeface="WenQuanYi Micro Hei"/>
                 <a:ea typeface="WenQuanYi Micro Hei"/>
               </a:rPr>
-              <a:t>既有NF增强、新NF、边缘Agent、管理侧服务、湖仓、消息运行时，以及是否存在独立Fabric，都仍是实现选择。标准不替厂商选定内部拓扑。</a:t>
+              <a:t>既有NF增强、新NF、边缘Agent、管理侧服务、湖仓和消息运行时，都可能承载同一外部行为。</a:t>
+            </a:r>
+          </a:p>
+          <a:p>
+            <a:pPr algn="l">
+              <a:lnSpc>
+                <a:spcPct val="104000"/>
+              </a:lnSpc>
+              <a:spcAft>
+                <a:spcPts val="100"/>
+              </a:spcAft>
+            </a:pPr>
+            <a:r>
+              <a:rPr sz="1050" b="0">
+                <a:solidFill>
+                  <a:srgbClr val="2C3E50"/>
+                </a:solidFill>
+                <a:latin typeface="WenQuanYi Micro Hei"/>
+                <a:ea typeface="WenQuanYi Micro Hei"/>
+              </a:rPr>
+              <a:t>是否存在独立Fabric仍是实现选择。标准不替厂商选定内部拓扑，也不把某家组件写成行业唯一答案。</a:t>
             </a:r>
           </a:p>
         </p:txBody>
@@ -6930,8 +7154,8 @@
         </p:nvSpPr>
         <p:spPr>
           <a:xfrm>
-            <a:off x="347472" y="5779008"/>
-            <a:ext cx="11475720" cy="731520"/>
+            <a:off x="347472" y="5742432"/>
+            <a:ext cx="11475720" cy="786384"/>
           </a:xfrm>
           <a:prstGeom prst="roundRect">
             <a:avLst/>
@@ -6975,8 +7199,8 @@
         </p:nvSpPr>
         <p:spPr>
           <a:xfrm>
-            <a:off x="457200" y="5824728"/>
-            <a:ext cx="5573268" cy="182880"/>
+            <a:off x="457200" y="5779008"/>
+            <a:ext cx="3691128" cy="164592"/>
           </a:xfrm>
           <a:prstGeom prst="rect">
             <a:avLst/>
@@ -7016,8 +7240,8 @@
         </p:nvSpPr>
         <p:spPr>
           <a:xfrm>
-            <a:off x="457200" y="5998464"/>
-            <a:ext cx="5573268" cy="457200"/>
+            <a:off x="457200" y="5943600"/>
+            <a:ext cx="3691128" cy="530352"/>
           </a:xfrm>
           <a:prstGeom prst="rect">
             <a:avLst/>
@@ -7044,7 +7268,7 @@
                 <a:latin typeface="WenQuanYi Micro Hei"/>
                 <a:ea typeface="WenQuanYi Micro Hei"/>
               </a:rPr>
-              <a:t>竞争从“组件是否存在”转向“接口能否互操作、后端能否替换、责任能否跨域传递”。</a:t>
+              <a:t>竞争从“组件是否存在”转向“接口能否互操作、后端能否替换、责任能否跨域传递”。名称相似不等于控制体系已经统一。</a:t>
             </a:r>
           </a:p>
         </p:txBody>
@@ -7057,8 +7281,8 @@
         </p:nvSpPr>
         <p:spPr>
           <a:xfrm>
-            <a:off x="6140196" y="5824728"/>
-            <a:ext cx="5573268" cy="182880"/>
+            <a:off x="4239768" y="5779008"/>
+            <a:ext cx="3691128" cy="164592"/>
           </a:xfrm>
           <a:prstGeom prst="rect">
             <a:avLst/>
@@ -7080,12 +7304,12 @@
             <a:r>
               <a:rPr sz="800" b="1">
                 <a:solidFill>
-                  <a:srgbClr val="B8860B"/>
-                </a:solidFill>
-                <a:latin typeface="WenQuanYi Micro Hei"/>
-                <a:ea typeface="WenQuanYi Micro Hei"/>
-              </a:rPr>
-              <a:t>停止线</a:t>
+                  <a:srgbClr val="0B1F3A"/>
+                </a:solidFill>
+                <a:latin typeface="WenQuanYi Micro Hei"/>
+                <a:ea typeface="WenQuanYi Micro Hei"/>
+              </a:rPr>
+              <a:t>判断含义</a:t>
             </a:r>
           </a:p>
         </p:txBody>
@@ -7098,8 +7322,8 @@
         </p:nvSpPr>
         <p:spPr>
           <a:xfrm>
-            <a:off x="6140196" y="5998464"/>
-            <a:ext cx="5573268" cy="457200"/>
+            <a:off x="4239768" y="5943600"/>
+            <a:ext cx="3691128" cy="530352"/>
           </a:xfrm>
           <a:prstGeom prst="rect">
             <a:avLst/>
@@ -7126,14 +7350,96 @@
                 <a:latin typeface="WenQuanYi Micro Hei"/>
                 <a:ea typeface="WenQuanYi Micro Hei"/>
               </a:rPr>
-              <a:t>Kafka、湖仓、完整知识图谱或独立Fabric都不是标准预设终点。</a:t>
-            </a:r>
-          </a:p>
-        </p:txBody>
-      </p:sp>
-      <p:sp>
-        <p:nvSpPr>
-          <p:cNvPr id="34" name="Rectangle 33"/>
+              <a:t>同一外部行为可以由网络原生功能、管理域服务或外部数据层分别实现；不同数据族也可以选择不同后端。</a:t>
+            </a:r>
+          </a:p>
+        </p:txBody>
+      </p:sp>
+      <p:sp>
+        <p:nvSpPr>
+          <p:cNvPr id="34" name="TextBox 33"/>
+          <p:cNvSpPr txBox="1"/>
+          <p:nvPr/>
+        </p:nvSpPr>
+        <p:spPr>
+          <a:xfrm>
+            <a:off x="8022336" y="5779008"/>
+            <a:ext cx="3691128" cy="164592"/>
+          </a:xfrm>
+          <a:prstGeom prst="rect">
+            <a:avLst/>
+          </a:prstGeom>
+          <a:noFill/>
+        </p:spPr>
+        <p:txBody>
+          <a:bodyPr wrap="square"/>
+          <a:lstStyle/>
+          <a:p>
+            <a:pPr algn="l">
+              <a:lnSpc>
+                <a:spcPct val="105000"/>
+              </a:lnSpc>
+              <a:spcAft>
+                <a:spcPts val="100"/>
+              </a:spcAft>
+            </a:pPr>
+            <a:r>
+              <a:rPr sz="800" b="1">
+                <a:solidFill>
+                  <a:srgbClr val="C0392B"/>
+                </a:solidFill>
+                <a:latin typeface="WenQuanYi Micro Hei"/>
+                <a:ea typeface="WenQuanYi Micro Hei"/>
+              </a:rPr>
+              <a:t>停止线</a:t>
+            </a:r>
+          </a:p>
+        </p:txBody>
+      </p:sp>
+      <p:sp>
+        <p:nvSpPr>
+          <p:cNvPr id="35" name="TextBox 34"/>
+          <p:cNvSpPr txBox="1"/>
+          <p:nvPr/>
+        </p:nvSpPr>
+        <p:spPr>
+          <a:xfrm>
+            <a:off x="8022336" y="5943600"/>
+            <a:ext cx="3691128" cy="530352"/>
+          </a:xfrm>
+          <a:prstGeom prst="rect">
+            <a:avLst/>
+          </a:prstGeom>
+          <a:noFill/>
+        </p:spPr>
+        <p:txBody>
+          <a:bodyPr wrap="square"/>
+          <a:lstStyle/>
+          <a:p>
+            <a:pPr algn="l">
+              <a:lnSpc>
+                <a:spcPct val="102000"/>
+              </a:lnSpc>
+              <a:spcAft>
+                <a:spcPts val="100"/>
+              </a:spcAft>
+            </a:pPr>
+            <a:r>
+              <a:rPr sz="800" b="0">
+                <a:solidFill>
+                  <a:srgbClr val="2C3E50"/>
+                </a:solidFill>
+                <a:latin typeface="WenQuanYi Micro Hei"/>
+                <a:ea typeface="WenQuanYi Micro Hei"/>
+              </a:rPr>
+              <a:t>Kafka、湖仓、完整知识图谱或独立Fabric都不是标准预设终点。不能用接口清单反推统一平台已经形成。</a:t>
+            </a:r>
+          </a:p>
+        </p:txBody>
+      </p:sp>
+      <p:sp>
+        <p:nvSpPr>
+          <p:cNvPr id="36" name="Rectangle 35"/>
           <p:cNvSpPr/>
           <p:nvPr/>
         </p:nvSpPr>
@@ -7176,7 +7482,7 @@
       </p:sp>
       <p:sp>
         <p:nvSpPr>
-          <p:cNvPr id="35" name="TextBox 34"/>
+          <p:cNvPr id="37" name="TextBox 36"/>
           <p:cNvSpPr txBox="1"/>
           <p:nvPr/>
         </p:nvSpPr>
@@ -7217,7 +7523,7 @@
       </p:sp>
       <p:sp>
         <p:nvSpPr>
-          <p:cNvPr id="36" name="TextBox 35"/>
+          <p:cNvPr id="38" name="TextBox 37"/>
           <p:cNvSpPr txBox="1"/>
           <p:nvPr/>
         </p:nvSpPr>
@@ -7451,7 +7757,7 @@
         <p:spPr>
           <a:xfrm>
             <a:off x="347472" y="640080"/>
-            <a:ext cx="11475720" cy="420624"/>
+            <a:ext cx="11475720" cy="493776"/>
           </a:xfrm>
           <a:prstGeom prst="roundRect">
             <a:avLst/>
@@ -7485,10 +7791,10 @@
           <a:p>
             <a:pPr algn="l">
               <a:lnSpc>
-                <a:spcPct val="105000"/>
+                <a:spcPct val="104000"/>
               </a:lnSpc>
               <a:spcBef>
-                <a:spcPts val="300"/>
+                <a:spcPts val="200"/>
               </a:spcBef>
               <a:spcAft>
                 <a:spcPts val="100"/>
@@ -7502,7 +7808,7 @@
                 <a:latin typeface="WenQuanYi Micro Hei"/>
                 <a:ea typeface="WenQuanYi Micro Hei"/>
               </a:rPr>
-              <a:t>数据在域内加工、按需联邦消费；统一的是治理视图，不是全部运行时。官方血缘是 Mediation→Telco DataOps，不是 EDCA→DataOps。</a:t>
+              <a:t>这是一条“先联邦、后治理”的路线：数据在域内加工、按需联邦消费，统一的是治理视图而不是全部运行时。公开材料支持架构思想连续，不支持已经形成一个统一商用Data Fabric SKU。官方产品血缘是 Mediation→Telco DataOps，不是 EDCA→DataOps。</a:t>
             </a:r>
           </a:p>
         </p:txBody>
@@ -7515,8 +7821,8 @@
         </p:nvSpPr>
         <p:spPr>
           <a:xfrm>
-            <a:off x="347472" y="1152144"/>
-            <a:ext cx="7059168" cy="4572000"/>
+            <a:off x="347472" y="1188720"/>
+            <a:ext cx="7059168" cy="4462272"/>
           </a:xfrm>
           <a:prstGeom prst="roundRect">
             <a:avLst/>
@@ -7568,8 +7874,8 @@
         </p:blipFill>
         <p:spPr>
           <a:xfrm>
-            <a:off x="751354" y="1225296"/>
-            <a:ext cx="6251402" cy="2697480"/>
+            <a:off x="995053" y="1243584"/>
+            <a:ext cx="5764004" cy="2487168"/>
           </a:xfrm>
           <a:prstGeom prst="rect">
             <a:avLst/>
@@ -7584,8 +7890,8 @@
         </p:nvSpPr>
         <p:spPr>
           <a:xfrm>
-            <a:off x="751354" y="1225296"/>
-            <a:ext cx="6251402" cy="2697480"/>
+            <a:off x="995053" y="1243584"/>
+            <a:ext cx="5764004" cy="2487168"/>
           </a:xfrm>
           <a:prstGeom prst="rect">
             <a:avLst/>
@@ -7627,8 +7933,8 @@
         </p:nvSpPr>
         <p:spPr>
           <a:xfrm>
-            <a:off x="512064" y="1280160"/>
-            <a:ext cx="1417320" cy="219456"/>
+            <a:off x="512064" y="1298448"/>
+            <a:ext cx="1417320" cy="201168"/>
           </a:xfrm>
           <a:prstGeom prst="roundRect">
             <a:avLst/>
@@ -7670,8 +7976,8 @@
         </p:nvSpPr>
         <p:spPr>
           <a:xfrm>
-            <a:off x="512064" y="1298448"/>
-            <a:ext cx="1417320" cy="201168"/>
+            <a:off x="512064" y="1316736"/>
+            <a:ext cx="1417320" cy="182880"/>
           </a:xfrm>
           <a:prstGeom prst="rect">
             <a:avLst/>
@@ -7711,8 +8017,8 @@
         </p:nvSpPr>
         <p:spPr>
           <a:xfrm>
-            <a:off x="457200" y="3931920"/>
-            <a:ext cx="6839712" cy="182880"/>
+            <a:off x="457200" y="3749039"/>
+            <a:ext cx="6839712" cy="164592"/>
           </a:xfrm>
           <a:prstGeom prst="rect">
             <a:avLst/>
@@ -7760,8 +8066,8 @@
         </p:blipFill>
         <p:spPr>
           <a:xfrm>
-            <a:off x="747268" y="4133087"/>
-            <a:ext cx="2665983" cy="1499616"/>
+            <a:off x="564896" y="3931920"/>
+            <a:ext cx="2893568" cy="1627632"/>
           </a:xfrm>
           <a:prstGeom prst="rect">
             <a:avLst/>
@@ -7776,8 +8082,8 @@
         </p:nvSpPr>
         <p:spPr>
           <a:xfrm>
-            <a:off x="747268" y="4133087"/>
-            <a:ext cx="2665983" cy="1499616"/>
+            <a:off x="564896" y="3931920"/>
+            <a:ext cx="2893568" cy="1627632"/>
           </a:xfrm>
           <a:prstGeom prst="rect">
             <a:avLst/>
@@ -7819,8 +8125,8 @@
         </p:nvSpPr>
         <p:spPr>
           <a:xfrm>
-            <a:off x="512064" y="4187952"/>
-            <a:ext cx="1234440" cy="201168"/>
+            <a:off x="512064" y="3986784"/>
+            <a:ext cx="1234440" cy="182880"/>
           </a:xfrm>
           <a:prstGeom prst="roundRect">
             <a:avLst/>
@@ -7862,8 +8168,8 @@
         </p:nvSpPr>
         <p:spPr>
           <a:xfrm>
-            <a:off x="512064" y="4206240"/>
-            <a:ext cx="1234440" cy="182880"/>
+            <a:off x="512064" y="4005072"/>
+            <a:ext cx="1234440" cy="164592"/>
           </a:xfrm>
           <a:prstGeom prst="rect">
             <a:avLst/>
@@ -7903,8 +8209,8 @@
         </p:nvSpPr>
         <p:spPr>
           <a:xfrm>
-            <a:off x="3803904" y="4133087"/>
-            <a:ext cx="3474720" cy="1499616"/>
+            <a:off x="3657600" y="3931920"/>
+            <a:ext cx="3621024" cy="1627632"/>
           </a:xfrm>
           <a:prstGeom prst="rect">
             <a:avLst/>
@@ -7917,61 +8223,61 @@
           <a:p>
             <a:pPr algn="l">
               <a:lnSpc>
-                <a:spcPct val="112000"/>
-              </a:lnSpc>
-              <a:spcAft>
-                <a:spcPts val="100"/>
-              </a:spcAft>
-            </a:pPr>
-            <a:r>
-              <a:rPr sz="950" b="0">
+                <a:spcPct val="106000"/>
+              </a:lnSpc>
+              <a:spcAft>
+                <a:spcPts val="100"/>
+              </a:spcAft>
+            </a:pPr>
+            <a:r>
+              <a:rPr sz="900" b="0">
                 <a:solidFill>
                   <a:srgbClr val="2C3E50"/>
                 </a:solidFill>
                 <a:latin typeface="WenQuanYi Micro Hei"/>
                 <a:ea typeface="WenQuanYi Micro Hei"/>
               </a:rPr>
-              <a:t>① 近源摄取仍保留：EDCA、DRG在Figure 18继续存在。</a:t>
+              <a:t>① 近源摄取仍保留：EDCA、DRG在2026 Figure 18继续存在，证明联邦摄取机制没有被废弃。</a:t>
             </a:r>
           </a:p>
           <a:p>
             <a:pPr algn="l">
               <a:lnSpc>
-                <a:spcPct val="112000"/>
-              </a:lnSpc>
-              <a:spcAft>
-                <a:spcPts val="100"/>
-              </a:spcAft>
-            </a:pPr>
-            <a:r>
-              <a:rPr sz="950" b="0">
+                <a:spcPct val="106000"/>
+              </a:lnSpc>
+              <a:spcAft>
+                <a:spcPts val="100"/>
+              </a:spcAft>
+            </a:pPr>
+            <a:r>
+              <a:rPr sz="900" b="0">
                 <a:solidFill>
                   <a:srgbClr val="2C3E50"/>
                 </a:solidFill>
                 <a:latin typeface="WenQuanYi Micro Hei"/>
                 <a:ea typeface="WenQuanYi Micro Hei"/>
               </a:rPr>
-              <a:t>② 联邦边界被扩展：客户侧DMF连接Ericsson侧EFDL/Data Fabric。</a:t>
+              <a:t>② 联邦边界被扩展：客户侧DMF连接Ericsson侧EFDL/Data Fabric，权威数据不必先搬迁。</a:t>
             </a:r>
           </a:p>
           <a:p>
             <a:pPr algn="l">
               <a:lnSpc>
-                <a:spcPct val="112000"/>
-              </a:lnSpc>
-              <a:spcAft>
-                <a:spcPts val="100"/>
-              </a:spcAft>
-            </a:pPr>
-            <a:r>
-              <a:rPr sz="950" b="0">
+                <a:spcPct val="106000"/>
+              </a:lnSpc>
+              <a:spcAft>
+                <a:spcPts val="100"/>
+              </a:spcAft>
+            </a:pPr>
+            <a:r>
+              <a:rPr sz="900" b="0">
                 <a:solidFill>
                   <a:srgbClr val="2C3E50"/>
                 </a:solidFill>
                 <a:latin typeface="WenQuanYi Micro Hei"/>
                 <a:ea typeface="WenQuanYi Micro Hei"/>
               </a:rPr>
-              <a:t>③ 治理范围上移：North Star增加目录、质量、血缘、语义/KG和数据产品。</a:t>
+              <a:t>③ 治理范围上移：North Star增加目录、质量、血缘、语义/KG和数据产品，但是future-state参考架构，不是已交付统一SKU。</a:t>
             </a:r>
           </a:p>
         </p:txBody>
@@ -7984,8 +8290,8 @@
         </p:nvSpPr>
         <p:spPr>
           <a:xfrm>
-            <a:off x="7534656" y="1152144"/>
-            <a:ext cx="4306824" cy="1444752"/>
+            <a:off x="7534656" y="1188720"/>
+            <a:ext cx="4306824" cy="1408176"/>
           </a:xfrm>
           <a:prstGeom prst="roundRect">
             <a:avLst/>
@@ -8029,8 +8335,8 @@
         </p:nvSpPr>
         <p:spPr>
           <a:xfrm>
-            <a:off x="7534656" y="1152144"/>
-            <a:ext cx="64008" cy="1444752"/>
+            <a:off x="7534656" y="1188720"/>
+            <a:ext cx="64008" cy="1408176"/>
           </a:xfrm>
           <a:prstGeom prst="rect">
             <a:avLst/>
@@ -8072,8 +8378,8 @@
         </p:nvSpPr>
         <p:spPr>
           <a:xfrm>
-            <a:off x="7680960" y="1216152"/>
-            <a:ext cx="4069080" cy="237744"/>
+            <a:off x="7680960" y="1234440"/>
+            <a:ext cx="4069080" cy="219456"/>
           </a:xfrm>
           <a:prstGeom prst="rect">
             <a:avLst/>
@@ -8114,7 +8420,7 @@
         <p:spPr>
           <a:xfrm>
             <a:off x="7680960" y="1463040"/>
-            <a:ext cx="4069080" cy="1060704"/>
+            <a:ext cx="4069080" cy="1078992"/>
           </a:xfrm>
           <a:prstGeom prst="rect">
             <a:avLst/>
@@ -8127,21 +8433,41 @@
           <a:p>
             <a:pPr algn="l">
               <a:lnSpc>
-                <a:spcPct val="106000"/>
-              </a:lnSpc>
-              <a:spcAft>
-                <a:spcPts val="100"/>
-              </a:spcAft>
-            </a:pPr>
-            <a:r>
-              <a:rPr sz="1000" b="0">
+                <a:spcPct val="104000"/>
+              </a:lnSpc>
+              <a:spcAft>
+                <a:spcPts val="100"/>
+              </a:spcAft>
+            </a:pPr>
+            <a:r>
+              <a:rPr sz="950" b="0">
                 <a:solidFill>
                   <a:srgbClr val="2C3E50"/>
                 </a:solidFill>
                 <a:latin typeface="WenQuanYi Micro Hei"/>
                 <a:ea typeface="WenQuanYi Micro Hei"/>
               </a:rPr>
-              <a:t>数据在域内采集加工，经联邦访问和智能移动供跨域消费。目录、策略和治理提供统一视图；执行仍分散在DataOps、NWDAF、EIAP/rApps和域系统。</a:t>
+              <a:t>数据在域内采集加工，经联邦访问和智能移动供跨域消费，重点不是把数据集中到一个湖。</a:t>
+            </a:r>
+          </a:p>
+          <a:p>
+            <a:pPr algn="l">
+              <a:lnSpc>
+                <a:spcPct val="104000"/>
+              </a:lnSpc>
+              <a:spcAft>
+                <a:spcPts val="100"/>
+              </a:spcAft>
+            </a:pPr>
+            <a:r>
+              <a:rPr sz="950" b="0">
+                <a:solidFill>
+                  <a:srgbClr val="2C3E50"/>
+                </a:solidFill>
+                <a:latin typeface="WenQuanYi Micro Hei"/>
+                <a:ea typeface="WenQuanYi Micro Hei"/>
+              </a:rPr>
+              <a:t>目录、策略、质量与血缘提供跨岛视图；执行仍分散在DataOps、NWDAF、EIAP/rApps和域系统。</a:t>
             </a:r>
           </a:p>
         </p:txBody>
@@ -8154,8 +8480,8 @@
         </p:nvSpPr>
         <p:spPr>
           <a:xfrm>
-            <a:off x="7534656" y="2706624"/>
-            <a:ext cx="4306824" cy="1444752"/>
+            <a:off x="7534656" y="2688336"/>
+            <a:ext cx="4306824" cy="1408176"/>
           </a:xfrm>
           <a:prstGeom prst="roundRect">
             <a:avLst/>
@@ -8199,8 +8525,8 @@
         </p:nvSpPr>
         <p:spPr>
           <a:xfrm>
-            <a:off x="7534656" y="2706624"/>
-            <a:ext cx="64008" cy="1444752"/>
+            <a:off x="7534656" y="2688336"/>
+            <a:ext cx="64008" cy="1408176"/>
           </a:xfrm>
           <a:prstGeom prst="rect">
             <a:avLst/>
@@ -8242,8 +8568,8 @@
         </p:nvSpPr>
         <p:spPr>
           <a:xfrm>
-            <a:off x="7680960" y="2770632"/>
-            <a:ext cx="4069080" cy="237744"/>
+            <a:off x="7680960" y="2734056"/>
+            <a:ext cx="4069080" cy="219456"/>
           </a:xfrm>
           <a:prstGeom prst="rect">
             <a:avLst/>
@@ -8283,8 +8609,8 @@
         </p:nvSpPr>
         <p:spPr>
           <a:xfrm>
-            <a:off x="7680960" y="3017520"/>
-            <a:ext cx="4069080" cy="1060704"/>
+            <a:off x="7680960" y="2962656"/>
+            <a:ext cx="4069080" cy="1078992"/>
           </a:xfrm>
           <a:prstGeom prst="rect">
             <a:avLst/>
@@ -8297,21 +8623,41 @@
           <a:p>
             <a:pPr algn="l">
               <a:lnSpc>
-                <a:spcPct val="106000"/>
-              </a:lnSpc>
-              <a:spcAft>
-                <a:spcPts val="100"/>
-              </a:spcAft>
-            </a:pPr>
-            <a:r>
-              <a:rPr sz="1000" b="0">
+                <a:spcPct val="104000"/>
+              </a:lnSpc>
+              <a:spcAft>
+                <a:spcPts val="100"/>
+              </a:spcAft>
+            </a:pPr>
+            <a:r>
+              <a:rPr sz="950" b="0">
                 <a:solidFill>
                   <a:srgbClr val="2C3E50"/>
                 </a:solidFill>
                 <a:latin typeface="WenQuanYi Micro Hei"/>
                 <a:ea typeface="WenQuanYi Micro Hei"/>
               </a:rPr>
-              <a:t>RAN、Core、OSS/BSS和边缘权威源天然分散；Mediation、NWDAF、SMO/RIC和客户湖仓不可跳过。先连接数据岛，再逐步补齐治理。</a:t>
+              <a:t>RAN、Core、OSS/BSS和边缘拥有不同对象、时标和故障域，权威源天然分散。</a:t>
+            </a:r>
+          </a:p>
+          <a:p>
+            <a:pPr algn="l">
+              <a:lnSpc>
+                <a:spcPct val="104000"/>
+              </a:lnSpc>
+              <a:spcAft>
+                <a:spcPts val="100"/>
+              </a:spcAft>
+            </a:pPr>
+            <a:r>
+              <a:rPr sz="950" b="0">
+                <a:solidFill>
+                  <a:srgbClr val="2C3E50"/>
+                </a:solidFill>
+                <a:latin typeface="WenQuanYi Micro Hei"/>
+                <a:ea typeface="WenQuanYi Micro Hei"/>
+              </a:rPr>
+              <a:t>Mediation、NWDAF、SMO/RIC和客户湖仓不可跳过。先连接数据岛、对齐外部行为，再决定内部控制是否值得收敛。</a:t>
             </a:r>
           </a:p>
         </p:txBody>
@@ -8324,7 +8670,7 @@
         </p:nvSpPr>
         <p:spPr>
           <a:xfrm>
-            <a:off x="7534656" y="4261104"/>
+            <a:off x="7534656" y="4187952"/>
             <a:ext cx="4306824" cy="1463040"/>
           </a:xfrm>
           <a:prstGeom prst="roundRect">
@@ -8369,7 +8715,7 @@
         </p:nvSpPr>
         <p:spPr>
           <a:xfrm>
-            <a:off x="7534656" y="4261104"/>
+            <a:off x="7534656" y="4187952"/>
             <a:ext cx="64008" cy="1463040"/>
           </a:xfrm>
           <a:prstGeom prst="rect">
@@ -8412,8 +8758,8 @@
         </p:nvSpPr>
         <p:spPr>
           <a:xfrm>
-            <a:off x="7680960" y="4325112"/>
-            <a:ext cx="4069080" cy="237744"/>
+            <a:off x="7680960" y="4233672"/>
+            <a:ext cx="4069080" cy="219456"/>
           </a:xfrm>
           <a:prstGeom prst="rect">
             <a:avLst/>
@@ -8453,8 +8799,8 @@
         </p:nvSpPr>
         <p:spPr>
           <a:xfrm>
-            <a:off x="7680960" y="4572000"/>
-            <a:ext cx="4069080" cy="1078992"/>
+            <a:off x="7680960" y="4462272"/>
+            <a:ext cx="4069080" cy="1133856"/>
           </a:xfrm>
           <a:prstGeom prst="rect">
             <a:avLst/>
@@ -8467,21 +8813,41 @@
           <a:p>
             <a:pPr algn="l">
               <a:lnSpc>
-                <a:spcPct val="106000"/>
-              </a:lnSpc>
-              <a:spcAft>
-                <a:spcPts val="100"/>
-              </a:spcAft>
-            </a:pPr>
-            <a:r>
-              <a:rPr sz="1000" b="0">
+                <a:spcPct val="104000"/>
+              </a:lnSpc>
+              <a:spcAft>
+                <a:spcPts val="100"/>
+              </a:spcAft>
+            </a:pPr>
+            <a:r>
+              <a:rPr sz="950" b="0">
                 <a:solidFill>
                   <a:srgbClr val="2C3E50"/>
                 </a:solidFill>
                 <a:latin typeface="WenQuanYi Micro Hei"/>
                 <a:ea typeface="WenQuanYi Micro Hei"/>
               </a:rPr>
-              <a:t>优势是渐进接入、多后端、迁移风险低。代价是跨产品Schema、QoD、策略和版本可能长期碎片化。</a:t>
+              <a:t>优势是渐进接入、多后端和源侧权威，迁移风险低，也更容易进入异构数据栈。</a:t>
+            </a:r>
+          </a:p>
+          <a:p>
+            <a:pPr algn="l">
+              <a:lnSpc>
+                <a:spcPct val="104000"/>
+              </a:lnSpc>
+              <a:spcAft>
+                <a:spcPts val="100"/>
+              </a:spcAft>
+            </a:pPr>
+            <a:r>
+              <a:rPr sz="950" b="0">
+                <a:solidFill>
+                  <a:srgbClr val="2C3E50"/>
+                </a:solidFill>
+                <a:latin typeface="WenQuanYi Micro Hei"/>
+                <a:ea typeface="WenQuanYi Micro Hei"/>
+              </a:rPr>
+              <a:t>代价是跨产品Schema、QoD、策略和版本可能长期碎片化；协调成本若高于替换成本，联邦优势会下降。</a:t>
             </a:r>
           </a:p>
         </p:txBody>
@@ -8494,8 +8860,8 @@
         </p:nvSpPr>
         <p:spPr>
           <a:xfrm>
-            <a:off x="347472" y="5833872"/>
-            <a:ext cx="11475720" cy="694944"/>
+            <a:off x="347472" y="5742432"/>
+            <a:ext cx="11475720" cy="786384"/>
           </a:xfrm>
           <a:prstGeom prst="roundRect">
             <a:avLst/>
@@ -8539,8 +8905,8 @@
         </p:nvSpPr>
         <p:spPr>
           <a:xfrm>
-            <a:off x="457200" y="5879592"/>
-            <a:ext cx="3678936" cy="182880"/>
+            <a:off x="457200" y="5779008"/>
+            <a:ext cx="3691128" cy="164592"/>
           </a:xfrm>
           <a:prstGeom prst="rect">
             <a:avLst/>
@@ -8580,8 +8946,8 @@
         </p:nvSpPr>
         <p:spPr>
           <a:xfrm>
-            <a:off x="457200" y="6053328"/>
-            <a:ext cx="3678936" cy="420624"/>
+            <a:off x="457200" y="5943600"/>
+            <a:ext cx="3691128" cy="530352"/>
           </a:xfrm>
           <a:prstGeom prst="rect">
             <a:avLst/>
@@ -8608,7 +8974,7 @@
                 <a:latin typeface="WenQuanYi Micro Hei"/>
                 <a:ea typeface="WenQuanYi Micro Hei"/>
               </a:rPr>
-              <a:t>Figure 18延续EDCA/DRG；Mediation、EIAP、NWDAF分别有产品或部署锚点。</a:t>
+              <a:t>Figure 18延续EDCA/DRG；Mediation、EIAP、NWDAF和API渠道分别有产品或部署锚点。North Star把范围扩到语义/KG、质量和数据产品，但仍是参考架构。</a:t>
             </a:r>
           </a:p>
         </p:txBody>
@@ -8621,8 +8987,8 @@
         </p:nvSpPr>
         <p:spPr>
           <a:xfrm>
-            <a:off x="4245864" y="5879592"/>
-            <a:ext cx="3678936" cy="182880"/>
+            <a:off x="4239768" y="5779008"/>
+            <a:ext cx="3691128" cy="164592"/>
           </a:xfrm>
           <a:prstGeom prst="rect">
             <a:avLst/>
@@ -8662,8 +9028,8 @@
         </p:nvSpPr>
         <p:spPr>
           <a:xfrm>
-            <a:off x="4245864" y="6053328"/>
-            <a:ext cx="3678936" cy="420624"/>
+            <a:off x="4239768" y="5943600"/>
+            <a:ext cx="3691128" cy="530352"/>
           </a:xfrm>
           <a:prstGeom prst="rect">
             <a:avLst/>
@@ -8690,7 +9056,7 @@
                 <a:latin typeface="WenQuanYi Micro Hei"/>
                 <a:ea typeface="WenQuanYi Micro Hei"/>
               </a:rPr>
-              <a:t>官方产品血缘是 Mediation→Telco DataOps，不是 EDCA→DataOps。</a:t>
+              <a:t>官方产品血缘是 Mediation→Telco DataOps，不是 EDCA→DataOps。DDC/GDC名称消失只能说明功能重组。“no data copy”应读成减少不必要复制。</a:t>
             </a:r>
           </a:p>
         </p:txBody>
@@ -8703,8 +9069,8 @@
         </p:nvSpPr>
         <p:spPr>
           <a:xfrm>
-            <a:off x="8034528" y="5879592"/>
-            <a:ext cx="3678936" cy="182880"/>
+            <a:off x="8022336" y="5779008"/>
+            <a:ext cx="3691128" cy="164592"/>
           </a:xfrm>
           <a:prstGeom prst="rect">
             <a:avLst/>
@@ -8744,8 +9110,8 @@
         </p:nvSpPr>
         <p:spPr>
           <a:xfrm>
-            <a:off x="8034528" y="6053328"/>
-            <a:ext cx="3678936" cy="420624"/>
+            <a:off x="8022336" y="5943600"/>
+            <a:ext cx="3691128" cy="530352"/>
           </a:xfrm>
           <a:prstGeom prst="rect">
             <a:avLst/>
@@ -8772,7 +9138,7 @@
                 <a:latin typeface="WenQuanYi Micro Hei"/>
                 <a:ea typeface="WenQuanYi Micro Hei"/>
               </a:rPr>
-              <a:t>同一版本化数据产品能否跨DataOps、EIAP、NWDAF及第三方后端复用，无需项目级重写。</a:t>
+              <a:t>同一版本化数据产品能否跨DataOps、EIAP、NWDAF及第三方后端复用，无需项目级重写，并在断链、回退与动作回证上满足通信预算。</a:t>
             </a:r>
           </a:p>
         </p:txBody>
@@ -9097,7 +9463,7 @@
         <p:spPr>
           <a:xfrm>
             <a:off x="347472" y="640080"/>
-            <a:ext cx="11475720" cy="420624"/>
+            <a:ext cx="11475720" cy="493776"/>
           </a:xfrm>
           <a:prstGeom prst="roundRect">
             <a:avLst/>
@@ -9131,10 +9497,10 @@
           <a:p>
             <a:pPr algn="l">
               <a:lnSpc>
-                <a:spcPct val="105000"/>
+                <a:spcPct val="104000"/>
               </a:lnSpc>
               <a:spcBef>
-                <a:spcPts val="300"/>
+                <a:spcPts val="200"/>
               </a:spcBef>
               <a:spcAft>
                 <a:spcPts val="100"/>
@@ -9148,7 +9514,7 @@
                 <a:latin typeface="WenQuanYi Micro Hei"/>
                 <a:ea typeface="WenQuanYi Micro Hei"/>
               </a:rPr>
-              <a:t>DO编排拓扑，DA近源处理，DCP异步分发。这首先是6G数据面机制，不能把“补成Fabric”当成唯一终点。</a:t>
+              <a:t>这是一条“先重构执行、再决定治理边界”的路线：DO编排拓扑，DA近源处理，DCP异步分发。它首先是6G数据面机制，能吸收部分发现、编排和交付能力，但不会自动解决跨域语义、QoD、血缘与产品责任。不能把“补成Fabric”当成唯一终点。</a:t>
             </a:r>
           </a:p>
         </p:txBody>
@@ -9161,8 +9527,8 @@
         </p:nvSpPr>
         <p:spPr>
           <a:xfrm>
-            <a:off x="347472" y="1152144"/>
-            <a:ext cx="7059168" cy="4572000"/>
+            <a:off x="347472" y="1188720"/>
+            <a:ext cx="7059168" cy="4462272"/>
           </a:xfrm>
           <a:prstGeom prst="roundRect">
             <a:avLst/>
@@ -9214,8 +9580,8 @@
         </p:blipFill>
         <p:spPr>
           <a:xfrm>
-            <a:off x="855401" y="1243584"/>
-            <a:ext cx="6043308" cy="3246120"/>
+            <a:off x="1085217" y="1243584"/>
+            <a:ext cx="5583676" cy="2999232"/>
           </a:xfrm>
           <a:prstGeom prst="rect">
             <a:avLst/>
@@ -9230,8 +9596,8 @@
         </p:nvSpPr>
         <p:spPr>
           <a:xfrm>
-            <a:off x="855401" y="1243584"/>
-            <a:ext cx="6043308" cy="3246120"/>
+            <a:off x="1085217" y="1243584"/>
+            <a:ext cx="5583676" cy="2999232"/>
           </a:xfrm>
           <a:prstGeom prst="rect">
             <a:avLst/>
@@ -9274,7 +9640,7 @@
         <p:spPr>
           <a:xfrm>
             <a:off x="512064" y="1298448"/>
-            <a:ext cx="1417320" cy="219456"/>
+            <a:ext cx="1417320" cy="201168"/>
           </a:xfrm>
           <a:prstGeom prst="roundRect">
             <a:avLst/>
@@ -9317,7 +9683,7 @@
         <p:spPr>
           <a:xfrm>
             <a:off x="512064" y="1316736"/>
-            <a:ext cx="1417320" cy="201168"/>
+            <a:ext cx="1417320" cy="182880"/>
           </a:xfrm>
           <a:prstGeom prst="rect">
             <a:avLst/>
@@ -9357,8 +9723,8 @@
         </p:nvSpPr>
         <p:spPr>
           <a:xfrm>
-            <a:off x="457200" y="4572000"/>
-            <a:ext cx="2194560" cy="182880"/>
+            <a:off x="457200" y="4315968"/>
+            <a:ext cx="2194560" cy="164592"/>
           </a:xfrm>
           <a:prstGeom prst="rect">
             <a:avLst/>
@@ -9398,8 +9764,8 @@
         </p:nvSpPr>
         <p:spPr>
           <a:xfrm>
-            <a:off x="457200" y="4754880"/>
-            <a:ext cx="2194560" cy="841248"/>
+            <a:off x="457200" y="4480560"/>
+            <a:ext cx="2194560" cy="1060704"/>
           </a:xfrm>
           <a:prstGeom prst="rect">
             <a:avLst/>
@@ -9412,7 +9778,7 @@
           <a:p>
             <a:pPr algn="l">
               <a:lnSpc>
-                <a:spcPct val="104000"/>
+                <a:spcPct val="103000"/>
               </a:lnSpc>
               <a:spcAft>
                 <a:spcPts val="100"/>
@@ -9426,7 +9792,7 @@
                 <a:latin typeface="WenQuanYi Micro Hei"/>
                 <a:ea typeface="WenQuanYi Micro Hei"/>
               </a:rPr>
-              <a:t>能力注册、操作DAG分解、选点与策略下发。登记的是执行能力，不是通用资产目录。</a:t>
+              <a:t>能力注册、操作DAG分解、选点与策略下发。登记的是“谁能执行什么”，不是通用资产目录。</a:t>
             </a:r>
           </a:p>
         </p:txBody>
@@ -9439,8 +9805,8 @@
         </p:nvSpPr>
         <p:spPr>
           <a:xfrm>
-            <a:off x="2743200" y="4572000"/>
-            <a:ext cx="2194560" cy="182880"/>
+            <a:off x="2743200" y="4315968"/>
+            <a:ext cx="2194560" cy="164592"/>
           </a:xfrm>
           <a:prstGeom prst="rect">
             <a:avLst/>
@@ -9480,8 +9846,8 @@
         </p:nvSpPr>
         <p:spPr>
           <a:xfrm>
-            <a:off x="2743200" y="4754880"/>
-            <a:ext cx="2194560" cy="841248"/>
+            <a:off x="2743200" y="4480560"/>
+            <a:ext cx="2194560" cy="1060704"/>
           </a:xfrm>
           <a:prstGeom prst="rect">
             <a:avLst/>
@@ -9494,7 +9860,7 @@
           <a:p>
             <a:pPr algn="l">
               <a:lnSpc>
-                <a:spcPct val="104000"/>
+                <a:spcPct val="103000"/>
               </a:lnSpc>
               <a:spcAft>
                 <a:spcPts val="100"/>
@@ -9508,7 +9874,7 @@
                 <a:latin typeface="WenQuanYi Micro Hei"/>
                 <a:ea typeface="WenQuanYi Micro Hei"/>
               </a:rPr>
-              <a:t>在UE、RAN、边缘和Core近源采集、处理、推理与存储。</a:t>
+              <a:t>在UE、RAN、边缘和Core近源采集、过滤、推理与存储，把计算放到数据所在故障域。</a:t>
             </a:r>
           </a:p>
         </p:txBody>
@@ -9521,8 +9887,8 @@
         </p:nvSpPr>
         <p:spPr>
           <a:xfrm>
-            <a:off x="5029200" y="4572000"/>
-            <a:ext cx="2194560" cy="182880"/>
+            <a:off x="5029200" y="4315968"/>
+            <a:ext cx="2194560" cy="164592"/>
           </a:xfrm>
           <a:prstGeom prst="rect">
             <a:avLst/>
@@ -9562,8 +9928,8 @@
         </p:nvSpPr>
         <p:spPr>
           <a:xfrm>
-            <a:off x="5029200" y="4754880"/>
-            <a:ext cx="2194560" cy="841248"/>
+            <a:off x="5029200" y="4480560"/>
+            <a:ext cx="2194560" cy="1060704"/>
           </a:xfrm>
           <a:prstGeom prst="rect">
             <a:avLst/>
@@ -9576,7 +9942,7 @@
           <a:p>
             <a:pPr algn="l">
               <a:lnSpc>
-                <a:spcPct val="104000"/>
+                <a:spcPct val="103000"/>
               </a:lnSpc>
               <a:spcAft>
                 <a:spcPts val="100"/>
@@ -9590,7 +9956,7 @@
                 <a:latin typeface="WenQuanYi Micro Hei"/>
                 <a:ea typeface="WenQuanYi Micro Hei"/>
               </a:rPr>
-              <a:t>以Pub/Sub解耦生产者和多消费者，服务AI/ISAC扇出。</a:t>
+              <a:t>以Pub/Sub解耦生产者和多消费者，服务AI/ISAC扇出，而不是沿用GTP会话模型。</a:t>
             </a:r>
           </a:p>
         </p:txBody>
@@ -9603,8 +9969,8 @@
         </p:nvSpPr>
         <p:spPr>
           <a:xfrm>
-            <a:off x="7534656" y="1152144"/>
-            <a:ext cx="4306824" cy="1444752"/>
+            <a:off x="7534656" y="1188720"/>
+            <a:ext cx="4306824" cy="1408176"/>
           </a:xfrm>
           <a:prstGeom prst="roundRect">
             <a:avLst/>
@@ -9648,8 +10014,8 @@
         </p:nvSpPr>
         <p:spPr>
           <a:xfrm>
-            <a:off x="7534656" y="1152144"/>
-            <a:ext cx="64008" cy="1444752"/>
+            <a:off x="7534656" y="1188720"/>
+            <a:ext cx="64008" cy="1408176"/>
           </a:xfrm>
           <a:prstGeom prst="rect">
             <a:avLst/>
@@ -9691,8 +10057,8 @@
         </p:nvSpPr>
         <p:spPr>
           <a:xfrm>
-            <a:off x="7680960" y="1216152"/>
-            <a:ext cx="4069080" cy="237744"/>
+            <a:off x="7680960" y="1234440"/>
+            <a:ext cx="4069080" cy="219456"/>
           </a:xfrm>
           <a:prstGeom prst="rect">
             <a:avLst/>
@@ -9733,7 +10099,7 @@
         <p:spPr>
           <a:xfrm>
             <a:off x="7680960" y="1463040"/>
-            <a:ext cx="4069080" cy="1060704"/>
+            <a:ext cx="4069080" cy="1078992"/>
           </a:xfrm>
           <a:prstGeom prst="rect">
             <a:avLst/>
@@ -9746,21 +10112,41 @@
           <a:p>
             <a:pPr algn="l">
               <a:lnSpc>
-                <a:spcPct val="106000"/>
-              </a:lnSpc>
-              <a:spcAft>
-                <a:spcPts val="100"/>
-              </a:spcAft>
-            </a:pPr>
-            <a:r>
-              <a:rPr sz="1050" b="0">
+                <a:spcPct val="104000"/>
+              </a:lnSpc>
+              <a:spcAft>
+                <a:spcPts val="100"/>
+              </a:spcAft>
+            </a:pPr>
+            <a:r>
+              <a:rPr sz="950" b="0">
                 <a:solidFill>
                   <a:srgbClr val="2C3E50"/>
                 </a:solidFill>
                 <a:latin typeface="WenQuanYi Micro Hei"/>
                 <a:ea typeface="WenQuanYi Micro Hei"/>
               </a:rPr>
-              <a:t>服务意图进入DO。DO选择执行能力、生成数据处理拓扑，并下发访问、隐私与资源策略。</a:t>
+              <a:t>服务请求向DO声明采集、过滤、聚合、转换、分析或推理目标。</a:t>
+            </a:r>
+          </a:p>
+          <a:p>
+            <a:pPr algn="l">
+              <a:lnSpc>
+                <a:spcPct val="104000"/>
+              </a:lnSpc>
+              <a:spcAft>
+                <a:spcPts val="100"/>
+              </a:spcAft>
+            </a:pPr>
+            <a:r>
+              <a:rPr sz="950" b="0">
+                <a:solidFill>
+                  <a:srgbClr val="2C3E50"/>
+                </a:solidFill>
+                <a:latin typeface="WenQuanYi Micro Hei"/>
+                <a:ea typeface="WenQuanYi Micro Hei"/>
+              </a:rPr>
+              <a:t>DO从能力注册中选择执行节点，拆解操作DAG，并下发拓扑、访问、隐私与资源策略。</a:t>
             </a:r>
           </a:p>
         </p:txBody>
@@ -9773,8 +10159,8 @@
         </p:nvSpPr>
         <p:spPr>
           <a:xfrm>
-            <a:off x="7534656" y="2706624"/>
-            <a:ext cx="4306824" cy="1444752"/>
+            <a:off x="7534656" y="2688336"/>
+            <a:ext cx="4306824" cy="1408176"/>
           </a:xfrm>
           <a:prstGeom prst="roundRect">
             <a:avLst/>
@@ -9818,8 +10204,8 @@
         </p:nvSpPr>
         <p:spPr>
           <a:xfrm>
-            <a:off x="7534656" y="2706624"/>
-            <a:ext cx="64008" cy="1444752"/>
+            <a:off x="7534656" y="2688336"/>
+            <a:ext cx="64008" cy="1408176"/>
           </a:xfrm>
           <a:prstGeom prst="rect">
             <a:avLst/>
@@ -9861,8 +10247,8 @@
         </p:nvSpPr>
         <p:spPr>
           <a:xfrm>
-            <a:off x="7680960" y="2770632"/>
-            <a:ext cx="4069080" cy="237744"/>
+            <a:off x="7680960" y="2734056"/>
+            <a:ext cx="4069080" cy="219456"/>
           </a:xfrm>
           <a:prstGeom prst="rect">
             <a:avLst/>
@@ -9902,8 +10288,8 @@
         </p:nvSpPr>
         <p:spPr>
           <a:xfrm>
-            <a:off x="7680960" y="3017520"/>
-            <a:ext cx="4069080" cy="1060704"/>
+            <a:off x="7680960" y="2962656"/>
+            <a:ext cx="4069080" cy="1078992"/>
           </a:xfrm>
           <a:prstGeom prst="rect">
             <a:avLst/>
@@ -9916,21 +10302,41 @@
           <a:p>
             <a:pPr algn="l">
               <a:lnSpc>
-                <a:spcPct val="106000"/>
-              </a:lnSpc>
-              <a:spcAft>
-                <a:spcPts val="100"/>
-              </a:spcAft>
-            </a:pPr>
-            <a:r>
-              <a:rPr sz="1050" b="0">
+                <a:spcPct val="104000"/>
+              </a:lnSpc>
+              <a:spcAft>
+                <a:spcPts val="100"/>
+              </a:spcAft>
+            </a:pPr>
+            <a:r>
+              <a:rPr sz="950" b="0">
                 <a:solidFill>
                   <a:srgbClr val="2C3E50"/>
                 </a:solidFill>
                 <a:latin typeface="WenQuanYi Micro Hei"/>
                 <a:ea typeface="WenQuanYi Micro Hei"/>
               </a:rPr>
-              <a:t>源DA发布数据，DCP异步分发；DA/DPF沿途过滤、压缩、特征化和推理，上游模型输出可成为下游输入。</a:t>
+              <a:t>源DA发布topic，DCP按订阅或带内拓扑把数据异步送往多个处理/消费节点。</a:t>
+            </a:r>
+          </a:p>
+          <a:p>
+            <a:pPr algn="l">
+              <a:lnSpc>
+                <a:spcPct val="104000"/>
+              </a:lnSpc>
+              <a:spcAft>
+                <a:spcPts val="100"/>
+              </a:spcAft>
+            </a:pPr>
+            <a:r>
+              <a:rPr sz="950" b="0">
+                <a:solidFill>
+                  <a:srgbClr val="2C3E50"/>
+                </a:solidFill>
+                <a:latin typeface="WenQuanYi Micro Hei"/>
+                <a:ea typeface="WenQuanYi Micro Hei"/>
+              </a:rPr>
+              <a:t>DA/DPF沿途过滤、压缩、特征化和本地推理，上游模型输出还可成为下游输入。</a:t>
             </a:r>
           </a:p>
         </p:txBody>
@@ -9943,7 +10349,7 @@
         </p:nvSpPr>
         <p:spPr>
           <a:xfrm>
-            <a:off x="7534656" y="4261104"/>
+            <a:off x="7534656" y="4187952"/>
             <a:ext cx="4306824" cy="1463040"/>
           </a:xfrm>
           <a:prstGeom prst="roundRect">
@@ -9988,7 +10394,7 @@
         </p:nvSpPr>
         <p:spPr>
           <a:xfrm>
-            <a:off x="7534656" y="4261104"/>
+            <a:off x="7534656" y="4187952"/>
             <a:ext cx="64008" cy="1463040"/>
           </a:xfrm>
           <a:prstGeom prst="rect">
@@ -10031,8 +10437,8 @@
         </p:nvSpPr>
         <p:spPr>
           <a:xfrm>
-            <a:off x="7680960" y="4325112"/>
-            <a:ext cx="4069080" cy="237744"/>
+            <a:off x="7680960" y="4233672"/>
+            <a:ext cx="4069080" cy="219456"/>
           </a:xfrm>
           <a:prstGeom prst="rect">
             <a:avLst/>
@@ -10072,8 +10478,8 @@
         </p:nvSpPr>
         <p:spPr>
           <a:xfrm>
-            <a:off x="7680960" y="4572000"/>
-            <a:ext cx="4069080" cy="1078992"/>
+            <a:off x="7680960" y="4462272"/>
+            <a:ext cx="4069080" cy="1133856"/>
           </a:xfrm>
           <a:prstGeom prst="rect">
             <a:avLst/>
@@ -10086,21 +10492,41 @@
           <a:p>
             <a:pPr algn="l">
               <a:lnSpc>
-                <a:spcPct val="106000"/>
-              </a:lnSpc>
-              <a:spcAft>
-                <a:spcPts val="100"/>
-              </a:spcAft>
-            </a:pPr>
-            <a:r>
-              <a:rPr sz="1000" b="0">
+                <a:spcPct val="104000"/>
+              </a:lnSpc>
+              <a:spcAft>
+                <a:spcPts val="100"/>
+              </a:spcAft>
+            </a:pPr>
+            <a:r>
+              <a:rPr sz="950" b="0">
                 <a:solidFill>
                   <a:srgbClr val="2C3E50"/>
                 </a:solidFill>
                 <a:latin typeface="WenQuanYi Micro Hei"/>
                 <a:ea typeface="WenQuanYi Micro Hei"/>
               </a:rPr>
-              <a:t>AI/ISAC的多源、多处理、多汇和派生数据链，不完全适配围绕控制消息与连接设计的CP/UP。AUTINOps不是DCP商用证明。</a:t>
+              <a:t>SBI偏控制消息，PDU会话围绕连接；AI/ISAC需要多源、多处理、多汇和派生数据链。</a:t>
+            </a:r>
+          </a:p>
+          <a:p>
+            <a:pPr algn="l">
+              <a:lnSpc>
+                <a:spcPct val="104000"/>
+              </a:lnSpc>
+              <a:spcAft>
+                <a:spcPts val="100"/>
+              </a:spcAft>
+            </a:pPr>
+            <a:r>
+              <a:rPr sz="950" b="0">
+                <a:solidFill>
+                  <a:srgbClr val="2C3E50"/>
+                </a:solidFill>
+                <a:latin typeface="WenQuanYi Micro Hei"/>
+                <a:ea typeface="WenQuanYi Micro Hei"/>
+              </a:rPr>
+              <a:t>跨域语义与产品契约可能被网络原生吸收，也可能由管理域补充。AUTINOps不是DCP商用证明。</a:t>
             </a:r>
           </a:p>
         </p:txBody>
@@ -10113,8 +10539,8 @@
         </p:nvSpPr>
         <p:spPr>
           <a:xfrm>
-            <a:off x="347472" y="5833872"/>
-            <a:ext cx="11475720" cy="694944"/>
+            <a:off x="347472" y="5742432"/>
+            <a:ext cx="11475720" cy="786384"/>
           </a:xfrm>
           <a:prstGeom prst="roundRect">
             <a:avLst/>
@@ -10158,8 +10584,8 @@
         </p:nvSpPr>
         <p:spPr>
           <a:xfrm>
-            <a:off x="457200" y="5879592"/>
-            <a:ext cx="3678936" cy="182880"/>
+            <a:off x="457200" y="5779008"/>
+            <a:ext cx="3691128" cy="164592"/>
           </a:xfrm>
           <a:prstGeom prst="rect">
             <a:avLst/>
@@ -10199,8 +10625,8 @@
         </p:nvSpPr>
         <p:spPr>
           <a:xfrm>
-            <a:off x="457200" y="6053328"/>
-            <a:ext cx="3678936" cy="420624"/>
+            <a:off x="457200" y="5943600"/>
+            <a:ext cx="3691128" cy="530352"/>
           </a:xfrm>
           <a:prstGeom prst="rect">
             <a:avLst/>
@@ -10227,7 +10653,7 @@
                 <a:latin typeface="WenQuanYi Micro Hei"/>
                 <a:ea typeface="WenQuanYi Micro Hei"/>
               </a:rPr>
-              <a:t>DCP公开实验约2ms；10 broker、128KB消息约2,394.6MB/s。</a:t>
+              <a:t>DCP公开实验约2ms；10 broker、128KB消息约2,394.6MB/s，说明精简路径与横向吞吐具有潜力，仍属研究原型。</a:t>
             </a:r>
           </a:p>
         </p:txBody>
@@ -10240,8 +10666,8 @@
         </p:nvSpPr>
         <p:spPr>
           <a:xfrm>
-            <a:off x="4245864" y="5879592"/>
-            <a:ext cx="3678936" cy="182880"/>
+            <a:off x="4239768" y="5779008"/>
+            <a:ext cx="3691128" cy="164592"/>
           </a:xfrm>
           <a:prstGeom prst="rect">
             <a:avLst/>
@@ -10281,8 +10707,8 @@
         </p:nvSpPr>
         <p:spPr>
           <a:xfrm>
-            <a:off x="4245864" y="6053328"/>
-            <a:ext cx="3678936" cy="420624"/>
+            <a:off x="4239768" y="5943600"/>
+            <a:ext cx="3691128" cy="530352"/>
           </a:xfrm>
           <a:prstGeom prst="rect">
             <a:avLst/>
@@ -10309,7 +10735,7 @@
                 <a:latin typeface="WenQuanYi Micro Hei"/>
                 <a:ea typeface="WenQuanYi Micro Hei"/>
               </a:rPr>
-              <a:t>DCP移除持久化，RocketMQ对照开启持久化，不能外推为同功能全面领先。</a:t>
+              <a:t>DCP移除持久化，而RocketMQ对照开启持久化；结果不能外推为同功能全面领先，也没有证明长期可靠性。</a:t>
             </a:r>
           </a:p>
         </p:txBody>
@@ -10322,8 +10748,8 @@
         </p:nvSpPr>
         <p:spPr>
           <a:xfrm>
-            <a:off x="8034528" y="5879592"/>
-            <a:ext cx="3678936" cy="182880"/>
+            <a:off x="8022336" y="5779008"/>
+            <a:ext cx="3691128" cy="164592"/>
           </a:xfrm>
           <a:prstGeom prst="rect">
             <a:avLst/>
@@ -10363,8 +10789,8 @@
         </p:nvSpPr>
         <p:spPr>
           <a:xfrm>
-            <a:off x="8034528" y="6053328"/>
-            <a:ext cx="3678936" cy="420624"/>
+            <a:off x="8022336" y="5943600"/>
+            <a:ext cx="3691128" cy="530352"/>
           </a:xfrm>
           <a:prstGeom prst="rect">
             <a:avLst/>
@@ -10391,7 +10817,7 @@
                 <a:latin typeface="WenQuanYi Micro Hei"/>
                 <a:ea typeface="WenQuanYi Micro Hei"/>
               </a:rPr>
-              <a:t>同等持久化条件下的跨站故障、移动性、断链回退、多租户SLA和第三方算子。</a:t>
+              <a:t>同等持久化条件下的跨站故障、移动性、断链回退、多租户SLA和第三方算子测试。增强SBA/UP若已够用，新增平面必要性下降。</a:t>
             </a:r>
           </a:p>
         </p:txBody>
@@ -10716,7 +11142,7 @@
         <p:spPr>
           <a:xfrm>
             <a:off x="347472" y="640080"/>
-            <a:ext cx="11475720" cy="420624"/>
+            <a:ext cx="11475720" cy="493776"/>
           </a:xfrm>
           <a:prstGeom prst="roundRect">
             <a:avLst/>
@@ -10750,10 +11176,10 @@
           <a:p>
             <a:pPr algn="l">
               <a:lnSpc>
-                <a:spcPct val="105000"/>
+                <a:spcPct val="104000"/>
               </a:lnSpc>
               <a:spcBef>
-                <a:spcPts val="300"/>
+                <a:spcPts val="200"/>
               </a:spcBef>
               <a:spcAft>
                 <a:spcPts val="100"/>
@@ -10767,7 +11193,7 @@
                 <a:latin typeface="WenQuanYi Micro Hei"/>
                 <a:ea typeface="WenQuanYi Micro Hei"/>
               </a:rPr>
-              <a:t>Data Suite是数据管理层，AN Fabric是智能消费层；动作仍回OSS/RIC/SON，数据默认留域。两套Fabric不是同一层。</a:t>
+              <a:t>这是一条“先产品化能力、再验证统一控制”的路线。Data Suite是数据管理层，AN Fabric是智能消费层；动作仍回OSS/RIC/SON，数据默认留域。两套Fabric不是同一层。真正的竞争问题是它们能否共享契约并贯通到动作证据。</a:t>
             </a:r>
           </a:p>
         </p:txBody>
@@ -10780,8 +11206,8 @@
         </p:nvSpPr>
         <p:spPr>
           <a:xfrm>
-            <a:off x="347472" y="1152144"/>
-            <a:ext cx="7059168" cy="4572000"/>
+            <a:off x="347472" y="1188720"/>
+            <a:ext cx="7059168" cy="4462272"/>
           </a:xfrm>
           <a:prstGeom prst="roundRect">
             <a:avLst/>
@@ -10825,8 +11251,8 @@
         </p:nvSpPr>
         <p:spPr>
           <a:xfrm>
-            <a:off x="475488" y="1207008"/>
-            <a:ext cx="4160520" cy="201168"/>
+            <a:off x="475488" y="1225296"/>
+            <a:ext cx="4160520" cy="164592"/>
           </a:xfrm>
           <a:prstGeom prst="rect">
             <a:avLst/>
@@ -10846,7 +11272,7 @@
               </a:spcAft>
             </a:pPr>
             <a:r>
-              <a:rPr sz="900" b="1">
+              <a:rPr sz="850" b="1">
                 <a:solidFill>
                   <a:srgbClr val="0E7C7B"/>
                 </a:solidFill>
@@ -10866,7 +11292,7 @@
         </p:nvSpPr>
         <p:spPr>
           <a:xfrm>
-            <a:off x="475488" y="1426464"/>
+            <a:off x="475488" y="1408176"/>
             <a:ext cx="4160520" cy="658368"/>
           </a:xfrm>
           <a:prstGeom prst="roundRect">
@@ -10909,8 +11335,8 @@
         </p:nvSpPr>
         <p:spPr>
           <a:xfrm>
-            <a:off x="603504" y="1481328"/>
-            <a:ext cx="3904487" cy="256032"/>
+            <a:off x="603504" y="1453896"/>
+            <a:ext cx="3904487" cy="237744"/>
           </a:xfrm>
           <a:prstGeom prst="rect">
             <a:avLst/>
@@ -10930,7 +11356,7 @@
               </a:spcAft>
             </a:pPr>
             <a:r>
-              <a:rPr sz="1200" b="1">
+              <a:rPr sz="1100" b="1">
                 <a:solidFill>
                   <a:srgbClr val="FFFFFF"/>
                 </a:solidFill>
@@ -10950,8 +11376,8 @@
         </p:nvSpPr>
         <p:spPr>
           <a:xfrm>
-            <a:off x="603504" y="1737360"/>
-            <a:ext cx="3904487" cy="274320"/>
+            <a:off x="603504" y="1700784"/>
+            <a:ext cx="3904487" cy="310896"/>
           </a:xfrm>
           <a:prstGeom prst="rect">
             <a:avLst/>
@@ -10971,14 +11397,14 @@
               </a:spcAft>
             </a:pPr>
             <a:r>
-              <a:rPr sz="950" b="0">
+              <a:rPr sz="900" b="0">
                 <a:solidFill>
                   <a:srgbClr val="FFFFFF"/>
                 </a:solidFill>
                 <a:latin typeface="WenQuanYi Micro Hei"/>
                 <a:ea typeface="WenQuanYi Micro Hei"/>
               </a:rPr>
-              <a:t>Domain lakehouse  ·  本地权威事实</a:t>
+              <a:t>Domain lakehouse  ·  各域本地采集、加工与存储</a:t>
             </a:r>
           </a:p>
         </p:txBody>
@@ -10991,8 +11417,8 @@
         </p:nvSpPr>
         <p:spPr>
           <a:xfrm>
-            <a:off x="2395728" y="2066543"/>
-            <a:ext cx="201168" cy="146304"/>
+            <a:off x="2395728" y="2048256"/>
+            <a:ext cx="201168" cy="128016"/>
           </a:xfrm>
           <a:prstGeom prst="downArrow">
             <a:avLst/>
@@ -11034,7 +11460,7 @@
         </p:nvSpPr>
         <p:spPr>
           <a:xfrm>
-            <a:off x="475488" y="2231136"/>
+            <a:off x="475488" y="2194560"/>
             <a:ext cx="4160520" cy="658368"/>
           </a:xfrm>
           <a:prstGeom prst="roundRect">
@@ -11077,8 +11503,8 @@
         </p:nvSpPr>
         <p:spPr>
           <a:xfrm>
-            <a:off x="603504" y="2286000"/>
-            <a:ext cx="3904487" cy="256032"/>
+            <a:off x="603504" y="2240279"/>
+            <a:ext cx="3904487" cy="237744"/>
           </a:xfrm>
           <a:prstGeom prst="rect">
             <a:avLst/>
@@ -11098,7 +11524,7 @@
               </a:spcAft>
             </a:pPr>
             <a:r>
-              <a:rPr sz="1200" b="1">
+              <a:rPr sz="1100" b="1">
                 <a:solidFill>
                   <a:srgbClr val="FFFFFF"/>
                 </a:solidFill>
@@ -11118,8 +11544,8 @@
         </p:nvSpPr>
         <p:spPr>
           <a:xfrm>
-            <a:off x="603504" y="2542032"/>
-            <a:ext cx="3904487" cy="274320"/>
+            <a:off x="603504" y="2487168"/>
+            <a:ext cx="3904487" cy="310896"/>
           </a:xfrm>
           <a:prstGeom prst="rect">
             <a:avLst/>
@@ -11139,14 +11565,14 @@
               </a:spcAft>
             </a:pPr>
             <a:r>
-              <a:rPr sz="950" b="0">
+              <a:rPr sz="900" b="0">
                 <a:solidFill>
                   <a:srgbClr val="FFFFFF"/>
                 </a:solidFill>
                 <a:latin typeface="WenQuanYi Micro Hei"/>
                 <a:ea typeface="WenQuanYi Micro Hei"/>
               </a:rPr>
-              <a:t>适配  ·  抽象  ·  联邦访问，而非强制集中</a:t>
+              <a:t>适配、抽象和联邦访问，提供逻辑视图而非强制集中</a:t>
             </a:r>
           </a:p>
         </p:txBody>
@@ -11159,8 +11585,8 @@
         </p:nvSpPr>
         <p:spPr>
           <a:xfrm>
-            <a:off x="2395728" y="2871215"/>
-            <a:ext cx="201168" cy="146304"/>
+            <a:off x="2395728" y="2834639"/>
+            <a:ext cx="201168" cy="128016"/>
           </a:xfrm>
           <a:prstGeom prst="downArrow">
             <a:avLst/>
@@ -11202,7 +11628,7 @@
         </p:nvSpPr>
         <p:spPr>
           <a:xfrm>
-            <a:off x="475488" y="3035808"/>
+            <a:off x="475488" y="2980944"/>
             <a:ext cx="4160520" cy="658368"/>
           </a:xfrm>
           <a:prstGeom prst="roundRect">
@@ -11245,8 +11671,8 @@
         </p:nvSpPr>
         <p:spPr>
           <a:xfrm>
-            <a:off x="603504" y="3090672"/>
-            <a:ext cx="3904487" cy="256032"/>
+            <a:off x="603504" y="3026663"/>
+            <a:ext cx="3904487" cy="237744"/>
           </a:xfrm>
           <a:prstGeom prst="rect">
             <a:avLst/>
@@ -11266,7 +11692,7 @@
               </a:spcAft>
             </a:pPr>
             <a:r>
-              <a:rPr sz="1200" b="1">
+              <a:rPr sz="1100" b="1">
                 <a:solidFill>
                   <a:srgbClr val="FFFFFF"/>
                 </a:solidFill>
@@ -11286,8 +11712,8 @@
         </p:nvSpPr>
         <p:spPr>
           <a:xfrm>
-            <a:off x="603504" y="3346704"/>
-            <a:ext cx="3904487" cy="274320"/>
+            <a:off x="603504" y="3273551"/>
+            <a:ext cx="3904487" cy="310896"/>
           </a:xfrm>
           <a:prstGeom prst="rect">
             <a:avLst/>
@@ -11307,14 +11733,14 @@
               </a:spcAft>
             </a:pPr>
             <a:r>
-              <a:rPr sz="950" b="0">
+              <a:rPr sz="900" b="0">
                 <a:solidFill>
                   <a:srgbClr val="FFFFFF"/>
                 </a:solidFill>
                 <a:latin typeface="WenQuanYi Micro Hei"/>
                 <a:ea typeface="WenQuanYi Micro Hei"/>
               </a:rPr>
-              <a:t>语义  ·  QoD  ·  血缘  ·  数据产品</a:t>
+              <a:t>目录、语义、QoD、血缘和数据产品，与治理最直接重合</a:t>
             </a:r>
           </a:p>
         </p:txBody>
@@ -11327,8 +11753,8 @@
         </p:nvSpPr>
         <p:spPr>
           <a:xfrm>
-            <a:off x="2395728" y="3675888"/>
-            <a:ext cx="201168" cy="146304"/>
+            <a:off x="2395728" y="3621024"/>
+            <a:ext cx="201168" cy="128016"/>
           </a:xfrm>
           <a:prstGeom prst="downArrow">
             <a:avLst/>
@@ -11370,7 +11796,7 @@
         </p:nvSpPr>
         <p:spPr>
           <a:xfrm>
-            <a:off x="475488" y="3840480"/>
+            <a:off x="475488" y="3767328"/>
             <a:ext cx="4160520" cy="658368"/>
           </a:xfrm>
           <a:prstGeom prst="roundRect">
@@ -11413,8 +11839,8 @@
         </p:nvSpPr>
         <p:spPr>
           <a:xfrm>
-            <a:off x="603504" y="3895344"/>
-            <a:ext cx="3904487" cy="256032"/>
+            <a:off x="603504" y="3813048"/>
+            <a:ext cx="3904487" cy="237744"/>
           </a:xfrm>
           <a:prstGeom prst="rect">
             <a:avLst/>
@@ -11434,7 +11860,7 @@
               </a:spcAft>
             </a:pPr>
             <a:r>
-              <a:rPr sz="1200" b="1">
+              <a:rPr sz="1100" b="1">
                 <a:solidFill>
                   <a:srgbClr val="FFFFFF"/>
                 </a:solidFill>
@@ -11454,8 +11880,8 @@
         </p:nvSpPr>
         <p:spPr>
           <a:xfrm>
-            <a:off x="603504" y="4151376"/>
-            <a:ext cx="3904487" cy="274320"/>
+            <a:off x="603504" y="4059936"/>
+            <a:ext cx="3904487" cy="310896"/>
           </a:xfrm>
           <a:prstGeom prst="rect">
             <a:avLst/>
@@ -11475,14 +11901,14 @@
               </a:spcAft>
             </a:pPr>
             <a:r>
-              <a:rPr sz="950" b="0">
+              <a:rPr sz="900" b="0">
                 <a:solidFill>
                   <a:srgbClr val="FFFFFF"/>
                 </a:solidFill>
                 <a:latin typeface="WenQuanYi Micro Hei"/>
                 <a:ea typeface="WenQuanYi Micro Hei"/>
               </a:rPr>
-              <a:t>Sense  ·  Think  ·  Act  智能消费层</a:t>
+              <a:t>Sense–Think–Act 智能消费与编排，不是数据管理Fabric</a:t>
             </a:r>
           </a:p>
         </p:txBody>
@@ -11495,8 +11921,8 @@
         </p:nvSpPr>
         <p:spPr>
           <a:xfrm>
-            <a:off x="2395728" y="4480560"/>
-            <a:ext cx="201168" cy="146304"/>
+            <a:off x="2395728" y="4407408"/>
+            <a:ext cx="201168" cy="128016"/>
           </a:xfrm>
           <a:prstGeom prst="downArrow">
             <a:avLst/>
@@ -11538,7 +11964,7 @@
         </p:nvSpPr>
         <p:spPr>
           <a:xfrm>
-            <a:off x="475488" y="4645152"/>
+            <a:off x="475488" y="4553712"/>
             <a:ext cx="4160520" cy="658368"/>
           </a:xfrm>
           <a:prstGeom prst="roundRect">
@@ -11581,8 +12007,8 @@
         </p:nvSpPr>
         <p:spPr>
           <a:xfrm>
-            <a:off x="603504" y="4700016"/>
-            <a:ext cx="3904487" cy="256032"/>
+            <a:off x="603504" y="4599432"/>
+            <a:ext cx="3904487" cy="237744"/>
           </a:xfrm>
           <a:prstGeom prst="rect">
             <a:avLst/>
@@ -11602,7 +12028,7 @@
               </a:spcAft>
             </a:pPr>
             <a:r>
-              <a:rPr sz="1200" b="1">
+              <a:rPr sz="1100" b="1">
                 <a:solidFill>
                   <a:srgbClr val="FFFFFF"/>
                 </a:solidFill>
@@ -11622,8 +12048,8 @@
         </p:nvSpPr>
         <p:spPr>
           <a:xfrm>
-            <a:off x="603504" y="4956048"/>
-            <a:ext cx="3904487" cy="274320"/>
+            <a:off x="603504" y="4846320"/>
+            <a:ext cx="3904487" cy="310896"/>
           </a:xfrm>
           <a:prstGeom prst="rect">
             <a:avLst/>
@@ -11643,14 +12069,14 @@
               </a:spcAft>
             </a:pPr>
             <a:r>
-              <a:rPr sz="950" b="0">
+              <a:rPr sz="900" b="0">
                 <a:solidFill>
                   <a:srgbClr val="FFFFFF"/>
                 </a:solidFill>
                 <a:latin typeface="WenQuanYi Micro Hei"/>
                 <a:ea typeface="WenQuanYi Micro Hei"/>
               </a:rPr>
-              <a:t>OSS / RIC / SON 动作  ·  商业外延</a:t>
+              <a:t>高风险动作回OSS/RIC/SON，再向计量和渠道外延</a:t>
             </a:r>
           </a:p>
         </p:txBody>
@@ -11671,7 +12097,7 @@
         </p:blipFill>
         <p:spPr>
           <a:xfrm>
-            <a:off x="4754880" y="1662654"/>
+            <a:off x="4754880" y="1584930"/>
             <a:ext cx="2487168" cy="1859339"/>
           </a:xfrm>
           <a:prstGeom prst="rect">
@@ -11687,7 +12113,7 @@
         </p:nvSpPr>
         <p:spPr>
           <a:xfrm>
-            <a:off x="4754880" y="1662654"/>
+            <a:off x="4754880" y="1584930"/>
             <a:ext cx="2487168" cy="1859339"/>
           </a:xfrm>
           <a:prstGeom prst="rect">
@@ -11730,8 +12156,8 @@
         </p:nvSpPr>
         <p:spPr>
           <a:xfrm>
-            <a:off x="4809744" y="1481328"/>
-            <a:ext cx="2011680" cy="201168"/>
+            <a:off x="4809744" y="1463040"/>
+            <a:ext cx="2011680" cy="182880"/>
           </a:xfrm>
           <a:prstGeom prst="roundRect">
             <a:avLst/>
@@ -11773,8 +12199,8 @@
         </p:nvSpPr>
         <p:spPr>
           <a:xfrm>
-            <a:off x="4809744" y="1499616"/>
-            <a:ext cx="2011680" cy="182880"/>
+            <a:off x="4809744" y="1481328"/>
+            <a:ext cx="2011680" cy="164592"/>
           </a:xfrm>
           <a:prstGeom prst="rect">
             <a:avLst/>
@@ -11814,8 +12240,8 @@
         </p:nvSpPr>
         <p:spPr>
           <a:xfrm>
-            <a:off x="4754880" y="3840480"/>
-            <a:ext cx="2487168" cy="1737360"/>
+            <a:off x="4754880" y="3694176"/>
+            <a:ext cx="2487168" cy="1865376"/>
           </a:xfrm>
           <a:prstGeom prst="rect">
             <a:avLst/>
@@ -11828,61 +12254,61 @@
           <a:p>
             <a:pPr algn="l">
               <a:lnSpc>
-                <a:spcPct val="110000"/>
-              </a:lnSpc>
-              <a:spcAft>
-                <a:spcPts val="100"/>
-              </a:spcAft>
-            </a:pPr>
-            <a:r>
-              <a:rPr sz="950" b="0">
+                <a:spcPct val="106000"/>
+              </a:lnSpc>
+              <a:spcAft>
+                <a:spcPts val="100"/>
+              </a:spcAft>
+            </a:pPr>
+            <a:r>
+              <a:rPr sz="900" b="0">
                 <a:solidFill>
                   <a:srgbClr val="2C3E50"/>
                 </a:solidFill>
                 <a:latin typeface="WenQuanYi Micro Hei"/>
                 <a:ea typeface="WenQuanYi Micro Hei"/>
               </a:rPr>
-              <a:t>官方AN Fabric图只证明Sense–Think–Act智能层。</a:t>
+              <a:t>官方AN Fabric图只证明Sense–Think–Act智能层和Marketplace外延。</a:t>
             </a:r>
           </a:p>
           <a:p>
             <a:pPr algn="l">
               <a:lnSpc>
-                <a:spcPct val="110000"/>
-              </a:lnSpc>
-              <a:spcAft>
-                <a:spcPts val="100"/>
-              </a:spcAft>
-            </a:pPr>
-            <a:r>
-              <a:rPr sz="950" b="0">
+                <a:spcPct val="106000"/>
+              </a:lnSpc>
+              <a:spcAft>
+                <a:spcPts val="100"/>
+              </a:spcAft>
+            </a:pPr>
+            <a:r>
+              <a:rPr sz="900" b="0">
                 <a:solidFill>
                   <a:srgbClr val="2C3E50"/>
                 </a:solidFill>
                 <a:latin typeface="WenQuanYi Micro Hei"/>
                 <a:ea typeface="WenQuanYi Micro Hei"/>
               </a:rPr>
-              <a:t>Data Suite、域数据底座和公共湖仓不在这张图里，必须靠左侧自绘链路补齐。</a:t>
+              <a:t>Data Suite、域数据底座和公共湖仓不在这张图里，必须靠左侧自绘链路补齐，否则会把两套Fabric读成同一层。</a:t>
             </a:r>
           </a:p>
           <a:p>
             <a:pPr algn="l">
               <a:lnSpc>
-                <a:spcPct val="110000"/>
-              </a:lnSpc>
-              <a:spcAft>
-                <a:spcPts val="100"/>
-              </a:spcAft>
-            </a:pPr>
-            <a:r>
-              <a:rPr sz="950" b="0">
+                <a:spcPct val="106000"/>
+              </a:lnSpc>
+              <a:spcAft>
+                <a:spcPts val="100"/>
+              </a:spcAft>
+            </a:pPr>
+            <a:r>
+              <a:rPr sz="900" b="0">
                 <a:solidFill>
                   <a:srgbClr val="2C3E50"/>
                 </a:solidFill>
                 <a:latin typeface="WenQuanYi Micro Hei"/>
                 <a:ea typeface="WenQuanYi Micro Hei"/>
               </a:rPr>
-              <a:t>高风险动作仍经AN Apps回到域控制器。</a:t>
+              <a:t>高风险动作仍经AN Apps回到域控制器；公共层偏Non-RT，不能替代RAN快环。</a:t>
             </a:r>
           </a:p>
         </p:txBody>
@@ -11895,8 +12321,8 @@
         </p:nvSpPr>
         <p:spPr>
           <a:xfrm>
-            <a:off x="7534656" y="1152144"/>
-            <a:ext cx="4306824" cy="1444752"/>
+            <a:off x="7534656" y="1188720"/>
+            <a:ext cx="4306824" cy="1408176"/>
           </a:xfrm>
           <a:prstGeom prst="roundRect">
             <a:avLst/>
@@ -11940,8 +12366,8 @@
         </p:nvSpPr>
         <p:spPr>
           <a:xfrm>
-            <a:off x="7534656" y="1152144"/>
-            <a:ext cx="64008" cy="1444752"/>
+            <a:off x="7534656" y="1188720"/>
+            <a:ext cx="64008" cy="1408176"/>
           </a:xfrm>
           <a:prstGeom prst="rect">
             <a:avLst/>
@@ -11983,8 +12409,8 @@
         </p:nvSpPr>
         <p:spPr>
           <a:xfrm>
-            <a:off x="7680960" y="1216152"/>
-            <a:ext cx="4069080" cy="237744"/>
+            <a:off x="7680960" y="1234440"/>
+            <a:ext cx="4069080" cy="219456"/>
           </a:xfrm>
           <a:prstGeom prst="rect">
             <a:avLst/>
@@ -12025,7 +12451,7 @@
         <p:spPr>
           <a:xfrm>
             <a:off x="7680960" y="1463040"/>
-            <a:ext cx="4069080" cy="1060704"/>
+            <a:ext cx="4069080" cy="1078992"/>
           </a:xfrm>
           <a:prstGeom prst="rect">
             <a:avLst/>
@@ -12038,21 +12464,41 @@
           <a:p>
             <a:pPr algn="l">
               <a:lnSpc>
-                <a:spcPct val="106000"/>
-              </a:lnSpc>
-              <a:spcAft>
-                <a:spcPts val="100"/>
-              </a:spcAft>
-            </a:pPr>
-            <a:r>
-              <a:rPr sz="1000" b="0">
+                <a:spcPct val="104000"/>
+              </a:lnSpc>
+              <a:spcAft>
+                <a:spcPts val="100"/>
+              </a:spcAft>
+            </a:pPr>
+            <a:r>
+              <a:rPr sz="950" b="0">
                 <a:solidFill>
                   <a:srgbClr val="2C3E50"/>
                 </a:solidFill>
                 <a:latin typeface="WenQuanYi Micro Hei"/>
                 <a:ea typeface="WenQuanYi Micro Hei"/>
               </a:rPr>
-              <a:t>Data Suite管目录、语义、质量、血缘和产品；AN Fabric管智能消费与编排。数据默认留域，公共层只做适配、抽象和联邦访问。</a:t>
+              <a:t>Data Suite管目录、语义、质量、血缘和产品；AN Fabric管智能消费与编排。</a:t>
+            </a:r>
+          </a:p>
+          <a:p>
+            <a:pPr algn="l">
+              <a:lnSpc>
+                <a:spcPct val="104000"/>
+              </a:lnSpc>
+              <a:spcAft>
+                <a:spcPts val="100"/>
+              </a:spcAft>
+            </a:pPr>
+            <a:r>
+              <a:rPr sz="950" b="0">
+                <a:solidFill>
+                  <a:srgbClr val="2C3E50"/>
+                </a:solidFill>
+                <a:latin typeface="WenQuanYi Micro Hei"/>
+                <a:ea typeface="WenQuanYi Micro Hei"/>
+              </a:rPr>
+              <a:t>数据默认留域，公共层只做适配、抽象和联邦访问。支持多厂商只有经过第三方互操作和双向迁移，才构成中立性证据。</a:t>
             </a:r>
           </a:p>
         </p:txBody>
@@ -12065,8 +12511,8 @@
         </p:nvSpPr>
         <p:spPr>
           <a:xfrm>
-            <a:off x="7534656" y="2706624"/>
-            <a:ext cx="4306824" cy="1444752"/>
+            <a:off x="7534656" y="2688336"/>
+            <a:ext cx="4306824" cy="1408176"/>
           </a:xfrm>
           <a:prstGeom prst="roundRect">
             <a:avLst/>
@@ -12110,8 +12556,8 @@
         </p:nvSpPr>
         <p:spPr>
           <a:xfrm>
-            <a:off x="7534656" y="2706624"/>
-            <a:ext cx="64008" cy="1444752"/>
+            <a:off x="7534656" y="2688336"/>
+            <a:ext cx="64008" cy="1408176"/>
           </a:xfrm>
           <a:prstGeom prst="rect">
             <a:avLst/>
@@ -12153,8 +12599,8 @@
         </p:nvSpPr>
         <p:spPr>
           <a:xfrm>
-            <a:off x="7680960" y="2770632"/>
-            <a:ext cx="4069080" cy="237744"/>
+            <a:off x="7680960" y="2734056"/>
+            <a:ext cx="4069080" cy="219456"/>
           </a:xfrm>
           <a:prstGeom prst="rect">
             <a:avLst/>
@@ -12194,8 +12640,8 @@
         </p:nvSpPr>
         <p:spPr>
           <a:xfrm>
-            <a:off x="7680960" y="3017520"/>
-            <a:ext cx="4069080" cy="1060704"/>
+            <a:off x="7680960" y="2962656"/>
+            <a:ext cx="4069080" cy="1078992"/>
           </a:xfrm>
           <a:prstGeom prst="rect">
             <a:avLst/>
@@ -12208,21 +12654,41 @@
           <a:p>
             <a:pPr algn="l">
               <a:lnSpc>
-                <a:spcPct val="106000"/>
-              </a:lnSpc>
-              <a:spcAft>
-                <a:spcPts val="100"/>
-              </a:spcAft>
-            </a:pPr>
-            <a:r>
-              <a:rPr sz="1000" b="0">
+                <a:spcPct val="104000"/>
+              </a:lnSpc>
+              <a:spcAft>
+                <a:spcPts val="100"/>
+              </a:spcAft>
+            </a:pPr>
+            <a:r>
+              <a:rPr sz="950" b="0">
                 <a:solidFill>
                   <a:srgbClr val="2C3E50"/>
                 </a:solidFill>
                 <a:latin typeface="WenQuanYi Micro Hei"/>
                 <a:ea typeface="WenQuanYi Micro Hei"/>
               </a:rPr>
-              <a:t>域湖仓完成本地加工，经公共层进入Data Suite，再进入Sense。Think之后，Act通过AN Apps调用既有OSS/RIC/SON。</a:t>
+              <a:t>域湖仓完成本地加工，经公共层进入Data Suite，再进入Sense，建立观察与chain-of-custody。</a:t>
+            </a:r>
+          </a:p>
+          <a:p>
+            <a:pPr algn="l">
+              <a:lnSpc>
+                <a:spcPct val="104000"/>
+              </a:lnSpc>
+              <a:spcAft>
+                <a:spcPts val="100"/>
+              </a:spcAft>
+            </a:pPr>
+            <a:r>
+              <a:rPr sz="950" b="0">
+                <a:solidFill>
+                  <a:srgbClr val="2C3E50"/>
+                </a:solidFill>
+                <a:latin typeface="WenQuanYi Micro Hei"/>
+                <a:ea typeface="WenQuanYi Micro Hei"/>
+              </a:rPr>
+              <a:t>Think使用电信模型和Glass-Box推理；Act通过AN Apps调用既有OSS/RIC/SON，再向计量和Marketplace延伸。</a:t>
             </a:r>
           </a:p>
         </p:txBody>
@@ -12235,7 +12701,7 @@
         </p:nvSpPr>
         <p:spPr>
           <a:xfrm>
-            <a:off x="7534656" y="4261104"/>
+            <a:off x="7534656" y="4187952"/>
             <a:ext cx="4306824" cy="1463040"/>
           </a:xfrm>
           <a:prstGeom prst="roundRect">
@@ -12280,7 +12746,7 @@
         </p:nvSpPr>
         <p:spPr>
           <a:xfrm>
-            <a:off x="7534656" y="4261104"/>
+            <a:off x="7534656" y="4187952"/>
             <a:ext cx="64008" cy="1463040"/>
           </a:xfrm>
           <a:prstGeom prst="rect">
@@ -12323,8 +12789,8 @@
         </p:nvSpPr>
         <p:spPr>
           <a:xfrm>
-            <a:off x="7680960" y="4325112"/>
-            <a:ext cx="4069080" cy="237744"/>
+            <a:off x="7680960" y="4233672"/>
+            <a:ext cx="4069080" cy="219456"/>
           </a:xfrm>
           <a:prstGeom prst="rect">
             <a:avLst/>
@@ -12364,8 +12830,8 @@
         </p:nvSpPr>
         <p:spPr>
           <a:xfrm>
-            <a:off x="7680960" y="4572000"/>
-            <a:ext cx="4069080" cy="1078992"/>
+            <a:off x="7680960" y="4462272"/>
+            <a:ext cx="4069080" cy="1133856"/>
           </a:xfrm>
           <a:prstGeom prst="rect">
             <a:avLst/>
@@ -12378,21 +12844,41 @@
           <a:p>
             <a:pPr algn="l">
               <a:lnSpc>
-                <a:spcPct val="106000"/>
-              </a:lnSpc>
-              <a:spcAft>
-                <a:spcPts val="100"/>
-              </a:spcAft>
-            </a:pPr>
-            <a:r>
-              <a:rPr sz="1000" b="0">
+                <a:spcPct val="104000"/>
+              </a:lnSpc>
+              <a:spcAft>
+                <a:spcPts val="100"/>
+              </a:spcAft>
+            </a:pPr>
+            <a:r>
+              <a:rPr sz="950" b="0">
                 <a:solidFill>
                   <a:srgbClr val="2C3E50"/>
                 </a:solidFill>
                 <a:latin typeface="WenQuanYi Micro Hei"/>
                 <a:ea typeface="WenQuanYi Micro Hei"/>
               </a:rPr>
-              <a:t>优势是SKU可组合、进入现网快。代价是各层可能只在品牌层组合，并形成语义、应用与云后端的软锁定。</a:t>
+              <a:t>优势是SKU可组合、进入现网快，不必等待6G新网元标准。</a:t>
+            </a:r>
+          </a:p>
+          <a:p>
+            <a:pPr algn="l">
+              <a:lnSpc>
+                <a:spcPct val="104000"/>
+              </a:lnSpc>
+              <a:spcAft>
+                <a:spcPts val="100"/>
+              </a:spcAft>
+            </a:pPr>
+            <a:r>
+              <a:rPr sz="950" b="0">
+                <a:solidFill>
+                  <a:srgbClr val="2C3E50"/>
+                </a:solidFill>
+                <a:latin typeface="WenQuanYi Micro Hei"/>
+                <a:ea typeface="WenQuanYi Micro Hei"/>
+              </a:rPr>
+              <a:t>代价是各层可能只在品牌层组合，并形成语义、应用与云后端的软锁定。客户若只买域App，分层复利就落空。</a:t>
             </a:r>
           </a:p>
         </p:txBody>
@@ -12405,8 +12891,8 @@
         </p:nvSpPr>
         <p:spPr>
           <a:xfrm>
-            <a:off x="347472" y="5833872"/>
-            <a:ext cx="11475720" cy="694944"/>
+            <a:off x="347472" y="5742432"/>
+            <a:ext cx="11475720" cy="786384"/>
           </a:xfrm>
           <a:prstGeom prst="roundRect">
             <a:avLst/>
@@ -12450,8 +12936,8 @@
         </p:nvSpPr>
         <p:spPr>
           <a:xfrm>
-            <a:off x="457200" y="5879592"/>
-            <a:ext cx="3678936" cy="182880"/>
+            <a:off x="457200" y="5779008"/>
+            <a:ext cx="3691128" cy="164592"/>
           </a:xfrm>
           <a:prstGeom prst="rect">
             <a:avLst/>
@@ -12491,8 +12977,8 @@
         </p:nvSpPr>
         <p:spPr>
           <a:xfrm>
-            <a:off x="457200" y="6053328"/>
-            <a:ext cx="3678936" cy="420624"/>
+            <a:off x="457200" y="5943600"/>
+            <a:ext cx="3691128" cy="530352"/>
           </a:xfrm>
           <a:prstGeom prst="rect">
             <a:avLst/>
@@ -12519,7 +13005,7 @@
                 <a:latin typeface="WenQuanYi Micro Hei"/>
                 <a:ea typeface="WenQuanYi Micro Hei"/>
               </a:rPr>
-              <a:t>KDDI覆盖20万4G/5G RAN；stc披露超过1万次自动动作；Indosat证明节能应用可扩展。</a:t>
+              <a:t>KDDI覆盖20万4G/5G RAN；stc披露超过1万次自动动作和性能改善；Indosat证明节能应用可扩展。它们证明域级闭环，不证明统一跨域Fabric。</a:t>
             </a:r>
           </a:p>
         </p:txBody>
@@ -12532,8 +13018,8 @@
         </p:nvSpPr>
         <p:spPr>
           <a:xfrm>
-            <a:off x="4245864" y="5879592"/>
-            <a:ext cx="3678936" cy="182880"/>
+            <a:off x="4239768" y="5779008"/>
+            <a:ext cx="3691128" cy="164592"/>
           </a:xfrm>
           <a:prstGeom prst="rect">
             <a:avLst/>
@@ -12573,8 +13059,8 @@
         </p:nvSpPr>
         <p:spPr>
           <a:xfrm>
-            <a:off x="4245864" y="6053328"/>
-            <a:ext cx="3678936" cy="420624"/>
+            <a:off x="4239768" y="5943600"/>
+            <a:ext cx="3691128" cy="530352"/>
           </a:xfrm>
           <a:prstGeom prst="rect">
             <a:avLst/>
@@ -12601,7 +13087,7 @@
                 <a:latin typeface="WenQuanYi Micro Hei"/>
                 <a:ea typeface="WenQuanYi Micro Hei"/>
               </a:rPr>
-              <a:t>匿名Tier-1：25万小区、27万报告/秒，仅支持摄取与关联潜力。</a:t>
+              <a:t>匿名Tier-1：25万小区、27万报告/秒，仅支持摄取与关联潜力。因客户未具名，不能外推广泛跨域商用。</a:t>
             </a:r>
           </a:p>
         </p:txBody>
@@ -12614,8 +13100,8 @@
         </p:nvSpPr>
         <p:spPr>
           <a:xfrm>
-            <a:off x="8034528" y="5879592"/>
-            <a:ext cx="3678936" cy="182880"/>
+            <a:off x="8022336" y="5779008"/>
+            <a:ext cx="3691128" cy="164592"/>
           </a:xfrm>
           <a:prstGeom prst="rect">
             <a:avLst/>
@@ -12655,8 +13141,8 @@
         </p:nvSpPr>
         <p:spPr>
           <a:xfrm>
-            <a:off x="8034528" y="6053328"/>
-            <a:ext cx="3678936" cy="420624"/>
+            <a:off x="8022336" y="5943600"/>
+            <a:ext cx="3691128" cy="530352"/>
           </a:xfrm>
           <a:prstGeom prst="rect">
             <a:avLst/>
@@ -12683,7 +13169,7 @@
                 <a:latin typeface="WenQuanYi Micro Hei"/>
                 <a:ea typeface="WenQuanYi Micro Hei"/>
               </a:rPr>
-              <a:t>同一契约是否共享、第三方后端/Agent能否双向替换、动作与回滚证据能否贯通。</a:t>
+              <a:t>Data Suite与AN Fabric是否共享同一契约，第三方后端/Agent能否双向替换，动作与回滚证据能否贯通域控制器。</a:t>
             </a:r>
           </a:p>
         </p:txBody>
@@ -13008,7 +13494,7 @@
         <p:spPr>
           <a:xfrm>
             <a:off x="347472" y="640080"/>
-            <a:ext cx="11475720" cy="420624"/>
+            <a:ext cx="11475720" cy="493776"/>
           </a:xfrm>
           <a:prstGeom prst="roundRect">
             <a:avLst/>
@@ -13042,10 +13528,10 @@
           <a:p>
             <a:pPr algn="l">
               <a:lnSpc>
-                <a:spcPct val="105000"/>
+                <a:spcPct val="104000"/>
               </a:lnSpc>
               <a:spcBef>
-                <a:spcPts val="300"/>
+                <a:spcPts val="200"/>
               </a:spcBef>
               <a:spcAft>
                 <a:spcPts val="100"/>
@@ -13059,7 +13545,7 @@
                 <a:latin typeface="WenQuanYi Micro Hei"/>
                 <a:ea typeface="WenQuanYi Micro Hei"/>
               </a:rPr>
-              <a:t>Ericsson争联邦治理，Huawei争近源运行时，Nokia争语义产品与应用入口。平台地位取决于外部契约，而不是把数据集中到一个名字。</a:t>
+              <a:t>Ericsson争联邦治理，Huawei争近源运行时，Nokia争语义产品与应用入口。谁能定义这些能力的外部接口，同时允许执行层和后端替换，谁才更接近长期平台位置；谁只提供封闭组件或单点应用，谁就仍停留在项目层。</a:t>
             </a:r>
           </a:p>
         </p:txBody>
@@ -13073,8 +13559,8 @@
           <p:nvPr/>
         </p:nvGraphicFramePr>
         <p:xfrm>
-          <a:off x="347472" y="1133856"/>
-          <a:ext cx="11475720" cy="2359152"/>
+          <a:off x="347472" y="1170432"/>
+          <a:ext cx="11475720" cy="2450592"/>
         </p:xfrm>
         <a:graphic>
           <a:graphicData uri="http://schemas.openxmlformats.org/drawingml/2006/table">
@@ -13083,12 +13569,12 @@
                 <a:tableStyleId>{5C22544A-7EE6-4342-B048-85BDC9FD1C3A}</a:tableStyleId>
               </a:tblPr>
               <a:tblGrid>
-                <a:gridCol w="1554480"/>
-                <a:gridCol w="3310128"/>
-                <a:gridCol w="3310128"/>
-                <a:gridCol w="3300984"/>
+                <a:gridCol w="1417320"/>
+                <a:gridCol w="3355848"/>
+                <a:gridCol w="3355848"/>
+                <a:gridCol w="3346704"/>
               </a:tblGrid>
-              <a:tr h="337021">
+              <a:tr h="350084">
                 <a:tc>
                   <a:txBody>
                     <a:bodyPr wrap="square" lIns="45720" rIns="36576" tIns="27432" bIns="27432"/>
@@ -13096,7 +13582,7 @@
                     <a:p>
                       <a:pPr algn="l"/>
                       <a:r>
-                        <a:rPr sz="900" b="1">
+                        <a:rPr sz="850" b="1">
                           <a:solidFill>
                             <a:srgbClr val="FFFFFF"/>
                           </a:solidFill>
@@ -13120,7 +13606,7 @@
                     <a:p>
                       <a:pPr algn="l"/>
                       <a:r>
-                        <a:rPr sz="900" b="1">
+                        <a:rPr sz="850" b="1">
                           <a:solidFill>
                             <a:srgbClr val="FFFFFF"/>
                           </a:solidFill>
@@ -13144,7 +13630,7 @@
                     <a:p>
                       <a:pPr algn="l"/>
                       <a:r>
-                        <a:rPr sz="900" b="1">
+                        <a:rPr sz="850" b="1">
                           <a:solidFill>
                             <a:srgbClr val="FFFFFF"/>
                           </a:solidFill>
@@ -13168,7 +13654,7 @@
                     <a:p>
                       <a:pPr algn="l"/>
                       <a:r>
-                        <a:rPr sz="900" b="1">
+                        <a:rPr sz="850" b="1">
                           <a:solidFill>
                             <a:srgbClr val="FFFFFF"/>
                           </a:solidFill>
@@ -13186,7 +13672,7 @@
                   </a:tcPr>
                 </a:tc>
               </a:tr>
-              <a:tr h="337021">
+              <a:tr h="350084">
                 <a:tc>
                   <a:txBody>
                     <a:bodyPr wrap="square" lIns="45720" rIns="36576" tIns="27432" bIns="27432"/>
@@ -13194,7 +13680,7 @@
                     <a:p>
                       <a:pPr algn="l"/>
                       <a:r>
-                        <a:rPr sz="900" b="1">
+                        <a:rPr sz="850" b="1">
                           <a:solidFill>
                             <a:srgbClr val="1A1A1A"/>
                           </a:solidFill>
@@ -13218,14 +13704,14 @@
                     <a:p>
                       <a:pPr algn="l"/>
                       <a:r>
-                        <a:rPr sz="900" b="0">
+                        <a:rPr sz="850" b="0">
                           <a:solidFill>
                             <a:srgbClr val="1A1A1A"/>
                           </a:solidFill>
                           <a:latin typeface="WenQuanYi Micro Hei"/>
                           <a:ea typeface="WenQuanYi Micro Hei"/>
                         </a:rPr>
-                        <a:t>连接既有数据岛</a:t>
+                        <a:t>分散数据岛和既有产品如何少迁移、可复用</a:t>
                       </a:r>
                     </a:p>
                   </a:txBody>
@@ -13242,14 +13728,14 @@
                     <a:p>
                       <a:pPr algn="l"/>
                       <a:r>
-                        <a:rPr sz="900" b="0">
+                        <a:rPr sz="850" b="0">
                           <a:solidFill>
                             <a:srgbClr val="1A1A1A"/>
                           </a:solidFill>
                           <a:latin typeface="WenQuanYi Micro Hei"/>
                           <a:ea typeface="WenQuanYi Micro Hei"/>
                         </a:rPr>
-                        <a:t>重构数据处理拓扑</a:t>
+                        <a:t>AI/ISAC多源多处理多汇如何低时延流动</a:t>
                       </a:r>
                     </a:p>
                   </a:txBody>
@@ -13266,14 +13752,14 @@
                     <a:p>
                       <a:pPr algn="l"/>
                       <a:r>
-                        <a:rPr sz="900" b="0">
+                        <a:rPr sz="850" b="0">
                           <a:solidFill>
                             <a:srgbClr val="1A1A1A"/>
                           </a:solidFill>
                           <a:latin typeface="WenQuanYi Micro Hei"/>
                           <a:ea typeface="WenQuanYi Micro Hei"/>
                         </a:rPr>
-                        <a:t>组合数据与自治软件</a:t>
+                        <a:t>数据管理、自治应用和商业外延如何形成可售组合</a:t>
                       </a:r>
                     </a:p>
                   </a:txBody>
@@ -13284,7 +13770,7 @@
                   </a:tcPr>
                 </a:tc>
               </a:tr>
-              <a:tr h="337021">
+              <a:tr h="350084">
                 <a:tc>
                   <a:txBody>
                     <a:bodyPr wrap="square" lIns="45720" rIns="36576" tIns="27432" bIns="27432"/>
@@ -13292,7 +13778,7 @@
                     <a:p>
                       <a:pPr algn="l"/>
                       <a:r>
-                        <a:rPr sz="900" b="1">
+                        <a:rPr sz="850" b="1">
                           <a:solidFill>
                             <a:srgbClr val="1A1A1A"/>
                           </a:solidFill>
@@ -13316,14 +13802,14 @@
                     <a:p>
                       <a:pPr algn="l"/>
                       <a:r>
-                        <a:rPr sz="900" b="0">
+                        <a:rPr sz="850" b="0">
                           <a:solidFill>
                             <a:srgbClr val="1A1A1A"/>
                           </a:solidFill>
                           <a:latin typeface="WenQuanYi Micro Hei"/>
                           <a:ea typeface="WenQuanYi Micro Hei"/>
                         </a:rPr>
-                        <a:t>联邦目录、治理与策略</a:t>
+                        <a:t>目录、治理和策略逻辑联邦；产品控制仍分散</a:t>
                       </a:r>
                     </a:p>
                   </a:txBody>
@@ -13340,14 +13826,14 @@
                     <a:p>
                       <a:pPr algn="l"/>
                       <a:r>
-                        <a:rPr sz="900" b="0">
+                        <a:rPr sz="850" b="0">
                           <a:solidFill>
                             <a:srgbClr val="1A1A1A"/>
                           </a:solidFill>
                           <a:latin typeface="WenQuanYi Micro Hei"/>
                           <a:ea typeface="WenQuanYi Micro Hei"/>
                         </a:rPr>
-                        <a:t>DO与网络原生拓扑</a:t>
+                        <a:t>DO编排执行能力与数据拓扑</a:t>
                       </a:r>
                     </a:p>
                   </a:txBody>
@@ -13364,14 +13850,14 @@
                     <a:p>
                       <a:pPr algn="l"/>
                       <a:r>
-                        <a:rPr sz="900" b="0">
+                        <a:rPr sz="850" b="0">
                           <a:solidFill>
                             <a:srgbClr val="1A1A1A"/>
                           </a:solidFill>
                           <a:latin typeface="WenQuanYi Micro Hei"/>
                           <a:ea typeface="WenQuanYi Micro Hei"/>
                         </a:rPr>
-                        <a:t>Data Suite + AN Fabric分层</a:t>
+                        <a:t>Data Suite管数据产品，AN Fabric管智能消费</a:t>
                       </a:r>
                     </a:p>
                   </a:txBody>
@@ -13382,7 +13868,7 @@
                   </a:tcPr>
                 </a:tc>
               </a:tr>
-              <a:tr h="337021">
+              <a:tr h="350084">
                 <a:tc>
                   <a:txBody>
                     <a:bodyPr wrap="square" lIns="45720" rIns="36576" tIns="27432" bIns="27432"/>
@@ -13390,7 +13876,7 @@
                     <a:p>
                       <a:pPr algn="l"/>
                       <a:r>
-                        <a:rPr sz="900" b="1">
+                        <a:rPr sz="850" b="1">
                           <a:solidFill>
                             <a:srgbClr val="1A1A1A"/>
                           </a:solidFill>
@@ -13414,14 +13900,14 @@
                     <a:p>
                       <a:pPr algn="l"/>
                       <a:r>
-                        <a:rPr sz="900" b="0">
+                        <a:rPr sz="850" b="0">
                           <a:solidFill>
                             <a:srgbClr val="1A1A1A"/>
                           </a:solidFill>
                           <a:latin typeface="WenQuanYi Micro Hei"/>
                           <a:ea typeface="WenQuanYi Micro Hei"/>
                         </a:rPr>
-                        <a:t>域内产品与数据湖</a:t>
+                        <a:t>域内产品、EDCA/DMF与数据湖按需访问</a:t>
                       </a:r>
                     </a:p>
                   </a:txBody>
@@ -13438,14 +13924,14 @@
                     <a:p>
                       <a:pPr algn="l"/>
                       <a:r>
-                        <a:rPr sz="900" b="0">
+                        <a:rPr sz="850" b="0">
                           <a:solidFill>
                             <a:srgbClr val="1A1A1A"/>
                           </a:solidFill>
                           <a:latin typeface="WenQuanYi Micro Hei"/>
                           <a:ea typeface="WenQuanYi Micro Hei"/>
                         </a:rPr>
-                        <a:t>UE / RAN / 边缘 / Core近源</a:t>
+                        <a:t>DA/DPF/DSF在UE/RAN/边缘/Core近源执行</a:t>
                       </a:r>
                     </a:p>
                   </a:txBody>
@@ -13462,14 +13948,14 @@
                     <a:p>
                       <a:pPr algn="l"/>
                       <a:r>
-                        <a:rPr sz="900" b="0">
+                        <a:rPr sz="850" b="0">
                           <a:solidFill>
                             <a:srgbClr val="1A1A1A"/>
                           </a:solidFill>
                           <a:latin typeface="WenQuanYi Micro Hei"/>
                           <a:ea typeface="WenQuanYi Micro Hei"/>
                         </a:rPr>
-                        <a:t>域湖仓与OSS / RIC / SON</a:t>
+                        <a:t>数据留域；动作经AN Apps回OSS/RIC/SON</a:t>
                       </a:r>
                     </a:p>
                   </a:txBody>
@@ -13480,7 +13966,7 @@
                   </a:tcPr>
                 </a:tc>
               </a:tr>
-              <a:tr h="337021">
+              <a:tr h="350084">
                 <a:tc>
                   <a:txBody>
                     <a:bodyPr wrap="square" lIns="45720" rIns="36576" tIns="27432" bIns="27432"/>
@@ -13488,7 +13974,7 @@
                     <a:p>
                       <a:pPr algn="l"/>
                       <a:r>
-                        <a:rPr sz="900" b="1">
+                        <a:rPr sz="850" b="1">
                           <a:solidFill>
                             <a:srgbClr val="1A1A1A"/>
                           </a:solidFill>
@@ -13512,14 +13998,14 @@
                     <a:p>
                       <a:pPr algn="l"/>
                       <a:r>
-                        <a:rPr sz="900" b="0">
+                        <a:rPr sz="850" b="0">
                           <a:solidFill>
                             <a:srgbClr val="1A1A1A"/>
                           </a:solidFill>
                           <a:latin typeface="WenQuanYi Micro Hei"/>
                           <a:ea typeface="WenQuanYi Micro Hei"/>
                         </a:rPr>
-                        <a:t>迁移连续性</a:t>
+                        <a:t>保护存量、降低迁移风险、允许多后端</a:t>
                       </a:r>
                     </a:p>
                   </a:txBody>
@@ -13536,14 +14022,14 @@
                     <a:p>
                       <a:pPr algn="l"/>
                       <a:r>
-                        <a:rPr sz="900" b="0">
+                        <a:rPr sz="850" b="0">
                           <a:solidFill>
                             <a:srgbClr val="1A1A1A"/>
                           </a:solidFill>
                           <a:latin typeface="WenQuanYi Micro Hei"/>
                           <a:ea typeface="WenQuanYi Micro Hei"/>
                         </a:rPr>
-                        <a:t>近源执行控制</a:t>
+                        <a:t>降低全量搬运，获得可编排近源处理</a:t>
                       </a:r>
                     </a:p>
                   </a:txBody>
@@ -13560,14 +14046,14 @@
                     <a:p>
                       <a:pPr algn="l"/>
                       <a:r>
-                        <a:rPr sz="900" b="0">
+                        <a:rPr sz="850" b="0">
                           <a:solidFill>
                             <a:srgbClr val="1A1A1A"/>
                           </a:solidFill>
                           <a:latin typeface="WenQuanYi Micro Hei"/>
                           <a:ea typeface="WenQuanYi Micro Hei"/>
                         </a:rPr>
-                        <a:t>产品化速度</a:t>
+                        <a:t>能力可分别产品化并快速进入现网</a:t>
                       </a:r>
                     </a:p>
                   </a:txBody>
@@ -13578,7 +14064,7 @@
                   </a:tcPr>
                 </a:tc>
               </a:tr>
-              <a:tr h="337021">
+              <a:tr h="350084">
                 <a:tc>
                   <a:txBody>
                     <a:bodyPr wrap="square" lIns="45720" rIns="36576" tIns="27432" bIns="27432"/>
@@ -13586,7 +14072,7 @@
                     <a:p>
                       <a:pPr algn="l"/>
                       <a:r>
-                        <a:rPr sz="900" b="1">
+                        <a:rPr sz="850" b="1">
                           <a:solidFill>
                             <a:srgbClr val="1A1A1A"/>
                           </a:solidFill>
@@ -13610,14 +14096,14 @@
                     <a:p>
                       <a:pPr algn="l"/>
                       <a:r>
-                        <a:rPr sz="900" b="0">
+                        <a:rPr sz="850" b="0">
                           <a:solidFill>
                             <a:srgbClr val="1A1A1A"/>
                           </a:solidFill>
                           <a:latin typeface="WenQuanYi Micro Hei"/>
                           <a:ea typeface="WenQuanYi Micro Hei"/>
                         </a:rPr>
-                        <a:t>跨产品协调复杂度</a:t>
+                        <a:t>跨产品语义、QoD、策略和版本协调持续存在</a:t>
                       </a:r>
                     </a:p>
                   </a:txBody>
@@ -13634,14 +14120,14 @@
                     <a:p>
                       <a:pPr algn="l"/>
                       <a:r>
-                        <a:rPr sz="900" b="0">
+                        <a:rPr sz="850" b="0">
                           <a:solidFill>
                             <a:srgbClr val="1A1A1A"/>
                           </a:solidFill>
                           <a:latin typeface="WenQuanYi Micro Hei"/>
                           <a:ea typeface="WenQuanYi Micro Hei"/>
                         </a:rPr>
-                        <a:t>新平面可靠性与状态复杂度</a:t>
+                        <a:t>新增顺序、持久化、容灾、移动性与可移植性</a:t>
                       </a:r>
                     </a:p>
                   </a:txBody>
@@ -13658,14 +14144,14 @@
                     <a:p>
                       <a:pPr algn="l"/>
                       <a:r>
-                        <a:rPr sz="900" b="0">
+                        <a:rPr sz="850" b="0">
                           <a:solidFill>
                             <a:srgbClr val="1A1A1A"/>
                           </a:solidFill>
                           <a:latin typeface="WenQuanYi Micro Hei"/>
                           <a:ea typeface="WenQuanYi Micro Hei"/>
                         </a:rPr>
-                        <a:t>多层SKU与软锁定</a:t>
+                        <a:t>多层SKU可能只在品牌层组合并形成软锁定</a:t>
                       </a:r>
                     </a:p>
                   </a:txBody>
@@ -13676,7 +14162,7 @@
                   </a:tcPr>
                 </a:tc>
               </a:tr>
-              <a:tr h="337026">
+              <a:tr h="350088">
                 <a:tc>
                   <a:txBody>
                     <a:bodyPr wrap="square" lIns="45720" rIns="36576" tIns="27432" bIns="27432"/>
@@ -13684,7 +14170,7 @@
                     <a:p>
                       <a:pPr algn="l"/>
                       <a:r>
-                        <a:rPr sz="900" b="1">
+                        <a:rPr sz="850" b="1">
                           <a:solidFill>
                             <a:srgbClr val="1A1A1A"/>
                           </a:solidFill>
@@ -13708,14 +14194,14 @@
                     <a:p>
                       <a:pPr algn="l"/>
                       <a:r>
-                        <a:rPr sz="900" b="0">
+                        <a:rPr sz="850" b="0">
                           <a:solidFill>
                             <a:srgbClr val="1A1A1A"/>
                           </a:solidFill>
                           <a:latin typeface="WenQuanYi Micro Hei"/>
                           <a:ea typeface="WenQuanYi Micro Hei"/>
                         </a:rPr>
-                        <a:t>跨产品、跨后端复用</a:t>
+                        <a:t>同一数据产品跨DataOps、EIAP、NWDAF和第三方复用</a:t>
                       </a:r>
                     </a:p>
                   </a:txBody>
@@ -13732,14 +14218,14 @@
                     <a:p>
                       <a:pPr algn="l"/>
                       <a:r>
-                        <a:rPr sz="900" b="0">
+                        <a:rPr sz="850" b="0">
                           <a:solidFill>
                             <a:srgbClr val="1A1A1A"/>
                           </a:solidFill>
                           <a:latin typeface="WenQuanYi Micro Hei"/>
                           <a:ea typeface="WenQuanYi Micro Hei"/>
                         </a:rPr>
-                        <a:t>同功能可靠性与多厂商测试</a:t>
+                        <a:t>同功能对比下通过持久化、故障、移动性和租户SLA</a:t>
                       </a:r>
                     </a:p>
                   </a:txBody>
@@ -13756,14 +14242,14 @@
                     <a:p>
                       <a:pPr algn="l"/>
                       <a:r>
-                        <a:rPr sz="900" b="0">
+                        <a:rPr sz="850" b="0">
                           <a:solidFill>
                             <a:srgbClr val="1A1A1A"/>
                           </a:solidFill>
                           <a:latin typeface="WenQuanYi Micro Hei"/>
                           <a:ea typeface="WenQuanYi Micro Hei"/>
                         </a:rPr>
-                        <a:t>统一契约、动作贯通、后端可替换</a:t>
+                        <a:t>三层共享契约，并支持第三方双向替换</a:t>
                       </a:r>
                     </a:p>
                   </a:txBody>
@@ -13786,8 +14272,8 @@
         </p:nvSpPr>
         <p:spPr>
           <a:xfrm>
-            <a:off x="347472" y="3602736"/>
-            <a:ext cx="2816352" cy="1298448"/>
+            <a:off x="347472" y="3712463"/>
+            <a:ext cx="2816352" cy="1243584"/>
           </a:xfrm>
           <a:prstGeom prst="roundRect">
             <a:avLst/>
@@ -13831,8 +14317,8 @@
         </p:nvSpPr>
         <p:spPr>
           <a:xfrm>
-            <a:off x="347472" y="3602736"/>
-            <a:ext cx="64008" cy="1298448"/>
+            <a:off x="347472" y="3712463"/>
+            <a:ext cx="64008" cy="1243584"/>
           </a:xfrm>
           <a:prstGeom prst="rect">
             <a:avLst/>
@@ -13874,8 +14360,8 @@
         </p:nvSpPr>
         <p:spPr>
           <a:xfrm>
-            <a:off x="493776" y="3666744"/>
-            <a:ext cx="2578608" cy="237744"/>
+            <a:off x="493776" y="3758183"/>
+            <a:ext cx="2578608" cy="219456"/>
           </a:xfrm>
           <a:prstGeom prst="rect">
             <a:avLst/>
@@ -13915,7 +14401,7 @@
         </p:nvSpPr>
         <p:spPr>
           <a:xfrm>
-            <a:off x="493776" y="3913632"/>
+            <a:off x="493776" y="3986783"/>
             <a:ext cx="2578608" cy="914400"/>
           </a:xfrm>
           <a:prstGeom prst="rect">
@@ -13929,21 +14415,21 @@
           <a:p>
             <a:pPr algn="l">
               <a:lnSpc>
-                <a:spcPct val="106000"/>
-              </a:lnSpc>
-              <a:spcAft>
-                <a:spcPts val="100"/>
-              </a:spcAft>
-            </a:pPr>
-            <a:r>
-              <a:rPr sz="950" b="0">
+                <a:spcPct val="104000"/>
+              </a:lnSpc>
+              <a:spcAft>
+                <a:spcPts val="100"/>
+              </a:spcAft>
+            </a:pPr>
+            <a:r>
+              <a:rPr sz="900" b="0">
                 <a:solidFill>
                   <a:srgbClr val="2C3E50"/>
                 </a:solidFill>
                 <a:latin typeface="WenQuanYi Micro Hei"/>
                 <a:ea typeface="WenQuanYi Micro Hei"/>
               </a:rPr>
-              <a:t>稳定ID、权威源、配置版本和对象映射，使同一小区、会话、模型能跨接口关联。</a:t>
+              <a:t>定义稳定ID、权威源、配置版本和对象映射，使同一小区、会话、模型与业务对象能跨接口关联。谁掌握这组映射，谁就能让模型和产品复用。</a:t>
             </a:r>
           </a:p>
         </p:txBody>
@@ -13956,8 +14442,8 @@
         </p:nvSpPr>
         <p:spPr>
           <a:xfrm>
-            <a:off x="3273552" y="3602736"/>
-            <a:ext cx="2816352" cy="1298448"/>
+            <a:off x="3273552" y="3712463"/>
+            <a:ext cx="2816352" cy="1243584"/>
           </a:xfrm>
           <a:prstGeom prst="roundRect">
             <a:avLst/>
@@ -14001,8 +14487,8 @@
         </p:nvSpPr>
         <p:spPr>
           <a:xfrm>
-            <a:off x="3273552" y="3602736"/>
-            <a:ext cx="64008" cy="1298448"/>
+            <a:off x="3273552" y="3712463"/>
+            <a:ext cx="64008" cy="1243584"/>
           </a:xfrm>
           <a:prstGeom prst="rect">
             <a:avLst/>
@@ -14044,8 +14530,8 @@
         </p:nvSpPr>
         <p:spPr>
           <a:xfrm>
-            <a:off x="3419856" y="3666744"/>
-            <a:ext cx="2578608" cy="237744"/>
+            <a:off x="3419856" y="3758183"/>
+            <a:ext cx="2578608" cy="219456"/>
           </a:xfrm>
           <a:prstGeom prst="rect">
             <a:avLst/>
@@ -14085,7 +14571,7 @@
         </p:nvSpPr>
         <p:spPr>
           <a:xfrm>
-            <a:off x="3419856" y="3913632"/>
+            <a:off x="3419856" y="3986783"/>
             <a:ext cx="2578608" cy="914400"/>
           </a:xfrm>
           <a:prstGeom prst="rect">
@@ -14099,21 +14585,21 @@
           <a:p>
             <a:pPr algn="l">
               <a:lnSpc>
-                <a:spcPct val="106000"/>
-              </a:lnSpc>
-              <a:spcAft>
-                <a:spcPts val="100"/>
-              </a:spcAft>
-            </a:pPr>
-            <a:r>
-              <a:rPr sz="950" b="0">
+                <a:spcPct val="104000"/>
+              </a:lnSpc>
+              <a:spcAft>
+                <a:spcPts val="100"/>
+              </a:spcAft>
+            </a:pPr>
+            <a:r>
+              <a:rPr sz="900" b="0">
                 <a:solidFill>
                   <a:srgbClr val="2C3E50"/>
                 </a:solidFill>
                 <a:latin typeface="WenQuanYi Micro Hei"/>
                 <a:ea typeface="WenQuanYi Micro Hei"/>
               </a:rPr>
-              <a:t>用途适用性、Owner、SLO、计量、降级与退出，决定数据对特定任务是否可交付。</a:t>
+              <a:t>定义数据对特定任务是否适用、谁负责、满足何种SLO、如何计量、何时降级或退出。没有契约，跨域交付只能停留在项目集成。</a:t>
             </a:r>
           </a:p>
         </p:txBody>
@@ -14126,8 +14612,8 @@
         </p:nvSpPr>
         <p:spPr>
           <a:xfrm>
-            <a:off x="6199632" y="3602736"/>
-            <a:ext cx="2816352" cy="1298448"/>
+            <a:off x="6199632" y="3712463"/>
+            <a:ext cx="2816352" cy="1243584"/>
           </a:xfrm>
           <a:prstGeom prst="roundRect">
             <a:avLst/>
@@ -14171,8 +14657,8 @@
         </p:nvSpPr>
         <p:spPr>
           <a:xfrm>
-            <a:off x="6199632" y="3602736"/>
-            <a:ext cx="64008" cy="1298448"/>
+            <a:off x="6199632" y="3712463"/>
+            <a:ext cx="64008" cy="1243584"/>
           </a:xfrm>
           <a:prstGeom prst="rect">
             <a:avLst/>
@@ -14214,8 +14700,8 @@
         </p:nvSpPr>
         <p:spPr>
           <a:xfrm>
-            <a:off x="6345936" y="3666744"/>
-            <a:ext cx="2578608" cy="237744"/>
+            <a:off x="6345936" y="3758183"/>
+            <a:ext cx="2578608" cy="219456"/>
           </a:xfrm>
           <a:prstGeom prst="rect">
             <a:avLst/>
@@ -14255,7 +14741,7 @@
         </p:nvSpPr>
         <p:spPr>
           <a:xfrm>
-            <a:off x="6345936" y="3913632"/>
+            <a:off x="6345936" y="3986783"/>
             <a:ext cx="2578608" cy="914400"/>
           </a:xfrm>
           <a:prstGeom prst="rect">
@@ -14269,21 +14755,21 @@
           <a:p>
             <a:pPr algn="l">
               <a:lnSpc>
-                <a:spcPct val="106000"/>
-              </a:lnSpc>
-              <a:spcAft>
-                <a:spcPts val="100"/>
-              </a:spcAft>
-            </a:pPr>
-            <a:r>
-              <a:rPr sz="950" b="0">
+                <a:spcPct val="104000"/>
+              </a:lnSpc>
+              <a:spcAft>
+                <a:spcPts val="100"/>
+              </a:spcAft>
+            </a:pPr>
+            <a:r>
+              <a:rPr sz="900" b="0">
                 <a:solidFill>
                   <a:srgbClr val="2C3E50"/>
                 </a:solidFill>
                 <a:latin typeface="WenQuanYi Micro Hei"/>
                 <a:ea typeface="WenQuanYi Micro Hei"/>
               </a:rPr>
-              <a:t>算子放置、策略下发、断链生存和版本回退，决定快环能否留在故障域内。</a:t>
+              <a:t>决定过滤、特征、推理与缓存放在哪里，策略如何下发，断链如何生存，版本如何回退。快环不能外包给远端目录或云平台。</a:t>
             </a:r>
           </a:p>
         </p:txBody>
@@ -14296,8 +14782,8 @@
         </p:nvSpPr>
         <p:spPr>
           <a:xfrm>
-            <a:off x="9125712" y="3602736"/>
-            <a:ext cx="2816352" cy="1298448"/>
+            <a:off x="9125712" y="3712463"/>
+            <a:ext cx="2816352" cy="1243584"/>
           </a:xfrm>
           <a:prstGeom prst="roundRect">
             <a:avLst/>
@@ -14341,8 +14827,8 @@
         </p:nvSpPr>
         <p:spPr>
           <a:xfrm>
-            <a:off x="9125712" y="3602736"/>
-            <a:ext cx="64008" cy="1298448"/>
+            <a:off x="9125712" y="3712463"/>
+            <a:ext cx="64008" cy="1243584"/>
           </a:xfrm>
           <a:prstGeom prst="rect">
             <a:avLst/>
@@ -14384,8 +14870,8 @@
         </p:nvSpPr>
         <p:spPr>
           <a:xfrm>
-            <a:off x="9272016" y="3666744"/>
-            <a:ext cx="2578608" cy="237744"/>
+            <a:off x="9272016" y="3758183"/>
+            <a:ext cx="2578608" cy="219456"/>
           </a:xfrm>
           <a:prstGeom prst="rect">
             <a:avLst/>
@@ -14425,7 +14911,7 @@
         </p:nvSpPr>
         <p:spPr>
           <a:xfrm>
-            <a:off x="9272016" y="3913632"/>
+            <a:off x="9272016" y="3986783"/>
             <a:ext cx="2578608" cy="914400"/>
           </a:xfrm>
           <a:prstGeom prst="rect">
@@ -14439,21 +14925,21 @@
           <a:p>
             <a:pPr algn="l">
               <a:lnSpc>
-                <a:spcPct val="106000"/>
-              </a:lnSpc>
-              <a:spcAft>
-                <a:spcPts val="100"/>
-              </a:spcAft>
-            </a:pPr>
-            <a:r>
-              <a:rPr sz="950" b="0">
+                <a:spcPct val="104000"/>
+              </a:lnSpc>
+              <a:spcAft>
+                <a:spcPts val="100"/>
+              </a:spcAft>
+            </a:pPr>
+            <a:r>
+              <a:rPr sz="900" b="0">
                 <a:solidFill>
                   <a:srgbClr val="2C3E50"/>
                 </a:solidFill>
                 <a:latin typeface="WenQuanYi Micro Hei"/>
                 <a:ea typeface="WenQuanYi Micro Hei"/>
               </a:rPr>
-              <a:t>数据—模型—策略—动作—结果—回滚的关联，并能被导出、审计与一致性测试。</a:t>
+              <a:t>把数据、模型、策略、动作、结果和回滚关联起来，并能被第三方审计、导出与一致性测试。没有证据链，自治权限扩不出去。</a:t>
             </a:r>
           </a:p>
         </p:txBody>
@@ -14466,8 +14952,8 @@
         </p:nvSpPr>
         <p:spPr>
           <a:xfrm>
-            <a:off x="347472" y="4992624"/>
-            <a:ext cx="11475720" cy="1517904"/>
+            <a:off x="347472" y="5029200"/>
+            <a:ext cx="11475720" cy="1481328"/>
           </a:xfrm>
           <a:prstGeom prst="roundRect">
             <a:avLst/>
@@ -14511,8 +14997,8 @@
         </p:nvSpPr>
         <p:spPr>
           <a:xfrm>
-            <a:off x="493776" y="5047488"/>
-            <a:ext cx="11183112" cy="201168"/>
+            <a:off x="493776" y="5065776"/>
+            <a:ext cx="11183112" cy="164592"/>
           </a:xfrm>
           <a:prstGeom prst="rect">
             <a:avLst/>
@@ -14539,7 +15025,7 @@
                 <a:latin typeface="WenQuanYi Micro Hei"/>
                 <a:ea typeface="WenQuanYi Micro Hei"/>
               </a:rPr>
-              <a:t>路线落点</a:t>
+              <a:t>路线落点与竞合边界</a:t>
             </a:r>
           </a:p>
         </p:txBody>
@@ -14553,7 +15039,7 @@
         <p:spPr>
           <a:xfrm>
             <a:off x="493776" y="5248656"/>
-            <a:ext cx="11183112" cy="384048"/>
+            <a:ext cx="11183112" cy="329184"/>
           </a:xfrm>
           <a:prstGeom prst="rect">
             <a:avLst/>
@@ -14566,21 +15052,21 @@
           <a:p>
             <a:pPr algn="l">
               <a:lnSpc>
-                <a:spcPct val="105000"/>
-              </a:lnSpc>
-              <a:spcAft>
-                <a:spcPts val="100"/>
-              </a:spcAft>
-            </a:pPr>
-            <a:r>
-              <a:rPr sz="1100" b="1">
+                <a:spcPct val="103000"/>
+              </a:lnSpc>
+              <a:spcAft>
+                <a:spcPts val="100"/>
+              </a:spcAft>
+            </a:pPr>
+            <a:r>
+              <a:rPr sz="1050" b="1">
                 <a:solidFill>
                   <a:srgbClr val="0B1F3A"/>
                 </a:solidFill>
                 <a:latin typeface="WenQuanYi Micro Hei"/>
                 <a:ea typeface="WenQuanYi Micro Hei"/>
               </a:rPr>
-              <a:t>Ericsson争夺联邦目录与渐进治理控制权。  Huawei争夺数据拓扑与近源运行时控制权。  Nokia争夺语义产品与自治应用入口控制权。</a:t>
+              <a:t>Ericsson争夺联邦目录与渐进治理控制权。Huawei争夺数据拓扑与近源运行时控制权。Nokia争夺语义产品与自治应用入口控制权。三者可替代也可互补，但都不是一条通向统一Fabric的成熟度阶梯。</a:t>
             </a:r>
           </a:p>
         </p:txBody>
@@ -14593,8 +15079,8 @@
         </p:nvSpPr>
         <p:spPr>
           <a:xfrm>
-            <a:off x="493776" y="5632704"/>
-            <a:ext cx="11183112" cy="384048"/>
+            <a:off x="493776" y="5596128"/>
+            <a:ext cx="11183112" cy="365760"/>
           </a:xfrm>
           <a:prstGeom prst="rect">
             <a:avLst/>
@@ -14607,21 +15093,21 @@
           <a:p>
             <a:pPr algn="l">
               <a:lnSpc>
-                <a:spcPct val="105000"/>
-              </a:lnSpc>
-              <a:spcAft>
-                <a:spcPts val="100"/>
-              </a:spcAft>
-            </a:pPr>
-            <a:r>
-              <a:rPr sz="1100" b="0">
+                <a:spcPct val="103000"/>
+              </a:lnSpc>
+              <a:spcAft>
+                <a:spcPts val="100"/>
+              </a:spcAft>
+            </a:pPr>
+            <a:r>
+              <a:rPr sz="1050" b="0">
                 <a:solidFill>
                   <a:srgbClr val="2C3E50"/>
                 </a:solidFill>
                 <a:latin typeface="WenQuanYi Micro Hei"/>
                 <a:ea typeface="WenQuanYi Micro Hei"/>
               </a:rPr>
-              <a:t>真正的平台地位不是把所有数据收到一个平台，而是让跨域消费者遵循自己的语义、QoD和证据契约，同时证明运行时、后端和渠道仍可互操作、可替换。</a:t>
+              <a:t>真正的平台地位不是把所有数据收到一个平台，而是让跨域消费者遵循自己的语义、QoD和证据契约，同时证明运行时、后端和渠道仍可互操作、可替换。标准更可能冻结这些外部行为，而不是替市场选出唯一Data Fabric。</a:t>
             </a:r>
           </a:p>
         </p:txBody>
@@ -14634,8 +15120,8 @@
         </p:nvSpPr>
         <p:spPr>
           <a:xfrm>
-            <a:off x="493776" y="6016752"/>
-            <a:ext cx="11183112" cy="384048"/>
+            <a:off x="493776" y="5980176"/>
+            <a:ext cx="11183112" cy="438912"/>
           </a:xfrm>
           <a:prstGeom prst="rect">
             <a:avLst/>
@@ -14648,7 +15134,7 @@
           <a:p>
             <a:pPr algn="l">
               <a:lnSpc>
-                <a:spcPct val="104000"/>
+                <a:spcPct val="103000"/>
               </a:lnSpc>
               <a:spcAft>
                 <a:spcPts val="100"/>
@@ -14662,7 +15148,7 @@
                 <a:latin typeface="WenQuanYi Micro Hei"/>
                 <a:ea typeface="WenQuanYi Micro Hei"/>
               </a:rPr>
-              <a:t>竞合边界：设备商更接近网络语义、近源执行与动作权限；云和湖仓更接近规模数据/模型运行时；聚合商更接近跨网分发与结算。三者可以组合，但RAN快环和网元动作权限不能外移。</a:t>
+              <a:t>竞合边界：设备商更接近网络语义、近源执行与动作权限；云和湖仓更接近规模数据/模型运行时；聚合商更接近跨网分发与结算。三者可以组合，但RAN快环和网元动作权限不能外移。Google Telecom Data Fabric仍为Private Preview，不能外推为已形成的跨网统一平台。</a:t>
             </a:r>
           </a:p>
         </p:txBody>

--- a/reports/6g-data-fabric-section-23-deck.pptx
+++ b/reports/6g-data-fabric-section-23-deck.pptx
@@ -3256,7 +3256,7 @@
                 <a:latin typeface="WenQuanYi Micro Hei"/>
                 <a:ea typeface="WenQuanYi Micro Hei"/>
               </a:rPr>
-              <a:t>6G数据能力不会收敛为单一Fabric；三条路线围绕同一组控制能力竞争</a:t>
+              <a:t>6G数据能力不会收敛为单一Fabric；两类技术架构承载三种竞争位置</a:t>
             </a:r>
           </a:p>
         </p:txBody>
@@ -3321,7 +3321,7 @@
                 <a:latin typeface="WenQuanYi Micro Hei"/>
                 <a:ea typeface="WenQuanYi Micro Hei"/>
               </a:rPr>
-              <a:t>三条路线来自同一组架构矛盾，不是对Fabric理解不同，更不是成熟度阶梯。Ericsson优先低风险演进，Huawei优先近源执行，Nokia优先产品化速度；真正要比较的是控制权放在哪里、以什么代价换什么优势。</a:t>
+              <a:t>产品命名和SKU边界不必然构成新的数据拓扑。Ericsson与Nokia共享相近的联邦分层骨架，分别从治理和自智应用进入；Huawei重构网络内数据处理拓扑。真正要比较的是技术底座、控制入口，以及以什么代价换什么优势。</a:t>
             </a:r>
           </a:p>
         </p:txBody>
@@ -4539,7 +4539,7 @@
                 <a:latin typeface="WenQuanYi Micro Hei"/>
                 <a:ea typeface="WenQuanYi Micro Hei"/>
               </a:rPr>
-              <a:t>决定路线</a:t>
+              <a:t>决定位置</a:t>
             </a:r>
           </a:p>
         </p:txBody>
@@ -4711,7 +4711,7 @@
                 <a:latin typeface="WenQuanYi Micro Hei"/>
                 <a:ea typeface="WenQuanYi Micro Hei"/>
               </a:rPr>
-              <a:t>Ericsson  ·  存量联邦</a:t>
+              <a:t>Ericsson  ·  联邦分层 / 治理入口</a:t>
             </a:r>
           </a:p>
         </p:txBody>
@@ -4922,7 +4922,7 @@
                 <a:latin typeface="WenQuanYi Micro Hei"/>
                 <a:ea typeface="WenQuanYi Micro Hei"/>
               </a:rPr>
-              <a:t>Huawei  ·  网络原生拓扑</a:t>
+              <a:t>Huawei  ·  网络原生 / 执行入口</a:t>
             </a:r>
           </a:p>
         </p:txBody>
@@ -5133,7 +5133,7 @@
                 <a:latin typeface="WenQuanYi Micro Hei"/>
                 <a:ea typeface="WenQuanYi Micro Hei"/>
               </a:rPr>
-              <a:t>Nokia  ·  分层商品化</a:t>
+              <a:t>Nokia  ·  联邦分层 / 应用入口</a:t>
             </a:r>
           </a:p>
         </p:txBody>
@@ -5174,7 +5174,7 @@
                 <a:latin typeface="WenQuanYi Micro Hei"/>
                 <a:ea typeface="WenQuanYi Micro Hei"/>
               </a:rPr>
-              <a:t>组合数据与自治软件</a:t>
+              <a:t>产品化数据—自智软件链</a:t>
             </a:r>
           </a:p>
         </p:txBody>
@@ -5215,7 +5215,7 @@
                 <a:latin typeface="WenQuanYi Micro Hei"/>
                 <a:ea typeface="WenQuanYi Micro Hei"/>
               </a:rPr>
-              <a:t>以分层SKU换产品化速度。先让目录、AI和应用可分别销售并进入现网，再验证各层是否共享同一契约和控制体系。</a:t>
+              <a:t>技术底座与Ericsson高度相似，差别在产品组织：把数据契约、智能消费和AN Apps包装成可售软件链，而不是形成第三种数据架构。</a:t>
             </a:r>
           </a:p>
         </p:txBody>
@@ -6177,7 +6177,7 @@
                 <a:latin typeface="WenQuanYi Micro Hei"/>
                 <a:ea typeface="WenQuanYi Micro Hei"/>
               </a:rPr>
-              <a:t>ITU-R、SA2/SA5、O-RAN和外部运营接口正在形成一条可组合链路，但并不共同要求一个名为Data Fabric的网元。标准冻结跨厂商必须一致的对象与接口，不替厂商选择内部拓扑，因此三条路线可以长期并存。</a:t>
+              <a:t>ITU-R、SA2/SA5、O-RAN和外部运营接口正在形成一条可组合链路，但并不共同要求一个名为Data Fabric的网元。标准冻结跨厂商必须一致的对象与接口，不替厂商选择内部拓扑，因此两类技术架构和不同产品入口可以长期并存。</a:t>
             </a:r>
           </a:p>
         </p:txBody>
@@ -6509,7 +6509,7 @@
                 <a:latin typeface="WenQuanYi Micro Hei"/>
                 <a:ea typeface="WenQuanYi Micro Hei"/>
               </a:rPr>
-              <a:t>跨域复用真正依赖对象能否对齐、质量能否声明、授权能否传递、动作能否回证。这是标准最可能先下手的控制层，也是三条路线最终都要交出的接口。</a:t>
+              <a:t>跨域复用真正依赖对象能否对齐、质量能否声明、授权能否传递、动作能否回证。这是标准最可能先下手的控制层，也是两类技术架构最终都要交出的接口。</a:t>
             </a:r>
           </a:p>
         </p:txBody>
@@ -11128,7 +11128,7 @@
                 <a:latin typeface="WenQuanYi Micro Hei"/>
                 <a:ea typeface="WenQuanYi Micro Hei"/>
               </a:rPr>
-              <a:t>Nokia分层商品化：产品进入现网最快，统一控制与开放性仍待证明</a:t>
+              <a:t>Nokia将联邦数据能力组织成自智软件链：优势在产品化入口，而非独立架构</a:t>
             </a:r>
           </a:p>
         </p:txBody>
@@ -11193,7 +11193,7 @@
                 <a:latin typeface="WenQuanYi Micro Hei"/>
                 <a:ea typeface="WenQuanYi Micro Hei"/>
               </a:rPr>
-              <a:t>这是一条“先产品化能力、再验证统一控制”的路线。Data Suite是数据管理层，AN Fabric是智能消费层；动作仍回OSS/RIC/SON，数据默认留域。两套Fabric不是同一层。真正的竞争问题是它们能否共享契约并贯通到动作证据。</a:t>
+              <a:t>Nokia与Ericsson共享“域内事实—联邦访问—治理语义—应用消费—域控制器动作”的相近骨架。Data Suite是数据供给与契约层，AN Fabric是智能消费层；Data Mesh主要支撑Sense，不是自智网络内核。真正的内核是状态—意图—策略—动作—结果—回滚闭环。</a:t>
             </a:r>
           </a:p>
         </p:txBody>
@@ -11699,7 +11699,7 @@
                 <a:latin typeface="WenQuanYi Micro Hei"/>
                 <a:ea typeface="WenQuanYi Micro Hei"/>
               </a:rPr>
-              <a:t>3  Data Suite</a:t>
+              <a:t>3  数据契约层 / Data Suite</a:t>
             </a:r>
           </a:p>
         </p:txBody>
@@ -11740,7 +11740,7 @@
                 <a:latin typeface="WenQuanYi Micro Hei"/>
                 <a:ea typeface="WenQuanYi Micro Hei"/>
               </a:rPr>
-              <a:t>目录、语义、QoD、血缘和数据产品，与治理最直接重合</a:t>
+              <a:t>稳定ID、语义、QoD、Owner、版本和血缘，统一数据供给</a:t>
             </a:r>
           </a:p>
         </p:txBody>
@@ -11867,7 +11867,7 @@
                 <a:latin typeface="WenQuanYi Micro Hei"/>
                 <a:ea typeface="WenQuanYi Micro Hei"/>
               </a:rPr>
-              <a:t>4  AN Fabric / AN Apps</a:t>
+              <a:t>4  自智消费层 / AN Fabric</a:t>
             </a:r>
           </a:p>
         </p:txBody>
@@ -11908,7 +11908,7 @@
                 <a:latin typeface="WenQuanYi Micro Hei"/>
                 <a:ea typeface="WenQuanYi Micro Hei"/>
               </a:rPr>
-              <a:t>Sense–Think–Act 智能消费与编排，不是数据管理Fabric</a:t>
+              <a:t>Sense–Think及应用编排；不统一实时状态、策略冲突和动作权限</a:t>
             </a:r>
           </a:p>
         </p:txBody>
@@ -12035,7 +12035,7 @@
                 <a:latin typeface="WenQuanYi Micro Hei"/>
                 <a:ea typeface="WenQuanYi Micro Hei"/>
               </a:rPr>
-              <a:t>5  域控制器 + API / Marketplace</a:t>
+              <a:t>5  动作闭环 + 商业外延</a:t>
             </a:r>
           </a:p>
         </p:txBody>
@@ -12076,7 +12076,7 @@
                 <a:latin typeface="WenQuanYi Micro Hei"/>
                 <a:ea typeface="WenQuanYi Micro Hei"/>
               </a:rPr>
-              <a:t>高风险动作回OSS/RIC/SON，再向计量和渠道外延</a:t>
+              <a:t>域控制器执行、结果验证和回滚，再连接API、计量与Marketplace</a:t>
             </a:r>
           </a:p>
         </p:txBody>
@@ -12268,7 +12268,7 @@
                 <a:latin typeface="WenQuanYi Micro Hei"/>
                 <a:ea typeface="WenQuanYi Micro Hei"/>
               </a:rPr>
-              <a:t>官方AN Fabric图只证明Sense–Think–Act智能层和Marketplace外延。</a:t>
+              <a:t>官方AN Fabric图只证明智能消费层和Marketplace外延，不能证明Data Mesh成为自智统一层。</a:t>
             </a:r>
           </a:p>
           <a:p>
@@ -12288,7 +12288,7 @@
                 <a:latin typeface="WenQuanYi Micro Hei"/>
                 <a:ea typeface="WenQuanYi Micro Hei"/>
               </a:rPr>
-              <a:t>Data Suite、域数据底座和公共湖仓不在这张图里，必须靠左侧自绘链路补齐，否则会把两套Fabric读成同一层。</a:t>
+              <a:t>Data Suite、域数据底座和公共湖仓不在图中；数据契约层与控制闭环必须分开读取。</a:t>
             </a:r>
           </a:p>
           <a:p>
@@ -12308,7 +12308,7 @@
                 <a:latin typeface="WenQuanYi Micro Hei"/>
                 <a:ea typeface="WenQuanYi Micro Hei"/>
               </a:rPr>
-              <a:t>高风险动作仍经AN Apps回到域控制器；公共层偏Non-RT，不能替代RAN快环。</a:t>
+              <a:t>高风险动作仍经AN Apps回到域控制器；公共层偏Non-RT，不能替代RAN快环、动作授权和回滚。</a:t>
             </a:r>
           </a:p>
         </p:txBody>
@@ -12437,7 +12437,7 @@
                 <a:latin typeface="WenQuanYi Micro Hei"/>
                 <a:ea typeface="WenQuanYi Micro Hei"/>
               </a:rPr>
-              <a:t>必须分层</a:t>
+              <a:t>统一的是数据契约</a:t>
             </a:r>
           </a:p>
         </p:txBody>
@@ -12478,7 +12478,7 @@
                 <a:latin typeface="WenQuanYi Micro Hei"/>
                 <a:ea typeface="WenQuanYi Micro Hei"/>
               </a:rPr>
-              <a:t>Data Suite管目录、语义、质量、血缘和产品；AN Fabric管智能消费与编排。</a:t>
+              <a:t>Data Suite可统一稳定ID、Schema、QoD、Owner、版本和血缘，使域数据被自智应用重复消费。</a:t>
             </a:r>
           </a:p>
           <a:p>
@@ -12498,7 +12498,7 @@
                 <a:latin typeface="WenQuanYi Micro Hei"/>
                 <a:ea typeface="WenQuanYi Micro Hei"/>
               </a:rPr>
-              <a:t>数据默认留域，公共层只做适配、抽象和联邦访问。支持多厂商只有经过第三方互操作和双向迁移，才构成中立性证据。</a:t>
+              <a:t>它不统一实时状态、策略冲突或动作权限；多厂商中立性仍需第三方互操作和双向迁移证明。</a:t>
             </a:r>
           </a:p>
         </p:txBody>
@@ -12627,7 +12627,7 @@
                 <a:latin typeface="WenQuanYi Micro Hei"/>
                 <a:ea typeface="WenQuanYi Micro Hei"/>
               </a:rPr>
-              <a:t>数据与控制如何流动</a:t>
+              <a:t>数据供给与控制闭环分层</a:t>
             </a:r>
           </a:p>
         </p:txBody>
@@ -12668,7 +12668,7 @@
                 <a:latin typeface="WenQuanYi Micro Hei"/>
                 <a:ea typeface="WenQuanYi Micro Hei"/>
               </a:rPr>
-              <a:t>域湖仓完成本地加工，经公共层进入Data Suite，再进入Sense，建立观察与chain-of-custody。</a:t>
+              <a:t>域湖仓完成本地加工，经公共层和Data Suite形成可消费的数据契约，再进入Sense。</a:t>
             </a:r>
           </a:p>
           <a:p>
@@ -12688,7 +12688,7 @@
                 <a:latin typeface="WenQuanYi Micro Hei"/>
                 <a:ea typeface="WenQuanYi Micro Hei"/>
               </a:rPr>
-              <a:t>Think使用电信模型和Glass-Box推理；Act通过AN Apps调用既有OSS/RIC/SON，再向计量和Marketplace延伸。</a:t>
+              <a:t>Think使用电信模型；Act经AN Apps调用OSS/RIC/SON。结果、回滚和责任证据必须返回控制闭环，而不是停在数据产品层。</a:t>
             </a:r>
           </a:p>
         </p:txBody>
@@ -12817,7 +12817,7 @@
                 <a:latin typeface="WenQuanYi Micro Hei"/>
                 <a:ea typeface="WenQuanYi Micro Hei"/>
               </a:rPr>
-              <a:t>竞争含义</a:t>
+              <a:t>产品化差异，而非架构异质</a:t>
             </a:r>
           </a:p>
         </p:txBody>
@@ -12858,7 +12858,7 @@
                 <a:latin typeface="WenQuanYi Micro Hei"/>
                 <a:ea typeface="WenQuanYi Micro Hei"/>
               </a:rPr>
-              <a:t>优势是SKU可组合、进入现网快，不必等待6G新网元标准。</a:t>
+              <a:t>与Ericsson相近的联邦底座被组织成Data Suite、AN Fabric和AN Apps等分层SKU，进入现网更快。</a:t>
             </a:r>
           </a:p>
           <a:p>
@@ -12878,7 +12878,7 @@
                 <a:latin typeface="WenQuanYi Micro Hei"/>
                 <a:ea typeface="WenQuanYi Micro Hei"/>
               </a:rPr>
-              <a:t>代价是各层可能只在品牌层组合，并形成语义、应用与云后端的软锁定。客户若只买域App，分层复利就落空。</a:t>
+              <a:t>若契约不共享、控制证据不贯通，各层就只是品牌组合；Data Mesh最多优化Sense侧供给，不能成为自智内核。</a:t>
             </a:r>
           </a:p>
         </p:txBody>
@@ -13169,7 +13169,7 @@
                 <a:latin typeface="WenQuanYi Micro Hei"/>
                 <a:ea typeface="WenQuanYi Micro Hei"/>
               </a:rPr>
-              <a:t>Data Suite与AN Fabric是否共享同一契约，第三方后端/Agent能否双向替换，动作与回滚证据能否贯通域控制器。</a:t>
+              <a:t>同一数据产品契约能否跨Data Suite、AN Fabric和第三方Agent复用；后端能否双向替换；输入、动作、结果与回滚证据能否贯通域控制器。</a:t>
             </a:r>
           </a:p>
         </p:txBody>
@@ -13480,7 +13480,7 @@
                 <a:latin typeface="WenQuanYi Micro Hei"/>
                 <a:ea typeface="WenQuanYi Micro Hei"/>
               </a:rPr>
-              <a:t>三条路线不构成成熟度序列；最终胜负由四类接口控制权决定</a:t>
+              <a:t>两类技术架构、三种产品位置；最终胜负由四类接口控制权决定</a:t>
             </a:r>
           </a:p>
         </p:txBody>
@@ -13545,7 +13545,7 @@
                 <a:latin typeface="WenQuanYi Micro Hei"/>
                 <a:ea typeface="WenQuanYi Micro Hei"/>
               </a:rPr>
-              <a:t>Ericsson争联邦治理，Huawei争近源运行时，Nokia争语义产品与应用入口。谁能定义这些能力的外部接口，同时允许执行层和后端替换，谁才更接近长期平台位置；谁只提供封闭组件或单点应用，谁就仍停留在项目层。</a:t>
+              <a:t>Ericsson与Nokia在相近联邦分层底座内竞争不同入口：前者争治理，后者把数据契约连接到自智应用；Huawei争网络原生近源运行时。谁能定义外部接口，同时允许执行层和后端替换，谁才更接近长期平台位置。</a:t>
             </a:r>
           </a:p>
         </p:txBody>
@@ -13613,7 +13613,7 @@
                           <a:latin typeface="WenQuanYi Micro Hei"/>
                           <a:ea typeface="WenQuanYi Micro Hei"/>
                         </a:rPr>
-                        <a:t>Ericsson  ·  存量联邦</a:t>
+                        <a:t>Ericsson  ·  联邦治理入口</a:t>
                       </a:r>
                     </a:p>
                   </a:txBody>
@@ -13637,7 +13637,7 @@
                           <a:latin typeface="WenQuanYi Micro Hei"/>
                           <a:ea typeface="WenQuanYi Micro Hei"/>
                         </a:rPr>
-                        <a:t>Huawei  ·  网络原生拓扑</a:t>
+                        <a:t>Huawei  ·  网络原生执行</a:t>
                       </a:r>
                     </a:p>
                   </a:txBody>
@@ -13661,7 +13661,7 @@
                           <a:latin typeface="WenQuanYi Micro Hei"/>
                           <a:ea typeface="WenQuanYi Micro Hei"/>
                         </a:rPr>
-                        <a:t>Nokia  ·  分层商品化</a:t>
+                        <a:t>Nokia  ·  联邦应用入口</a:t>
                       </a:r>
                     </a:p>
                   </a:txBody>
@@ -13759,7 +13759,7 @@
                           <a:latin typeface="WenQuanYi Micro Hei"/>
                           <a:ea typeface="WenQuanYi Micro Hei"/>
                         </a:rPr>
-                        <a:t>数据管理、自治应用和商业外延如何形成可售组合</a:t>
+                        <a:t>在相近联邦底座上把数据契约、自智应用和商业外延形成可售组合</a:t>
                       </a:r>
                     </a:p>
                   </a:txBody>
@@ -15066,7 +15066,7 @@
                 <a:latin typeface="WenQuanYi Micro Hei"/>
                 <a:ea typeface="WenQuanYi Micro Hei"/>
               </a:rPr>
-              <a:t>Ericsson争夺联邦目录与渐进治理控制权。Huawei争夺数据拓扑与近源运行时控制权。Nokia争夺语义产品与自治应用入口控制权。三者可替代也可互补，但都不是一条通向统一Fabric的成熟度阶梯。</a:t>
+              <a:t>Ericsson与Nokia共享相近联邦分层骨架：前者争联邦目录与渐进治理，后者把数据契约产品化并连接自治应用；Huawei争数据拓扑与近源运行时。三者是两类技术架构和三种产品位置，不是成熟度阶梯。</a:t>
             </a:r>
           </a:p>
         </p:txBody>
@@ -15107,7 +15107,7 @@
                 <a:latin typeface="WenQuanYi Micro Hei"/>
                 <a:ea typeface="WenQuanYi Micro Hei"/>
               </a:rPr>
-              <a:t>真正的平台地位不是把所有数据收到一个平台，而是让跨域消费者遵循自己的语义、QoD和证据契约，同时证明运行时、后端和渠道仍可互操作、可替换。标准更可能冻结这些外部行为，而不是替市场选出唯一Data Fabric。</a:t>
+              <a:t>真正的平台地位不是把所有数据收到一个平台，也不是把Data Mesh写成自智内核，而是让消费者遵循稳定语义、QoD和证据契约，同时让状态—意图—策略—动作—结果—回滚闭环可验证，并证明运行时、后端和渠道仍可替换。</a:t>
             </a:r>
           </a:p>
         </p:txBody>

--- a/reports/6g-data-fabric-section-23-deck.pptx
+++ b/reports/6g-data-fabric-section-23-deck.pptx
@@ -11128,7 +11128,7 @@
                 <a:latin typeface="WenQuanYi Micro Hei"/>
                 <a:ea typeface="WenQuanYi Micro Hei"/>
               </a:rPr>
-              <a:t>Nokia将联邦数据能力组织成自智软件链：优势在产品化入口，而非独立架构</a:t>
+              <a:t>Nokia以AN Fabric编织自智应用：共享数据与AI是内置能力，域控制器执行动作</a:t>
             </a:r>
           </a:p>
         </p:txBody>
@@ -11193,7 +11193,7 @@
                 <a:latin typeface="WenQuanYi Micro Hei"/>
                 <a:ea typeface="WenQuanYi Micro Hei"/>
               </a:rPr>
-              <a:t>Nokia与Ericsson共享“域内事实—联邦访问—治理语义—应用消费—域控制器动作”的相近骨架。Data Suite是数据供给与契约层，AN Fabric是智能消费层；Data Mesh主要支撑Sense，不是自智网络内核。真正的内核是状态—意图—策略—动作—结果—回滚闭环。</a:t>
+              <a:t>AN Fabric是自智网络的公共智能服务平台，内部包含共享数据管理、AIOps、安全与自治域服务；Data Suite和其他AN Apps通过API使用这些能力。ANF承载上层意图和应用编排，但具体实时资源动作仍由OSS、SMO、RIC、SON及域控制器执行。</a:t>
             </a:r>
           </a:p>
         </p:txBody>
@@ -11279,7 +11279,7 @@
                 <a:latin typeface="WenQuanYi Micro Hei"/>
                 <a:ea typeface="WenQuanYi Micro Hei"/>
               </a:rPr>
-              <a:t>主视觉  ·  自绘五段链</a:t>
+              <a:t>主视觉  ·  官方定位还原</a:t>
             </a:r>
           </a:p>
         </p:txBody>
@@ -11363,7 +11363,7 @@
                 <a:latin typeface="WenQuanYi Micro Hei"/>
                 <a:ea typeface="WenQuanYi Micro Hei"/>
               </a:rPr>
-              <a:t>1  域数据底座</a:t>
+              <a:t>1  网络与OSS数据</a:t>
             </a:r>
           </a:p>
         </p:txBody>
@@ -11404,7 +11404,7 @@
                 <a:latin typeface="WenQuanYi Micro Hei"/>
                 <a:ea typeface="WenQuanYi Micro Hei"/>
               </a:rPr>
-              <a:t>Domain lakehouse  ·  各域本地采集、加工与存储</a:t>
+              <a:t>RAN、Core、Transport、Fixed及OSS持续产生状态与事件</a:t>
             </a:r>
           </a:p>
         </p:txBody>
@@ -11531,7 +11531,7 @@
                 <a:latin typeface="WenQuanYi Micro Hei"/>
                 <a:ea typeface="WenQuanYi Micro Hei"/>
               </a:rPr>
-              <a:t>2  Common Fabric / Lakehouse</a:t>
+              <a:t>2  AN Fabric公共服务</a:t>
             </a:r>
           </a:p>
         </p:txBody>
@@ -11572,7 +11572,7 @@
                 <a:latin typeface="WenQuanYi Micro Hei"/>
                 <a:ea typeface="WenQuanYi Micro Hei"/>
               </a:rPr>
-              <a:t>适配、抽象和联邦访问，提供逻辑视图而非强制集中</a:t>
+              <a:t>Data Management、AIOps、Security与Autonomous Domain Services</a:t>
             </a:r>
           </a:p>
         </p:txBody>
@@ -11699,7 +11699,7 @@
                 <a:latin typeface="WenQuanYi Micro Hei"/>
                 <a:ea typeface="WenQuanYi Micro Hei"/>
               </a:rPr>
-              <a:t>3  数据契约层 / Data Suite</a:t>
+              <a:t>3  AN Apps / Data Suite</a:t>
             </a:r>
           </a:p>
         </p:txBody>
@@ -11740,7 +11740,7 @@
                 <a:latin typeface="WenQuanYi Micro Hei"/>
                 <a:ea typeface="WenQuanYi Micro Hei"/>
               </a:rPr>
-              <a:t>稳定ID、语义、QoD、Owner、版本和血缘，统一数据供给</a:t>
+              <a:t>数据产品、业务/运营意图、分析和自动化工作流</a:t>
             </a:r>
           </a:p>
         </p:txBody>
@@ -11867,7 +11867,7 @@
                 <a:latin typeface="WenQuanYi Micro Hei"/>
                 <a:ea typeface="WenQuanYi Micro Hei"/>
               </a:rPr>
-              <a:t>4  自智消费层 / AN Fabric</a:t>
+              <a:t>4  域控制与编排</a:t>
             </a:r>
           </a:p>
         </p:txBody>
@@ -11908,7 +11908,7 @@
                 <a:latin typeface="WenQuanYi Micro Hei"/>
                 <a:ea typeface="WenQuanYi Micro Hei"/>
               </a:rPr>
-              <a:t>Sense–Think及应用编排；不统一实时状态、策略冲突和动作权限</a:t>
+              <a:t>OSS、SMO、RIC、SON及域控制器保留状态与动作权限</a:t>
             </a:r>
           </a:p>
         </p:txBody>
@@ -12035,7 +12035,7 @@
                 <a:latin typeface="WenQuanYi Micro Hei"/>
                 <a:ea typeface="WenQuanYi Micro Hei"/>
               </a:rPr>
-              <a:t>5  动作闭环 + 商业外延</a:t>
+              <a:t>5  网元动作与回证</a:t>
             </a:r>
           </a:p>
         </p:txBody>
@@ -12076,7 +12076,7 @@
                 <a:latin typeface="WenQuanYi Micro Hei"/>
                 <a:ea typeface="WenQuanYi Micro Hei"/>
               </a:rPr>
-              <a:t>域控制器执行、结果验证和回滚，再连接API、计量与Marketplace</a:t>
+              <a:t>执行、自愈、结果、回滚；证据返回应用和公共服务</a:t>
             </a:r>
           </a:p>
         </p:txBody>
@@ -12227,7 +12227,7 @@
                 <a:latin typeface="WenQuanYi Micro Hei"/>
                 <a:ea typeface="WenQuanYi Micro Hei"/>
               </a:rPr>
-              <a:t>官方图  仅证智能消费层</a:t>
+              <a:t>官方图  ANF为应用公共底座</a:t>
             </a:r>
           </a:p>
         </p:txBody>
@@ -12268,7 +12268,7 @@
                 <a:latin typeface="WenQuanYi Micro Hei"/>
                 <a:ea typeface="WenQuanYi Micro Hei"/>
               </a:rPr>
-              <a:t>官方AN Fabric图只证明智能消费层和Marketplace外延，不能证明Data Mesh成为自智统一层。</a:t>
+              <a:t>官方白皮书：ANF包含Data Management、AIOps和Autonomous Domain Services，AN Apps经内部API使用这些服务。</a:t>
             </a:r>
           </a:p>
           <a:p>
@@ -12288,7 +12288,7 @@
                 <a:latin typeface="WenQuanYi Micro Hei"/>
                 <a:ea typeface="WenQuanYi Micro Hei"/>
               </a:rPr>
-              <a:t>Data Suite、域数据底座和公共湖仓不在图中；数据契约层与控制闭环必须分开读取。</a:t>
+              <a:t>Data Suite官网：属于AN应用栈并由AN Fabric驱动；因此不能画成ANF上游的独立数据平台。</a:t>
             </a:r>
           </a:p>
           <a:p>
@@ -12308,7 +12308,7 @@
                 <a:latin typeface="WenQuanYi Micro Hei"/>
                 <a:ea typeface="WenQuanYi Micro Hei"/>
               </a:rPr>
-              <a:t>高风险动作仍经AN Apps回到域控制器；公共层偏Non-RT，不能替代RAN快环、动作授权和回滚。</a:t>
+              <a:t>官方图未画OSS、SMO、RIC、SON或网元路径；不能据此断言ANF直接承担全部资源控制。</a:t>
             </a:r>
           </a:p>
         </p:txBody>
@@ -12437,7 +12437,7 @@
                 <a:latin typeface="WenQuanYi Micro Hei"/>
                 <a:ea typeface="WenQuanYi Micro Hei"/>
               </a:rPr>
-              <a:t>统一的是数据契约</a:t>
+              <a:t>ANF内含数据编织能力</a:t>
             </a:r>
           </a:p>
         </p:txBody>
@@ -12478,7 +12478,7 @@
                 <a:latin typeface="WenQuanYi Micro Hei"/>
                 <a:ea typeface="WenQuanYi Micro Hei"/>
               </a:rPr>
-              <a:t>Data Suite可统一稳定ID、Schema、QoD、Owner、版本和血缘，使域数据被自智应用重复消费。</a:t>
+              <a:t>统一数据管理不是ANF外部前置层，而是其公共服务之一：网络数据被采集、治理、关联并发布为可复用数据产品。</a:t>
             </a:r>
           </a:p>
           <a:p>
@@ -12498,7 +12498,7 @@
                 <a:latin typeface="WenQuanYi Micro Hei"/>
                 <a:ea typeface="WenQuanYi Micro Hei"/>
               </a:rPr>
-              <a:t>它不统一实时状态、策略冲突或动作权限；多厂商中立性仍需第三方互操作和双向迁移证明。</a:t>
+              <a:t>Data Suite将目录、血缘、质量、语义和产品能力形成用户入口，支撑AI和自动化应用。</a:t>
             </a:r>
           </a:p>
         </p:txBody>
@@ -12627,7 +12627,7 @@
                 <a:latin typeface="WenQuanYi Micro Hei"/>
                 <a:ea typeface="WenQuanYi Micro Hei"/>
               </a:rPr>
-              <a:t>数据供给与控制闭环分层</a:t>
+              <a:t>AN Apps承载意图与用例</a:t>
             </a:r>
           </a:p>
         </p:txBody>
@@ -12668,7 +12668,7 @@
                 <a:latin typeface="WenQuanYi Micro Hei"/>
                 <a:ea typeface="WenQuanYi Micro Hei"/>
               </a:rPr>
-              <a:t>域湖仓完成本地加工，经公共层和Data Suite形成可消费的数据契约，再进入Sense。</a:t>
+              <a:t>AN Apps面向运营、网络安全和用户体验，使用ANF的数据、模型、知识和自治域服务。</a:t>
             </a:r>
           </a:p>
           <a:p>
@@ -12688,7 +12688,7 @@
                 <a:latin typeface="WenQuanYi Micro Hei"/>
                 <a:ea typeface="WenQuanYi Micro Hei"/>
               </a:rPr>
-              <a:t>Think使用电信模型；Act经AN Apps调用OSS/RIC/SON。结果、回滚和责任证据必须返回控制闭环，而不是停在数据产品层。</a:t>
+              <a:t>它们解释业务/运营意图并编排分析与自动化工作流；Fabric Experience和Marketplace承接体验及商业入口。</a:t>
             </a:r>
           </a:p>
         </p:txBody>
@@ -12817,7 +12817,7 @@
                 <a:latin typeface="WenQuanYi Micro Hei"/>
                 <a:ea typeface="WenQuanYi Micro Hei"/>
               </a:rPr>
-              <a:t>产品化差异，而非架构异质</a:t>
+              <a:t>域控制器执行资源动作</a:t>
             </a:r>
           </a:p>
         </p:txBody>
@@ -12858,7 +12858,7 @@
                 <a:latin typeface="WenQuanYi Micro Hei"/>
                 <a:ea typeface="WenQuanYi Micro Hei"/>
               </a:rPr>
-              <a:t>与Ericsson相近的联邦底座被组织成Data Suite、AN Fabric和AN Apps等分层SKU，进入现网更快。</a:t>
+              <a:t>服务层给出目标、分析和动作请求，SMO、RIC、SON、OSS及域控制器完成具体控制并保留实时状态。</a:t>
             </a:r>
           </a:p>
           <a:p>
@@ -12878,7 +12878,7 @@
                 <a:latin typeface="WenQuanYi Micro Hei"/>
                 <a:ea typeface="WenQuanYi Micro Hei"/>
               </a:rPr>
-              <a:t>若契约不共享、控制证据不贯通，各层就只是品牌组合；Data Mesh最多优化Sense侧供给，不能成为自智内核。</a:t>
+              <a:t>KDDI与stc案例证明域级恢复和SON动作，不证明完整ANF已经成为跨域统一资源控制面。</a:t>
             </a:r>
           </a:p>
         </p:txBody>
@@ -12964,7 +12964,7 @@
                 <a:latin typeface="WenQuanYi Micro Hei"/>
                 <a:ea typeface="WenQuanYi Micro Hei"/>
               </a:rPr>
-              <a:t>域应用已证</a:t>
+              <a:t>官方架构已证</a:t>
             </a:r>
           </a:p>
         </p:txBody>
@@ -13005,7 +13005,7 @@
                 <a:latin typeface="WenQuanYi Micro Hei"/>
                 <a:ea typeface="WenQuanYi Micro Hei"/>
               </a:rPr>
-              <a:t>KDDI覆盖20万4G/5G RAN；stc披露超过1万次自动动作和性能改善；Indosat证明节能应用可扩展。它们证明域级闭环，不证明统一跨域Fabric。</a:t>
+              <a:t>ANF包含Data Management、AIOps与Autonomous Domain Services；AN Apps经API使用公共能力，Data Suite由ANF驱动。</a:t>
             </a:r>
           </a:p>
         </p:txBody>
@@ -13046,7 +13046,7 @@
                 <a:latin typeface="WenQuanYi Micro Hei"/>
                 <a:ea typeface="WenQuanYi Micro Hei"/>
               </a:rPr>
-              <a:t>规模信号</a:t>
+              <a:t>域执行已证</a:t>
             </a:r>
           </a:p>
         </p:txBody>
@@ -13087,7 +13087,7 @@
                 <a:latin typeface="WenQuanYi Micro Hei"/>
                 <a:ea typeface="WenQuanYi Micro Hei"/>
               </a:rPr>
-              <a:t>匿名Tier-1：25万小区、27万报告/秒，仅支持摄取与关联潜力。因客户未具名，不能外推广泛跨域商用。</a:t>
+              <a:t>KDDI 20万RAN由Recovery System恢复；stc MantaRay SON执行&gt;1万次动作。证明域控制，不证明完整ANF统一栈。</a:t>
             </a:r>
           </a:p>
         </p:txBody>
@@ -13169,7 +13169,7 @@
                 <a:latin typeface="WenQuanYi Micro Hei"/>
                 <a:ea typeface="WenQuanYi Micro Hei"/>
               </a:rPr>
-              <a:t>同一数据产品契约能否跨Data Suite、AN Fabric和第三方Agent复用；后端能否双向替换；输入、动作、结果与回滚证据能否贯通域控制器。</a:t>
+              <a:t>具名部署中，Data Suite能否被第三方AN Apps复用，ANF意图能否经开放接口进入多厂商域控制器，并返回动作、结果与回滚证据。</a:t>
             </a:r>
           </a:p>
         </p:txBody>

--- a/reports/6g-data-fabric-section-23-deck.pptx
+++ b/reports/6g-data-fabric-section-23-deck.pptx
@@ -3825,7 +3825,7 @@
                 <a:latin typeface="WenQuanYi Micro Hei"/>
                 <a:ea typeface="WenQuanYi Micro Hei"/>
               </a:rPr>
-              <a:t>模型与产品要跨RAN、Core、OSS/BSS复用，必须有稳定对象、上下文、QoD和版本。名称相似不等于跨域语义已经对齐。</a:t>
+              <a:t>模型与产品要跨RAN、Core、OSS/BSS复用，必须有稳定对象、上下文、任务适用性和版本。名称相似不等于跨域语义已经对齐。</a:t>
             </a:r>
           </a:p>
         </p:txBody>
@@ -5510,7 +5510,7 @@
                 <a:latin typeface="WenQuanYi Micro Hei"/>
                 <a:ea typeface="WenQuanYi Micro Hei"/>
               </a:rPr>
-              <a:t>QoD / 产品契约</a:t>
+              <a:t>任务适用性/ 产品契约</a:t>
             </a:r>
           </a:p>
         </p:txBody>
@@ -6468,7 +6468,7 @@
                 <a:latin typeface="WenQuanYi Micro Hei"/>
                 <a:ea typeface="WenQuanYi Micro Hei"/>
               </a:rPr>
-              <a:t>稳定ID  ·  最小元数据  ·  QoD  ·  授权  ·  动作证据</a:t>
+              <a:t>稳定ID  ·  最小元数据  · 任务适用性 ·  授权  ·  动作证据</a:t>
             </a:r>
           </a:p>
         </p:txBody>
@@ -6931,7 +6931,7 @@
                 <a:latin typeface="WenQuanYi Micro Hei"/>
                 <a:ea typeface="WenQuanYi Micro Hei"/>
               </a:rPr>
-              <a:t>角色、稳定标识、最小元数据、交付控制、QoD/授权/证据挂钩点，以及一致性测试。</a:t>
+              <a:t>角色、稳定标识、最小元数据、交付控制、任务适用性/授权/证据挂钩点，以及一致性测试。</a:t>
             </a:r>
           </a:p>
           <a:p>
@@ -8847,7 +8847,7 @@
                 <a:latin typeface="WenQuanYi Micro Hei"/>
                 <a:ea typeface="WenQuanYi Micro Hei"/>
               </a:rPr>
-              <a:t>代价是跨产品Schema、QoD、策略和版本可能长期碎片化；协调成本若高于替换成本，联邦优势会下降。</a:t>
+              <a:t>代价是跨产品Schema、任务适用性、策略和版本可能长期碎片化；协调成本若高于替换成本，联邦优势会下降。</a:t>
             </a:r>
           </a:p>
         </p:txBody>
@@ -9514,7 +9514,7 @@
                 <a:latin typeface="WenQuanYi Micro Hei"/>
                 <a:ea typeface="WenQuanYi Micro Hei"/>
               </a:rPr>
-              <a:t>这是一条“先重构执行、再决定治理边界”的路线：DO编排拓扑，DA近源处理，DCP异步分发。它首先是6G数据面机制，能吸收部分发现、编排和交付能力，但不会自动解决跨域语义、QoD、血缘与产品责任。不能把“补成Fabric”当成唯一终点。</a:t>
+              <a:t>这是一条“先重构执行、再决定治理边界”的路线：DO编排拓扑，DA近源处理，DCP异步分发。它首先是6G数据面机制，能吸收部分发现、编排和交付能力，但不会自动解决跨域语义、任务适用性、血缘与产品责任。不能把“补成Fabric”当成唯一终点。</a:t>
             </a:r>
           </a:p>
         </p:txBody>
@@ -14103,7 +14103,7 @@
                           <a:latin typeface="WenQuanYi Micro Hei"/>
                           <a:ea typeface="WenQuanYi Micro Hei"/>
                         </a:rPr>
-                        <a:t>跨产品语义、QoD、策略和版本协调持续存在</a:t>
+                        <a:t>跨产品语义、任务适用性、策略和版本协调持续存在</a:t>
                       </a:r>
                     </a:p>
                   </a:txBody>
@@ -14558,7 +14558,7 @@
                 <a:latin typeface="WenQuanYi Micro Hei"/>
                 <a:ea typeface="WenQuanYi Micro Hei"/>
               </a:rPr>
-              <a:t>2  QoD与产品契约</a:t>
+              <a:t>2 任务适用性与产品契约</a:t>
             </a:r>
           </a:p>
         </p:txBody>
@@ -15107,7 +15107,7 @@
                 <a:latin typeface="WenQuanYi Micro Hei"/>
                 <a:ea typeface="WenQuanYi Micro Hei"/>
               </a:rPr>
-              <a:t>真正的平台地位不是把所有数据收到一个平台，也不是把Data Mesh写成自智内核，而是让消费者遵循稳定语义、QoD和证据契约，同时让状态—意图—策略—动作—结果—回滚闭环可验证，并证明运行时、后端和渠道仍可替换。</a:t>
+              <a:t>真正的平台地位不是把所有数据收到一个平台，也不是把Data Mesh写成自智内核，而是让消费者遵循稳定语义、任务适用性和证据契约，同时让状态—意图—策略—动作—结果—回滚闭环可验证，并证明运行时、后端和渠道仍可替换。</a:t>
             </a:r>
           </a:p>
         </p:txBody>
